--- a/Vibe coding og AI-assisteret udvikling af geodata-dashboards - Steen Hulthin Rasmussen - SSI - 14.11.2025.pptx
+++ b/Vibe coding og AI-assisteret udvikling af geodata-dashboards - Steen Hulthin Rasmussen - SSI - 14.11.2025.pptx
@@ -411,7 +411,7 @@
           <a:p>
             <a:fld id="{8626F44B-62AD-4BD9-9C5A-F0A4BDDA55B5}" type="datetimeFigureOut">
               <a:rPr lang="da-DK" smtClean="0"/>
-              <a:t>06-11-2025</a:t>
+              <a:t>07-11-2025</a:t>
             </a:fld>
             <a:endParaRPr lang="da-DK"/>
           </a:p>
@@ -5208,7 +5208,7 @@
             <a:fld id="{BE0C0513-934A-41A1-AF92-F7422FCEADC1}" type="datetimeFigureOut">
               <a:rPr lang="da-DK" smtClean="0"/>
               <a:pPr/>
-              <a:t>06-11-2025</a:t>
+              <a:t>07-11-2025</a:t>
             </a:fld>
             <a:endParaRPr lang="da-DK"/>
           </a:p>
@@ -5824,54 +5824,72 @@
             <p:ph type="title"/>
           </p:nvPr>
         </p:nvSpPr>
-        <p:spPr/>
+        <p:spPr>
+          <a:xfrm>
+            <a:off x="720000" y="453357"/>
+            <a:ext cx="9290274" cy="1079608"/>
+          </a:xfrm>
+        </p:spPr>
         <p:txBody>
           <a:bodyPr/>
           <a:lstStyle/>
           <a:p>
             <a:r>
-              <a:rPr lang="en-US" err="1">
+              <a:rPr lang="en-US" dirty="0" err="1">
                 <a:ea typeface="Calibri"/>
                 <a:cs typeface="Calibri"/>
               </a:rPr>
               <a:t>Resultaterne</a:t>
             </a:r>
             <a:r>
-              <a:rPr lang="en-US">
+              <a:rPr lang="en-US" dirty="0">
                 <a:ea typeface="Calibri"/>
                 <a:cs typeface="Calibri"/>
               </a:rPr>
               <a:t> – </a:t>
             </a:r>
             <a:r>
-              <a:rPr lang="en-US" err="1">
+              <a:rPr lang="en-US" dirty="0" err="1">
                 <a:ea typeface="Calibri"/>
                 <a:cs typeface="Calibri"/>
               </a:rPr>
               <a:t>kunne</a:t>
             </a:r>
             <a:r>
-              <a:rPr lang="en-US">
+              <a:rPr lang="en-US" dirty="0">
                 <a:ea typeface="Calibri"/>
                 <a:cs typeface="Calibri"/>
               </a:rPr>
               <a:t> AI lave dashboards med </a:t>
             </a:r>
             <a:r>
-              <a:rPr lang="en-US" err="1">
+              <a:rPr lang="en-US" dirty="0" err="1">
                 <a:ea typeface="Calibri"/>
                 <a:cs typeface="Calibri"/>
               </a:rPr>
               <a:t>kort</a:t>
             </a:r>
             <a:r>
-              <a:rPr lang="en-US">
+              <a:rPr lang="en-US" dirty="0">
                 <a:ea typeface="Calibri"/>
                 <a:cs typeface="Calibri"/>
               </a:rPr>
               <a:t>?</a:t>
             </a:r>
-            <a:endParaRPr lang="en-US" err="1"/>
+            <a:br>
+              <a:rPr lang="en-US" dirty="0">
+                <a:ea typeface="Calibri"/>
+                <a:cs typeface="Calibri"/>
+              </a:rPr>
+            </a:br>
+            <a:r>
+              <a:rPr lang="en-US" dirty="0" err="1">
+                <a:ea typeface="Calibri"/>
+                <a:cs typeface="Calibri"/>
+              </a:rPr>
+              <a:t>Streamlit</a:t>
+            </a:r>
+            <a:endParaRPr lang="en-US" dirty="0"/>
           </a:p>
         </p:txBody>
       </p:sp>
@@ -5898,31 +5916,6 @@
           <a:p>
             <a:pPr marL="341630" indent="-341630"/>
             <a:r>
-              <a:rPr lang="en-US" dirty="0" err="1">
-                <a:solidFill>
-                  <a:srgbClr val="000000"/>
-                </a:solidFill>
-                <a:latin typeface="Calibri"/>
-                <a:ea typeface="Calibri"/>
-                <a:cs typeface="Arial"/>
-              </a:rPr>
-              <a:t>Streamlit</a:t>
-            </a:r>
-            <a:r>
-              <a:rPr lang="en-US" dirty="0">
-                <a:solidFill>
-                  <a:srgbClr val="000000"/>
-                </a:solidFill>
-                <a:latin typeface="Calibri"/>
-                <a:ea typeface="Calibri"/>
-                <a:cs typeface="Arial"/>
-              </a:rPr>
-              <a:t> - prompts → global prototype</a:t>
-            </a:r>
-          </a:p>
-          <a:p>
-            <a:pPr marL="341630" indent="-341630"/>
-            <a:r>
               <a:rPr lang="en-US" dirty="0">
                 <a:solidFill>
                   <a:srgbClr val="000000"/>
@@ -7411,6 +7404,88 @@
   <p:clrMapOvr>
     <a:masterClrMapping/>
   </p:clrMapOvr>
+  <p:timing>
+    <p:tnLst>
+      <p:par>
+        <p:cTn id="1" dur="indefinite" restart="never" nodeType="tmRoot">
+          <p:childTnLst>
+            <p:seq concurrent="1" nextAc="seek">
+              <p:cTn id="2" dur="indefinite" nodeType="mainSeq">
+                <p:childTnLst>
+                  <p:par>
+                    <p:cTn id="3" fill="hold">
+                      <p:stCondLst>
+                        <p:cond delay="indefinite"/>
+                      </p:stCondLst>
+                      <p:childTnLst>
+                        <p:par>
+                          <p:cTn id="4" fill="hold">
+                            <p:stCondLst>
+                              <p:cond delay="0"/>
+                            </p:stCondLst>
+                            <p:childTnLst>
+                              <p:par>
+                                <p:cTn id="5" presetID="1" presetClass="entr" presetSubtype="0" fill="hold" nodeType="clickEffect">
+                                  <p:stCondLst>
+                                    <p:cond delay="0"/>
+                                  </p:stCondLst>
+                                  <p:iterate type="wd">
+                                    <p:tmAbs val="170"/>
+                                  </p:iterate>
+                                  <p:childTnLst>
+                                    <p:set>
+                                      <p:cBhvr>
+                                        <p:cTn id="6" dur="1" fill="hold">
+                                          <p:stCondLst>
+                                            <p:cond delay="0"/>
+                                          </p:stCondLst>
+                                        </p:cTn>
+                                        <p:tgtEl>
+                                          <p:spTgt spid="3">
+                                            <p:txEl>
+                                              <p:pRg st="0" end="0"/>
+                                            </p:txEl>
+                                          </p:spTgt>
+                                        </p:tgtEl>
+                                        <p:attrNameLst>
+                                          <p:attrName>style.visibility</p:attrName>
+                                        </p:attrNameLst>
+                                      </p:cBhvr>
+                                      <p:to>
+                                        <p:strVal val="visible"/>
+                                      </p:to>
+                                    </p:set>
+                                  </p:childTnLst>
+                                </p:cTn>
+                              </p:par>
+                            </p:childTnLst>
+                          </p:cTn>
+                        </p:par>
+                      </p:childTnLst>
+                    </p:cTn>
+                  </p:par>
+                </p:childTnLst>
+              </p:cTn>
+              <p:prevCondLst>
+                <p:cond evt="onPrev" delay="0">
+                  <p:tgtEl>
+                    <p:sldTgt/>
+                  </p:tgtEl>
+                </p:cond>
+              </p:prevCondLst>
+              <p:nextCondLst>
+                <p:cond evt="onNext" delay="0">
+                  <p:tgtEl>
+                    <p:sldTgt/>
+                  </p:tgtEl>
+                </p:cond>
+              </p:nextCondLst>
+            </p:seq>
+          </p:childTnLst>
+        </p:cTn>
+      </p:par>
+    </p:tnLst>
+  </p:timing>
 </p:sld>
 </file>
 
@@ -7583,19 +7658,6 @@
           <a:lstStyle/>
           <a:p>
             <a:r>
-              <a:rPr lang="da-DK" dirty="0" err="1"/>
-              <a:t>Geojson</a:t>
-            </a:r>
-            <a:r>
-              <a:rPr lang="da-DK" dirty="0"/>
-              <a:t>-dansefest, simplificering og prompts, der fejlede</a:t>
-            </a:r>
-          </a:p>
-          <a:p>
-            <a:endParaRPr lang="da-DK" dirty="0"/>
-          </a:p>
-          <a:p>
-            <a:r>
               <a:rPr lang="da-DK" dirty="0"/>
               <a:t>Prompt: "Jeg vil gerne have en app med et kort over Danmark inddelt i regioner. Kortet skal vise et timelapse over indlæggelser over tid baseret på det danske data. Tænker du Dash eller </a:t>
             </a:r>
@@ -7649,6 +7711,88 @@
   <p:clrMapOvr>
     <a:masterClrMapping/>
   </p:clrMapOvr>
+  <p:timing>
+    <p:tnLst>
+      <p:par>
+        <p:cTn id="1" dur="indefinite" restart="never" nodeType="tmRoot">
+          <p:childTnLst>
+            <p:seq concurrent="1" nextAc="seek">
+              <p:cTn id="2" dur="indefinite" nodeType="mainSeq">
+                <p:childTnLst>
+                  <p:par>
+                    <p:cTn id="3" fill="hold">
+                      <p:stCondLst>
+                        <p:cond delay="indefinite"/>
+                      </p:stCondLst>
+                      <p:childTnLst>
+                        <p:par>
+                          <p:cTn id="4" fill="hold">
+                            <p:stCondLst>
+                              <p:cond delay="0"/>
+                            </p:stCondLst>
+                            <p:childTnLst>
+                              <p:par>
+                                <p:cTn id="5" presetID="1" presetClass="entr" presetSubtype="0" fill="hold" nodeType="clickEffect">
+                                  <p:stCondLst>
+                                    <p:cond delay="0"/>
+                                  </p:stCondLst>
+                                  <p:iterate type="wd">
+                                    <p:tmAbs val="170"/>
+                                  </p:iterate>
+                                  <p:childTnLst>
+                                    <p:set>
+                                      <p:cBhvr>
+                                        <p:cTn id="6" dur="1" fill="hold">
+                                          <p:stCondLst>
+                                            <p:cond delay="0"/>
+                                          </p:stCondLst>
+                                        </p:cTn>
+                                        <p:tgtEl>
+                                          <p:spTgt spid="3">
+                                            <p:txEl>
+                                              <p:pRg st="0" end="0"/>
+                                            </p:txEl>
+                                          </p:spTgt>
+                                        </p:tgtEl>
+                                        <p:attrNameLst>
+                                          <p:attrName>style.visibility</p:attrName>
+                                        </p:attrNameLst>
+                                      </p:cBhvr>
+                                      <p:to>
+                                        <p:strVal val="visible"/>
+                                      </p:to>
+                                    </p:set>
+                                  </p:childTnLst>
+                                </p:cTn>
+                              </p:par>
+                            </p:childTnLst>
+                          </p:cTn>
+                        </p:par>
+                      </p:childTnLst>
+                    </p:cTn>
+                  </p:par>
+                </p:childTnLst>
+              </p:cTn>
+              <p:prevCondLst>
+                <p:cond evt="onPrev" delay="0">
+                  <p:tgtEl>
+                    <p:sldTgt/>
+                  </p:tgtEl>
+                </p:cond>
+              </p:prevCondLst>
+              <p:nextCondLst>
+                <p:cond evt="onNext" delay="0">
+                  <p:tgtEl>
+                    <p:sldTgt/>
+                  </p:tgtEl>
+                </p:cond>
+              </p:nextCondLst>
+            </p:seq>
+          </p:childTnLst>
+        </p:cTn>
+      </p:par>
+    </p:tnLst>
+  </p:timing>
 </p:sld>
 </file>
 
@@ -7939,26 +8083,15 @@
           <a:p>
             <a:pPr marL="341630" indent="-341630"/>
             <a:r>
-              <a:rPr lang="en-US" dirty="0" err="1">
-                <a:solidFill>
-                  <a:srgbClr val="000000"/>
-                </a:solidFill>
-                <a:latin typeface="Calibri"/>
-                <a:ea typeface="Calibri"/>
-                <a:cs typeface="Arial"/>
-              </a:rPr>
-              <a:t>Propy</a:t>
-            </a:r>
-            <a:r>
-              <a:rPr lang="en-US" dirty="0">
-                <a:solidFill>
-                  <a:srgbClr val="000000"/>
-                </a:solidFill>
-                <a:latin typeface="Calibri"/>
-                <a:ea typeface="Calibri"/>
-                <a:cs typeface="Arial"/>
-              </a:rPr>
-              <a:t>-workflow, Living Atlas, </a:t>
+              <a:rPr lang="en-US" dirty="0">
+                <a:solidFill>
+                  <a:srgbClr val="000000"/>
+                </a:solidFill>
+                <a:latin typeface="Calibri"/>
+                <a:ea typeface="Calibri"/>
+                <a:cs typeface="Arial"/>
+              </a:rPr>
+              <a:t>Living Atlas, </a:t>
             </a:r>
             <a:r>
               <a:rPr lang="en-US" dirty="0" err="1">
@@ -8005,6 +8138,16 @@
               <a:t> 3D</a:t>
             </a:r>
             <a:endParaRPr lang="en-US" dirty="0"/>
+          </a:p>
+          <a:p>
+            <a:pPr marL="683895" lvl="1" indent="-341630">
+              <a:buFont typeface="Courier New" panose="020B0604020202020204" pitchFamily="34" charset="0"/>
+              <a:buChar char="o"/>
+            </a:pPr>
+            <a:endParaRPr lang="en-US" dirty="0">
+              <a:ea typeface="+mn-lt"/>
+              <a:cs typeface="+mn-lt"/>
+            </a:endParaRPr>
           </a:p>
           <a:p>
             <a:pPr marL="683895" lvl="1" indent="-341630">
@@ -9213,38 +9356,94 @@
           </a:p>
         </p:txBody>
       </p:sp>
-      <p:pic>
-        <p:nvPicPr>
-          <p:cNvPr id="6" name="Content Placeholder 5">
+      <p:sp>
+        <p:nvSpPr>
+          <p:cNvPr id="4" name="Content Placeholder 3">
             <a:extLst>
               <a:ext uri="{FF2B5EF4-FFF2-40B4-BE49-F238E27FC236}">
-                <a16:creationId xmlns:a16="http://schemas.microsoft.com/office/drawing/2014/main" id="{4CD7787C-1417-419D-99F3-45439E700847}"/>
+                <a16:creationId xmlns:a16="http://schemas.microsoft.com/office/drawing/2014/main" id="{E717CEF2-9828-405C-B1AC-2E976C925E60}"/>
               </a:ext>
             </a:extLst>
           </p:cNvPr>
-          <p:cNvPicPr>
-            <a:picLocks noGrp="1" noChangeAspect="1"/>
-          </p:cNvPicPr>
+          <p:cNvSpPr>
+            <a:spLocks noGrp="1"/>
+          </p:cNvSpPr>
           <p:nvPr>
             <p:ph idx="1"/>
           </p:nvPr>
-        </p:nvPicPr>
-        <p:blipFill>
-          <a:blip r:embed="rId2"/>
-          <a:stretch>
-            <a:fillRect/>
-          </a:stretch>
-        </p:blipFill>
-        <p:spPr>
-          <a:xfrm>
-            <a:off x="230476" y="1766047"/>
-            <a:ext cx="11734635" cy="4463589"/>
-          </a:xfrm>
-          <a:prstGeom prst="rect">
-            <a:avLst/>
-          </a:prstGeom>
-        </p:spPr>
-      </p:pic>
+        </p:nvSpPr>
+        <p:spPr/>
+        <p:txBody>
+          <a:bodyPr/>
+          <a:lstStyle/>
+          <a:p>
+            <a:endParaRPr lang="da-DK" dirty="0"/>
+          </a:p>
+        </p:txBody>
+      </p:sp>
+      <p:graphicFrame>
+        <p:nvGraphicFramePr>
+          <p:cNvPr id="7" name="Object 6">
+            <a:extLst>
+              <a:ext uri="{FF2B5EF4-FFF2-40B4-BE49-F238E27FC236}">
+                <a16:creationId xmlns:a16="http://schemas.microsoft.com/office/drawing/2014/main" id="{7846A2AD-93E2-406F-8DD0-8942309636DE}"/>
+              </a:ext>
+            </a:extLst>
+          </p:cNvPr>
+          <p:cNvGraphicFramePr>
+            <a:graphicFrameLocks noChangeAspect="1"/>
+          </p:cNvGraphicFramePr>
+          <p:nvPr>
+            <p:extLst>
+              <p:ext uri="{D42A27DB-BD31-4B8C-83A1-F6EECF244321}">
+                <p14:modId xmlns:p14="http://schemas.microsoft.com/office/powerpoint/2010/main" val="2479381878"/>
+              </p:ext>
+            </p:extLst>
+          </p:nvPr>
+        </p:nvGraphicFramePr>
+        <p:xfrm>
+          <a:off x="290512" y="1518210"/>
+          <a:ext cx="11610975" cy="4410075"/>
+        </p:xfrm>
+        <a:graphic>
+          <a:graphicData uri="http://schemas.openxmlformats.org/presentationml/2006/ole">
+            <mc:AlternateContent xmlns:mc="http://schemas.openxmlformats.org/markup-compatibility/2006">
+              <mc:Choice xmlns:v="urn:schemas-microsoft-com:vml" Requires="v">
+                <p:oleObj spid="_x0000_s1030" name="Worksheet" r:id="rId3" imgW="11610971" imgH="4410204" progId="Excel.Sheet.12">
+                  <p:embed/>
+                </p:oleObj>
+              </mc:Choice>
+              <mc:Fallback>
+                <p:oleObj name="Worksheet" r:id="rId3" imgW="11610971" imgH="4410204" progId="Excel.Sheet.12">
+                  <p:embed/>
+                  <p:pic>
+                    <p:nvPicPr>
+                      <p:cNvPr id="0" name=""/>
+                      <p:cNvPicPr/>
+                      <p:nvPr/>
+                    </p:nvPicPr>
+                    <p:blipFill>
+                      <a:blip r:embed="rId4"/>
+                      <a:stretch>
+                        <a:fillRect/>
+                      </a:stretch>
+                    </p:blipFill>
+                    <p:spPr>
+                      <a:xfrm>
+                        <a:off x="290512" y="1518210"/>
+                        <a:ext cx="11610975" cy="4410075"/>
+                      </a:xfrm>
+                      <a:prstGeom prst="rect">
+                        <a:avLst/>
+                      </a:prstGeom>
+                    </p:spPr>
+                  </p:pic>
+                </p:oleObj>
+              </mc:Fallback>
+            </mc:AlternateContent>
+          </a:graphicData>
+        </a:graphic>
+      </p:graphicFrame>
     </p:spTree>
     <p:extLst>
       <p:ext uri="{BB962C8B-B14F-4D97-AF65-F5344CB8AC3E}">
@@ -10694,6 +10893,350 @@
           <a:p>
             <a:pPr marL="341630" indent="-341630"/>
             <a:r>
+              <a:rPr lang="en-US" dirty="0">
+                <a:ea typeface="+mn-lt"/>
+                <a:cs typeface="+mn-lt"/>
+              </a:rPr>
+              <a:t>Prompting</a:t>
+            </a:r>
+          </a:p>
+          <a:p>
+            <a:pPr marL="799200" lvl="1" indent="-457200">
+              <a:buFont typeface="+mj-lt"/>
+              <a:buAutoNum type="arabicPeriod"/>
+            </a:pPr>
+            <a:r>
+              <a:rPr lang="en-US" dirty="0">
+                <a:ea typeface="+mn-lt"/>
+                <a:cs typeface="+mn-lt"/>
+              </a:rPr>
+              <a:t>Bed </a:t>
+            </a:r>
+            <a:r>
+              <a:rPr lang="en-US" dirty="0" err="1">
+                <a:ea typeface="+mn-lt"/>
+                <a:cs typeface="+mn-lt"/>
+              </a:rPr>
+              <a:t>AI’en</a:t>
+            </a:r>
+            <a:r>
+              <a:rPr lang="en-US" dirty="0">
+                <a:ea typeface="+mn-lt"/>
+                <a:cs typeface="+mn-lt"/>
+              </a:rPr>
+              <a:t> </a:t>
+            </a:r>
+            <a:r>
+              <a:rPr lang="en-US" dirty="0" err="1">
+                <a:ea typeface="+mn-lt"/>
+                <a:cs typeface="+mn-lt"/>
+              </a:rPr>
+              <a:t>stille</a:t>
+            </a:r>
+            <a:r>
+              <a:rPr lang="en-US" dirty="0">
+                <a:ea typeface="+mn-lt"/>
+                <a:cs typeface="+mn-lt"/>
+              </a:rPr>
+              <a:t> dig </a:t>
+            </a:r>
+            <a:r>
+              <a:rPr lang="en-US" dirty="0" err="1">
+                <a:ea typeface="+mn-lt"/>
+                <a:cs typeface="+mn-lt"/>
+              </a:rPr>
+              <a:t>spørgsmål</a:t>
+            </a:r>
+            <a:r>
+              <a:rPr lang="en-US" dirty="0">
+                <a:ea typeface="+mn-lt"/>
+                <a:cs typeface="+mn-lt"/>
+              </a:rPr>
+              <a:t> </a:t>
+            </a:r>
+            <a:r>
+              <a:rPr lang="en-US" dirty="0" err="1">
+                <a:ea typeface="+mn-lt"/>
+                <a:cs typeface="+mn-lt"/>
+              </a:rPr>
+              <a:t>før</a:t>
+            </a:r>
+            <a:r>
+              <a:rPr lang="en-US" dirty="0">
+                <a:ea typeface="+mn-lt"/>
+                <a:cs typeface="+mn-lt"/>
+              </a:rPr>
+              <a:t> den </a:t>
+            </a:r>
+            <a:r>
+              <a:rPr lang="en-US" dirty="0" err="1">
+                <a:ea typeface="+mn-lt"/>
+                <a:cs typeface="+mn-lt"/>
+              </a:rPr>
+              <a:t>forelår</a:t>
+            </a:r>
+            <a:r>
+              <a:rPr lang="en-US" dirty="0">
+                <a:ea typeface="+mn-lt"/>
+                <a:cs typeface="+mn-lt"/>
+              </a:rPr>
+              <a:t> </a:t>
+            </a:r>
+            <a:r>
+              <a:rPr lang="en-US" dirty="0" err="1">
+                <a:ea typeface="+mn-lt"/>
+                <a:cs typeface="+mn-lt"/>
+              </a:rPr>
+              <a:t>løsningen</a:t>
+            </a:r>
+            <a:r>
+              <a:rPr lang="en-US" dirty="0">
+                <a:ea typeface="+mn-lt"/>
+                <a:cs typeface="+mn-lt"/>
+              </a:rPr>
+              <a:t>.</a:t>
+            </a:r>
+          </a:p>
+          <a:p>
+            <a:pPr marL="799200" lvl="1" indent="-457200">
+              <a:buFont typeface="+mj-lt"/>
+              <a:buAutoNum type="arabicPeriod"/>
+            </a:pPr>
+            <a:r>
+              <a:rPr lang="en-US" dirty="0">
+                <a:ea typeface="+mn-lt"/>
+                <a:cs typeface="+mn-lt"/>
+              </a:rPr>
+              <a:t>Bed om </a:t>
+            </a:r>
+            <a:r>
+              <a:rPr lang="en-US" dirty="0" err="1">
+                <a:ea typeface="+mn-lt"/>
+                <a:cs typeface="+mn-lt"/>
+              </a:rPr>
+              <a:t>flere</a:t>
+            </a:r>
+            <a:r>
+              <a:rPr lang="en-US" dirty="0">
+                <a:ea typeface="+mn-lt"/>
+                <a:cs typeface="+mn-lt"/>
+              </a:rPr>
+              <a:t> </a:t>
+            </a:r>
+            <a:r>
+              <a:rPr lang="en-US" dirty="0" err="1">
+                <a:ea typeface="+mn-lt"/>
+                <a:cs typeface="+mn-lt"/>
+              </a:rPr>
+              <a:t>mulige</a:t>
+            </a:r>
+            <a:r>
+              <a:rPr lang="en-US" dirty="0">
+                <a:ea typeface="+mn-lt"/>
+                <a:cs typeface="+mn-lt"/>
+              </a:rPr>
+              <a:t> </a:t>
+            </a:r>
+            <a:r>
+              <a:rPr lang="en-US" dirty="0" err="1">
+                <a:ea typeface="+mn-lt"/>
+                <a:cs typeface="+mn-lt"/>
+              </a:rPr>
+              <a:t>løsninger</a:t>
+            </a:r>
+            <a:r>
+              <a:rPr lang="en-US" dirty="0">
+                <a:ea typeface="+mn-lt"/>
+                <a:cs typeface="+mn-lt"/>
+              </a:rPr>
+              <a:t> med for </a:t>
+            </a:r>
+            <a:r>
+              <a:rPr lang="en-US" dirty="0" err="1">
+                <a:ea typeface="+mn-lt"/>
+                <a:cs typeface="+mn-lt"/>
+              </a:rPr>
+              <a:t>og</a:t>
+            </a:r>
+            <a:r>
+              <a:rPr lang="en-US" dirty="0">
+                <a:ea typeface="+mn-lt"/>
+                <a:cs typeface="+mn-lt"/>
+              </a:rPr>
+              <a:t> </a:t>
+            </a:r>
+            <a:r>
+              <a:rPr lang="en-US" dirty="0" err="1">
+                <a:ea typeface="+mn-lt"/>
+                <a:cs typeface="+mn-lt"/>
+              </a:rPr>
+              <a:t>imod</a:t>
+            </a:r>
+            <a:r>
+              <a:rPr lang="en-US" dirty="0">
+                <a:ea typeface="+mn-lt"/>
+                <a:cs typeface="+mn-lt"/>
+              </a:rPr>
+              <a:t>.</a:t>
+            </a:r>
+          </a:p>
+          <a:p>
+            <a:pPr marL="799200" lvl="1" indent="-457200">
+              <a:buFont typeface="+mj-lt"/>
+              <a:buAutoNum type="arabicPeriod"/>
+            </a:pPr>
+            <a:r>
+              <a:rPr lang="en-US" dirty="0"/>
+              <a:t>Bed </a:t>
+            </a:r>
+            <a:r>
+              <a:rPr lang="en-US" dirty="0" err="1"/>
+              <a:t>AI’en</a:t>
+            </a:r>
+            <a:r>
+              <a:rPr lang="en-US" dirty="0"/>
+              <a:t> </a:t>
+            </a:r>
+            <a:r>
+              <a:rPr lang="en-US" dirty="0" err="1"/>
+              <a:t>fortælle</a:t>
+            </a:r>
+            <a:r>
+              <a:rPr lang="en-US" dirty="0"/>
+              <a:t>, </a:t>
+            </a:r>
+            <a:r>
+              <a:rPr lang="en-US" dirty="0" err="1"/>
+              <a:t>hvad</a:t>
+            </a:r>
+            <a:r>
+              <a:rPr lang="en-US" dirty="0"/>
+              <a:t> den finder </a:t>
+            </a:r>
+            <a:r>
+              <a:rPr lang="en-US" dirty="0" err="1"/>
+              <a:t>ud</a:t>
+            </a:r>
+            <a:r>
+              <a:rPr lang="en-US" dirty="0"/>
+              <a:t> </a:t>
+            </a:r>
+            <a:r>
+              <a:rPr lang="en-US" dirty="0" err="1"/>
+              <a:t>af</a:t>
+            </a:r>
+            <a:r>
+              <a:rPr lang="en-US" dirty="0"/>
+              <a:t> med </a:t>
+            </a:r>
+            <a:r>
+              <a:rPr lang="en-US" dirty="0" err="1"/>
+              <a:t>søgning</a:t>
+            </a:r>
+            <a:r>
+              <a:rPr lang="en-US" dirty="0"/>
+              <a:t> </a:t>
+            </a:r>
+            <a:r>
+              <a:rPr lang="en-US" dirty="0" err="1"/>
+              <a:t>på</a:t>
+            </a:r>
+            <a:r>
+              <a:rPr lang="en-US" dirty="0"/>
+              <a:t> </a:t>
+            </a:r>
+            <a:r>
+              <a:rPr lang="en-US" dirty="0" err="1"/>
+              <a:t>nettet</a:t>
+            </a:r>
+            <a:r>
+              <a:rPr lang="en-US" dirty="0"/>
+              <a:t> </a:t>
+            </a:r>
+            <a:r>
+              <a:rPr lang="en-US" dirty="0" err="1"/>
+              <a:t>og</a:t>
+            </a:r>
+            <a:r>
+              <a:rPr lang="en-US" dirty="0"/>
+              <a:t> </a:t>
+            </a:r>
+            <a:r>
+              <a:rPr lang="en-US" dirty="0" err="1"/>
+              <a:t>hvad</a:t>
+            </a:r>
+            <a:r>
+              <a:rPr lang="en-US" dirty="0"/>
+              <a:t> </a:t>
+            </a:r>
+            <a:r>
+              <a:rPr lang="en-US" dirty="0" err="1"/>
+              <a:t>og</a:t>
+            </a:r>
+            <a:r>
+              <a:rPr lang="en-US" dirty="0"/>
+              <a:t> </a:t>
+            </a:r>
+            <a:r>
+              <a:rPr lang="en-US" dirty="0" err="1"/>
+              <a:t>hvorfor</a:t>
+            </a:r>
+            <a:r>
+              <a:rPr lang="en-US" dirty="0"/>
+              <a:t> den </a:t>
+            </a:r>
+            <a:r>
+              <a:rPr lang="en-US" dirty="0" err="1"/>
+              <a:t>ræsonnerer</a:t>
+            </a:r>
+            <a:r>
+              <a:rPr lang="en-US" dirty="0"/>
+              <a:t> sig </a:t>
+            </a:r>
+            <a:r>
+              <a:rPr lang="en-US" dirty="0" err="1"/>
+              <a:t>frem</a:t>
+            </a:r>
+            <a:r>
+              <a:rPr lang="en-US" dirty="0"/>
+              <a:t> </a:t>
+            </a:r>
+            <a:r>
+              <a:rPr lang="en-US" dirty="0" err="1"/>
+              <a:t>til</a:t>
+            </a:r>
+            <a:r>
+              <a:rPr lang="en-US" dirty="0"/>
+              <a:t>.</a:t>
+            </a:r>
+            <a:endParaRPr lang="en-US" dirty="0">
+              <a:ea typeface="+mn-lt"/>
+              <a:cs typeface="+mn-lt"/>
+            </a:endParaRPr>
+          </a:p>
+          <a:p>
+            <a:pPr marL="683630" lvl="1" indent="-341630"/>
+            <a:endParaRPr lang="en-US" dirty="0">
+              <a:ea typeface="+mn-lt"/>
+              <a:cs typeface="+mn-lt"/>
+            </a:endParaRPr>
+          </a:p>
+          <a:p>
+            <a:pPr marL="341630" indent="-341630"/>
+            <a:r>
+              <a:rPr lang="en-US" dirty="0">
+                <a:ea typeface="+mn-lt"/>
+                <a:cs typeface="+mn-lt"/>
+              </a:rPr>
+              <a:t>Vibe Coding</a:t>
+            </a:r>
+          </a:p>
+          <a:p>
+            <a:pPr marL="799200" lvl="1" indent="-457200">
+              <a:buFont typeface="+mj-lt"/>
+              <a:buAutoNum type="arabicPeriod"/>
+            </a:pPr>
+            <a:r>
               <a:rPr lang="en-US" dirty="0" err="1">
                 <a:ea typeface="+mn-lt"/>
                 <a:cs typeface="+mn-lt"/>
@@ -10924,18 +11467,221 @@
               </a:rPr>
               <a:t>fejlen</a:t>
             </a:r>
-            <a:endParaRPr lang="en-US" dirty="0" err="1">
-              <a:ea typeface="Calibri"/>
-            </a:endParaRPr>
-          </a:p>
-          <a:p>
-            <a:pPr marL="341630" indent="-341630"/>
-            <a:r>
-              <a:rPr lang="en-US" dirty="0">
-                <a:ea typeface="+mn-lt"/>
-                <a:cs typeface="+mn-lt"/>
-              </a:rPr>
-              <a:t>Giv </a:t>
+            <a:r>
+              <a:rPr lang="en-US" dirty="0">
+                <a:ea typeface="+mn-lt"/>
+                <a:cs typeface="+mn-lt"/>
+              </a:rPr>
+              <a:t>.</a:t>
+            </a:r>
+          </a:p>
+          <a:p>
+            <a:pPr marL="799200" lvl="1" indent="-457200">
+              <a:buFont typeface="+mj-lt"/>
+              <a:buAutoNum type="arabicPeriod"/>
+            </a:pPr>
+            <a:r>
+              <a:rPr lang="en-US" dirty="0" err="1">
+                <a:ea typeface="+mn-lt"/>
+                <a:cs typeface="+mn-lt"/>
+              </a:rPr>
+              <a:t>Hvis</a:t>
+            </a:r>
+            <a:r>
+              <a:rPr lang="en-US" dirty="0">
+                <a:ea typeface="+mn-lt"/>
+                <a:cs typeface="+mn-lt"/>
+              </a:rPr>
+              <a:t> du </a:t>
+            </a:r>
+            <a:r>
+              <a:rPr lang="en-US" dirty="0" err="1">
+                <a:ea typeface="+mn-lt"/>
+                <a:cs typeface="+mn-lt"/>
+              </a:rPr>
+              <a:t>ved</a:t>
+            </a:r>
+            <a:r>
+              <a:rPr lang="en-US" dirty="0">
+                <a:ea typeface="+mn-lt"/>
+                <a:cs typeface="+mn-lt"/>
+              </a:rPr>
+              <a:t>, </a:t>
+            </a:r>
+            <a:r>
+              <a:rPr lang="en-US" dirty="0" err="1">
+                <a:ea typeface="+mn-lt"/>
+                <a:cs typeface="+mn-lt"/>
+              </a:rPr>
+              <a:t>hvad</a:t>
+            </a:r>
+            <a:r>
+              <a:rPr lang="en-US" dirty="0">
+                <a:ea typeface="+mn-lt"/>
+                <a:cs typeface="+mn-lt"/>
+              </a:rPr>
+              <a:t> du </a:t>
+            </a:r>
+            <a:r>
+              <a:rPr lang="en-US" dirty="0" err="1">
+                <a:ea typeface="+mn-lt"/>
+                <a:cs typeface="+mn-lt"/>
+              </a:rPr>
+              <a:t>skal</a:t>
+            </a:r>
+            <a:r>
+              <a:rPr lang="en-US" dirty="0">
+                <a:ea typeface="+mn-lt"/>
+                <a:cs typeface="+mn-lt"/>
+              </a:rPr>
+              <a:t> </a:t>
+            </a:r>
+            <a:r>
+              <a:rPr lang="en-US" dirty="0" err="1">
+                <a:ea typeface="+mn-lt"/>
+                <a:cs typeface="+mn-lt"/>
+              </a:rPr>
+              <a:t>gøre</a:t>
+            </a:r>
+            <a:r>
+              <a:rPr lang="en-US" dirty="0">
+                <a:ea typeface="+mn-lt"/>
+                <a:cs typeface="+mn-lt"/>
+              </a:rPr>
+              <a:t> </a:t>
+            </a:r>
+            <a:r>
+              <a:rPr lang="en-US" dirty="0" err="1">
+                <a:ea typeface="+mn-lt"/>
+                <a:cs typeface="+mn-lt"/>
+              </a:rPr>
+              <a:t>og</a:t>
+            </a:r>
+            <a:r>
+              <a:rPr lang="en-US" dirty="0">
+                <a:ea typeface="+mn-lt"/>
+                <a:cs typeface="+mn-lt"/>
+              </a:rPr>
+              <a:t> det </a:t>
+            </a:r>
+            <a:r>
+              <a:rPr lang="en-US" dirty="0" err="1">
+                <a:ea typeface="+mn-lt"/>
+                <a:cs typeface="+mn-lt"/>
+              </a:rPr>
+              <a:t>ikke</a:t>
+            </a:r>
+            <a:r>
+              <a:rPr lang="en-US" dirty="0">
+                <a:ea typeface="+mn-lt"/>
+                <a:cs typeface="+mn-lt"/>
+              </a:rPr>
+              <a:t> </a:t>
+            </a:r>
+            <a:r>
+              <a:rPr lang="en-US" dirty="0" err="1">
+                <a:ea typeface="+mn-lt"/>
+                <a:cs typeface="+mn-lt"/>
+              </a:rPr>
+              <a:t>tager</a:t>
+            </a:r>
+            <a:r>
+              <a:rPr lang="en-US" dirty="0">
+                <a:ea typeface="+mn-lt"/>
+                <a:cs typeface="+mn-lt"/>
+              </a:rPr>
+              <a:t> </a:t>
+            </a:r>
+            <a:r>
+              <a:rPr lang="en-US" dirty="0" err="1">
+                <a:ea typeface="+mn-lt"/>
+                <a:cs typeface="+mn-lt"/>
+              </a:rPr>
+              <a:t>lang</a:t>
+            </a:r>
+            <a:r>
+              <a:rPr lang="en-US" dirty="0">
+                <a:ea typeface="+mn-lt"/>
+                <a:cs typeface="+mn-lt"/>
+              </a:rPr>
+              <a:t> </a:t>
+            </a:r>
+            <a:r>
+              <a:rPr lang="en-US" dirty="0" err="1">
+                <a:ea typeface="+mn-lt"/>
+                <a:cs typeface="+mn-lt"/>
+              </a:rPr>
+              <a:t>tid</a:t>
+            </a:r>
+            <a:r>
+              <a:rPr lang="en-US" dirty="0">
+                <a:ea typeface="+mn-lt"/>
+                <a:cs typeface="+mn-lt"/>
+              </a:rPr>
+              <a:t>, </a:t>
+            </a:r>
+            <a:r>
+              <a:rPr lang="en-US" dirty="0" err="1">
+                <a:ea typeface="+mn-lt"/>
+                <a:cs typeface="+mn-lt"/>
+              </a:rPr>
+              <a:t>så</a:t>
+            </a:r>
+            <a:r>
+              <a:rPr lang="en-US" dirty="0">
+                <a:ea typeface="+mn-lt"/>
+                <a:cs typeface="+mn-lt"/>
+              </a:rPr>
+              <a:t> </a:t>
+            </a:r>
+            <a:r>
+              <a:rPr lang="en-US" dirty="0" err="1">
+                <a:ea typeface="+mn-lt"/>
+                <a:cs typeface="+mn-lt"/>
+              </a:rPr>
+              <a:t>gør</a:t>
+            </a:r>
+            <a:r>
+              <a:rPr lang="en-US" dirty="0">
+                <a:ea typeface="+mn-lt"/>
+                <a:cs typeface="+mn-lt"/>
+              </a:rPr>
+              <a:t> det </a:t>
+            </a:r>
+            <a:r>
+              <a:rPr lang="en-US" dirty="0" err="1">
+                <a:ea typeface="+mn-lt"/>
+                <a:cs typeface="+mn-lt"/>
+              </a:rPr>
+              <a:t>selv</a:t>
+            </a:r>
+            <a:r>
+              <a:rPr lang="en-US" dirty="0">
+                <a:ea typeface="+mn-lt"/>
+                <a:cs typeface="+mn-lt"/>
+              </a:rPr>
+              <a:t>.</a:t>
+            </a:r>
+            <a:endParaRPr lang="en-US" dirty="0"/>
+          </a:p>
+          <a:p>
+            <a:pPr marL="799200" lvl="1" indent="-457200">
+              <a:buFont typeface="+mj-lt"/>
+              <a:buAutoNum type="arabicPeriod"/>
+            </a:pPr>
+            <a:r>
+              <a:rPr lang="en-US" dirty="0" err="1">
+                <a:ea typeface="+mn-lt"/>
+                <a:cs typeface="+mn-lt"/>
+              </a:rPr>
+              <a:t>Hav</a:t>
+            </a:r>
+            <a:r>
+              <a:rPr lang="en-US" dirty="0">
+                <a:ea typeface="+mn-lt"/>
+                <a:cs typeface="+mn-lt"/>
+              </a:rPr>
+              <a:t> </a:t>
             </a:r>
             <a:r>
               <a:rPr lang="en-US" dirty="0" err="1">
@@ -10956,35 +11702,7 @@
                 <a:ea typeface="+mn-lt"/>
                 <a:cs typeface="+mn-lt"/>
               </a:rPr>
-              <a:t>kontekst</a:t>
-            </a:r>
-            <a:r>
-              <a:rPr lang="en-US" dirty="0">
-                <a:ea typeface="+mn-lt"/>
-                <a:cs typeface="+mn-lt"/>
-              </a:rPr>
-              <a:t> – </a:t>
-            </a:r>
-            <a:r>
-              <a:rPr lang="en-US" dirty="0" err="1">
-                <a:ea typeface="+mn-lt"/>
-                <a:cs typeface="+mn-lt"/>
-              </a:rPr>
-              <a:t>så</a:t>
-            </a:r>
-            <a:r>
-              <a:rPr lang="en-US" dirty="0">
-                <a:ea typeface="+mn-lt"/>
-                <a:cs typeface="+mn-lt"/>
-              </a:rPr>
-              <a:t> </a:t>
-            </a:r>
-            <a:r>
-              <a:rPr lang="en-US" dirty="0" err="1">
-                <a:ea typeface="+mn-lt"/>
-                <a:cs typeface="+mn-lt"/>
-              </a:rPr>
-              <a:t>får</a:t>
+              <a:t>arbejde</a:t>
             </a:r>
             <a:r>
               <a:rPr lang="en-US" dirty="0">
@@ -10998,32 +11716,230 @@
                 <a:ea typeface="+mn-lt"/>
                 <a:cs typeface="+mn-lt"/>
               </a:rPr>
-              <a:t>bedre</a:t>
-            </a:r>
-            <a:r>
-              <a:rPr lang="en-US" dirty="0">
-                <a:ea typeface="+mn-lt"/>
-                <a:cs typeface="+mn-lt"/>
-              </a:rPr>
-              <a:t> </a:t>
-            </a:r>
-            <a:r>
-              <a:rPr lang="en-US" dirty="0" err="1">
-                <a:ea typeface="+mn-lt"/>
-                <a:cs typeface="+mn-lt"/>
-              </a:rPr>
-              <a:t>svar</a:t>
-            </a:r>
-            <a:endParaRPr lang="en-US" dirty="0" err="1"/>
-          </a:p>
-          <a:p>
-            <a:pPr marL="341630" indent="-341630"/>
-            <a:r>
-              <a:rPr lang="en-US" dirty="0">
-                <a:ea typeface="+mn-lt"/>
-                <a:cs typeface="+mn-lt"/>
-              </a:rPr>
-              <a:t>Bed </a:t>
+              <a:t>kan</a:t>
+            </a:r>
+            <a:r>
+              <a:rPr lang="en-US" dirty="0">
+                <a:ea typeface="+mn-lt"/>
+                <a:cs typeface="+mn-lt"/>
+              </a:rPr>
+              <a:t> lave, </a:t>
+            </a:r>
+            <a:r>
+              <a:rPr lang="en-US" dirty="0" err="1">
+                <a:ea typeface="+mn-lt"/>
+                <a:cs typeface="+mn-lt"/>
+              </a:rPr>
+              <a:t>mens</a:t>
+            </a:r>
+            <a:r>
+              <a:rPr lang="en-US" dirty="0">
+                <a:ea typeface="+mn-lt"/>
+                <a:cs typeface="+mn-lt"/>
+              </a:rPr>
+              <a:t> </a:t>
+            </a:r>
+            <a:r>
+              <a:rPr lang="en-US" dirty="0" err="1">
+                <a:ea typeface="+mn-lt"/>
+                <a:cs typeface="+mn-lt"/>
+              </a:rPr>
+              <a:t>AI'en</a:t>
+            </a:r>
+            <a:r>
+              <a:rPr lang="en-US" dirty="0">
+                <a:ea typeface="+mn-lt"/>
+                <a:cs typeface="+mn-lt"/>
+              </a:rPr>
+              <a:t> "</a:t>
+            </a:r>
+            <a:r>
+              <a:rPr lang="en-US" dirty="0" err="1">
+                <a:ea typeface="+mn-lt"/>
+                <a:cs typeface="+mn-lt"/>
+              </a:rPr>
+              <a:t>tænker</a:t>
+            </a:r>
+            <a:r>
+              <a:rPr lang="en-US" dirty="0">
+                <a:ea typeface="+mn-lt"/>
+                <a:cs typeface="+mn-lt"/>
+              </a:rPr>
+              <a:t>". </a:t>
+            </a:r>
+            <a:r>
+              <a:rPr lang="en-US" dirty="0" err="1">
+                <a:ea typeface="+mn-lt"/>
+                <a:cs typeface="+mn-lt"/>
+              </a:rPr>
+              <a:t>Nogle</a:t>
+            </a:r>
+            <a:r>
+              <a:rPr lang="en-US" dirty="0">
+                <a:ea typeface="+mn-lt"/>
+                <a:cs typeface="+mn-lt"/>
+              </a:rPr>
+              <a:t> </a:t>
+            </a:r>
+            <a:r>
+              <a:rPr lang="en-US" dirty="0" err="1">
+                <a:ea typeface="+mn-lt"/>
+                <a:cs typeface="+mn-lt"/>
+              </a:rPr>
+              <a:t>opgaver</a:t>
+            </a:r>
+            <a:r>
+              <a:rPr lang="en-US" dirty="0">
+                <a:ea typeface="+mn-lt"/>
+                <a:cs typeface="+mn-lt"/>
+              </a:rPr>
+              <a:t> </a:t>
+            </a:r>
+            <a:r>
+              <a:rPr lang="en-US" dirty="0" err="1">
+                <a:ea typeface="+mn-lt"/>
+                <a:cs typeface="+mn-lt"/>
+              </a:rPr>
+              <a:t>tager</a:t>
+            </a:r>
+            <a:r>
+              <a:rPr lang="en-US" dirty="0">
+                <a:ea typeface="+mn-lt"/>
+                <a:cs typeface="+mn-lt"/>
+              </a:rPr>
+              <a:t> </a:t>
+            </a:r>
+            <a:r>
+              <a:rPr lang="en-US" dirty="0" err="1">
+                <a:ea typeface="+mn-lt"/>
+                <a:cs typeface="+mn-lt"/>
+              </a:rPr>
+              <a:t>lang</a:t>
+            </a:r>
+            <a:r>
+              <a:rPr lang="en-US" dirty="0">
+                <a:ea typeface="+mn-lt"/>
+                <a:cs typeface="+mn-lt"/>
+              </a:rPr>
+              <a:t> </a:t>
+            </a:r>
+            <a:r>
+              <a:rPr lang="en-US" dirty="0" err="1">
+                <a:ea typeface="+mn-lt"/>
+                <a:cs typeface="+mn-lt"/>
+              </a:rPr>
+              <a:t>tid</a:t>
+            </a:r>
+            <a:r>
+              <a:rPr lang="en-US" dirty="0">
+                <a:ea typeface="+mn-lt"/>
+                <a:cs typeface="+mn-lt"/>
+              </a:rPr>
+              <a:t>.</a:t>
+            </a:r>
+            <a:endParaRPr lang="en-US" dirty="0"/>
+          </a:p>
+          <a:p>
+            <a:pPr marL="799200" lvl="1" indent="-457200">
+              <a:buFont typeface="+mj-lt"/>
+              <a:buAutoNum type="arabicPeriod"/>
+            </a:pPr>
+            <a:r>
+              <a:rPr lang="en-US" dirty="0">
+                <a:ea typeface="+mn-lt"/>
+                <a:cs typeface="+mn-lt"/>
+              </a:rPr>
+              <a:t>Log dine prompts </a:t>
+            </a:r>
+            <a:r>
+              <a:rPr lang="en-US" dirty="0" err="1">
+                <a:ea typeface="+mn-lt"/>
+                <a:cs typeface="+mn-lt"/>
+              </a:rPr>
+              <a:t>til</a:t>
+            </a:r>
+            <a:r>
+              <a:rPr lang="en-US" dirty="0">
+                <a:ea typeface="+mn-lt"/>
+                <a:cs typeface="+mn-lt"/>
+              </a:rPr>
+              <a:t> </a:t>
+            </a:r>
+            <a:r>
+              <a:rPr lang="en-US" dirty="0" err="1">
+                <a:ea typeface="+mn-lt"/>
+                <a:cs typeface="+mn-lt"/>
+              </a:rPr>
+              <a:t>en</a:t>
+            </a:r>
+            <a:r>
+              <a:rPr lang="en-US" dirty="0">
+                <a:ea typeface="+mn-lt"/>
+                <a:cs typeface="+mn-lt"/>
+              </a:rPr>
+              <a:t> fil.</a:t>
+            </a:r>
+          </a:p>
+          <a:p>
+            <a:pPr marL="799200" lvl="1" indent="-457200">
+              <a:buFont typeface="+mj-lt"/>
+              <a:buAutoNum type="arabicPeriod"/>
+            </a:pPr>
+            <a:r>
+              <a:rPr lang="en-US" dirty="0" err="1">
+                <a:ea typeface="+mn-lt"/>
+                <a:cs typeface="+mn-lt"/>
+              </a:rPr>
+              <a:t>Lav</a:t>
+            </a:r>
+            <a:r>
+              <a:rPr lang="en-US" dirty="0">
+                <a:ea typeface="+mn-lt"/>
+                <a:cs typeface="+mn-lt"/>
+              </a:rPr>
+              <a:t> </a:t>
+            </a:r>
+            <a:r>
+              <a:rPr lang="en-US" dirty="0" err="1">
+                <a:ea typeface="+mn-lt"/>
+                <a:cs typeface="+mn-lt"/>
+              </a:rPr>
+              <a:t>en</a:t>
+            </a:r>
+            <a:r>
+              <a:rPr lang="en-US" dirty="0">
+                <a:ea typeface="+mn-lt"/>
+                <a:cs typeface="+mn-lt"/>
+              </a:rPr>
+              <a:t> agents.md (</a:t>
+            </a:r>
+            <a:r>
+              <a:rPr lang="en-US" dirty="0" err="1">
+                <a:ea typeface="+mn-lt"/>
+                <a:cs typeface="+mn-lt"/>
+              </a:rPr>
+              <a:t>instruksfil</a:t>
+            </a:r>
+            <a:r>
+              <a:rPr lang="en-US" dirty="0">
+                <a:ea typeface="+mn-lt"/>
+                <a:cs typeface="+mn-lt"/>
+              </a:rPr>
+              <a:t> </a:t>
+            </a:r>
+            <a:r>
+              <a:rPr lang="en-US" dirty="0" err="1">
+                <a:ea typeface="+mn-lt"/>
+                <a:cs typeface="+mn-lt"/>
+              </a:rPr>
+              <a:t>til</a:t>
+            </a:r>
+            <a:r>
+              <a:rPr lang="en-US" dirty="0">
+                <a:ea typeface="+mn-lt"/>
+                <a:cs typeface="+mn-lt"/>
+              </a:rPr>
+              <a:t> </a:t>
             </a:r>
             <a:r>
               <a:rPr lang="en-US" dirty="0" err="1">
@@ -11037,531 +11953,63 @@
                 <a:ea typeface="+mn-lt"/>
                 <a:cs typeface="+mn-lt"/>
               </a:rPr>
-              <a:t> </a:t>
-            </a:r>
-            <a:r>
-              <a:rPr lang="en-US" dirty="0" err="1">
-                <a:ea typeface="+mn-lt"/>
-                <a:cs typeface="+mn-lt"/>
-              </a:rPr>
-              <a:t>stille</a:t>
-            </a:r>
-            <a:r>
-              <a:rPr lang="en-US" dirty="0">
-                <a:ea typeface="+mn-lt"/>
-                <a:cs typeface="+mn-lt"/>
-              </a:rPr>
-              <a:t> dig </a:t>
-            </a:r>
-            <a:r>
-              <a:rPr lang="en-US" dirty="0" err="1">
-                <a:ea typeface="+mn-lt"/>
-                <a:cs typeface="+mn-lt"/>
-              </a:rPr>
-              <a:t>spørgsmål</a:t>
-            </a:r>
-            <a:r>
-              <a:rPr lang="en-US" dirty="0">
-                <a:ea typeface="+mn-lt"/>
-                <a:cs typeface="+mn-lt"/>
-              </a:rPr>
-              <a:t> </a:t>
-            </a:r>
-            <a:r>
-              <a:rPr lang="en-US" dirty="0" err="1">
-                <a:ea typeface="+mn-lt"/>
-                <a:cs typeface="+mn-lt"/>
-              </a:rPr>
-              <a:t>før</a:t>
-            </a:r>
-            <a:r>
-              <a:rPr lang="en-US" dirty="0">
-                <a:ea typeface="+mn-lt"/>
-                <a:cs typeface="+mn-lt"/>
-              </a:rPr>
-              <a:t> den </a:t>
-            </a:r>
-            <a:r>
-              <a:rPr lang="en-US" dirty="0" err="1">
-                <a:ea typeface="+mn-lt"/>
-                <a:cs typeface="+mn-lt"/>
-              </a:rPr>
-              <a:t>forelår</a:t>
-            </a:r>
-            <a:r>
-              <a:rPr lang="en-US" dirty="0">
-                <a:ea typeface="+mn-lt"/>
-                <a:cs typeface="+mn-lt"/>
-              </a:rPr>
-              <a:t> </a:t>
-            </a:r>
-            <a:r>
-              <a:rPr lang="en-US" dirty="0" err="1">
-                <a:ea typeface="+mn-lt"/>
-                <a:cs typeface="+mn-lt"/>
-              </a:rPr>
-              <a:t>løsningen</a:t>
-            </a:r>
-            <a:endParaRPr lang="en-US" dirty="0" err="1"/>
-          </a:p>
-          <a:p>
-            <a:pPr marL="341630" indent="-341630"/>
-            <a:r>
-              <a:rPr lang="en-US" dirty="0">
-                <a:ea typeface="+mn-lt"/>
-                <a:cs typeface="+mn-lt"/>
-              </a:rPr>
-              <a:t>Bed om </a:t>
-            </a:r>
-            <a:r>
-              <a:rPr lang="en-US" dirty="0" err="1">
-                <a:ea typeface="+mn-lt"/>
-                <a:cs typeface="+mn-lt"/>
-              </a:rPr>
-              <a:t>flere</a:t>
-            </a:r>
-            <a:r>
-              <a:rPr lang="en-US" dirty="0">
-                <a:ea typeface="+mn-lt"/>
-                <a:cs typeface="+mn-lt"/>
-              </a:rPr>
-              <a:t> </a:t>
-            </a:r>
-            <a:r>
-              <a:rPr lang="en-US" dirty="0" err="1">
-                <a:ea typeface="+mn-lt"/>
-                <a:cs typeface="+mn-lt"/>
-              </a:rPr>
-              <a:t>mulige</a:t>
-            </a:r>
-            <a:r>
-              <a:rPr lang="en-US" dirty="0">
-                <a:ea typeface="+mn-lt"/>
-                <a:cs typeface="+mn-lt"/>
-              </a:rPr>
-              <a:t> </a:t>
-            </a:r>
-            <a:r>
-              <a:rPr lang="en-US" dirty="0" err="1">
-                <a:ea typeface="+mn-lt"/>
-                <a:cs typeface="+mn-lt"/>
-              </a:rPr>
-              <a:t>løsninger</a:t>
-            </a:r>
-            <a:r>
-              <a:rPr lang="en-US" dirty="0">
-                <a:ea typeface="+mn-lt"/>
-                <a:cs typeface="+mn-lt"/>
-              </a:rPr>
-              <a:t> med for </a:t>
-            </a:r>
-            <a:r>
-              <a:rPr lang="en-US" dirty="0" err="1">
-                <a:ea typeface="+mn-lt"/>
-                <a:cs typeface="+mn-lt"/>
-              </a:rPr>
-              <a:t>og</a:t>
-            </a:r>
-            <a:r>
-              <a:rPr lang="en-US" dirty="0">
-                <a:ea typeface="+mn-lt"/>
-                <a:cs typeface="+mn-lt"/>
-              </a:rPr>
-              <a:t> </a:t>
-            </a:r>
-            <a:r>
-              <a:rPr lang="en-US" dirty="0" err="1">
-                <a:ea typeface="+mn-lt"/>
-                <a:cs typeface="+mn-lt"/>
-              </a:rPr>
-              <a:t>imod</a:t>
-            </a:r>
-            <a:endParaRPr lang="en-US" dirty="0" err="1"/>
-          </a:p>
-          <a:p>
-            <a:pPr marL="341630" indent="-341630"/>
-            <a:r>
-              <a:rPr lang="en-US" dirty="0">
-                <a:ea typeface="+mn-lt"/>
-                <a:cs typeface="+mn-lt"/>
-              </a:rPr>
-              <a:t>Log dine prompts (prompts.md) </a:t>
-            </a:r>
-            <a:r>
-              <a:rPr lang="en-US" dirty="0" err="1">
-                <a:ea typeface="+mn-lt"/>
-                <a:cs typeface="+mn-lt"/>
-              </a:rPr>
-              <a:t>og</a:t>
-            </a:r>
-            <a:r>
-              <a:rPr lang="en-US" dirty="0">
-                <a:ea typeface="+mn-lt"/>
-                <a:cs typeface="+mn-lt"/>
-              </a:rPr>
-              <a:t> gem hits </a:t>
-            </a:r>
-            <a:r>
-              <a:rPr lang="en-US" dirty="0" err="1">
-                <a:ea typeface="+mn-lt"/>
-                <a:cs typeface="+mn-lt"/>
-              </a:rPr>
-              <a:t>som</a:t>
-            </a:r>
-            <a:r>
-              <a:rPr lang="en-US" dirty="0">
-                <a:ea typeface="+mn-lt"/>
-                <a:cs typeface="+mn-lt"/>
-              </a:rPr>
-              <a:t> </a:t>
-            </a:r>
-            <a:r>
-              <a:rPr lang="en-US" dirty="0" err="1">
-                <a:ea typeface="+mn-lt"/>
-                <a:cs typeface="+mn-lt"/>
-              </a:rPr>
-              <a:t>skabeloner</a:t>
-            </a:r>
-            <a:endParaRPr lang="en-US" dirty="0" err="1"/>
-          </a:p>
-          <a:p>
-            <a:pPr marL="341630" indent="-341630"/>
-            <a:r>
-              <a:rPr lang="en-US" dirty="0" err="1">
-                <a:ea typeface="+mn-lt"/>
-                <a:cs typeface="+mn-lt"/>
-              </a:rPr>
-              <a:t>Hav</a:t>
-            </a:r>
-            <a:r>
-              <a:rPr lang="en-US" dirty="0">
-                <a:ea typeface="+mn-lt"/>
-                <a:cs typeface="+mn-lt"/>
-              </a:rPr>
-              <a:t> </a:t>
-            </a:r>
-            <a:r>
-              <a:rPr lang="en-US" dirty="0" err="1">
-                <a:ea typeface="+mn-lt"/>
-                <a:cs typeface="+mn-lt"/>
-              </a:rPr>
-              <a:t>noget</a:t>
-            </a:r>
-            <a:r>
-              <a:rPr lang="en-US" dirty="0">
-                <a:ea typeface="+mn-lt"/>
-                <a:cs typeface="+mn-lt"/>
-              </a:rPr>
-              <a:t> </a:t>
-            </a:r>
-            <a:r>
-              <a:rPr lang="en-US" dirty="0" err="1">
-                <a:ea typeface="+mn-lt"/>
-                <a:cs typeface="+mn-lt"/>
-              </a:rPr>
-              <a:t>arbejde</a:t>
-            </a:r>
-            <a:r>
-              <a:rPr lang="en-US" dirty="0">
-                <a:ea typeface="+mn-lt"/>
-                <a:cs typeface="+mn-lt"/>
-              </a:rPr>
-              <a:t> du </a:t>
-            </a:r>
-            <a:r>
-              <a:rPr lang="en-US" dirty="0" err="1">
-                <a:ea typeface="+mn-lt"/>
-                <a:cs typeface="+mn-lt"/>
-              </a:rPr>
-              <a:t>kan</a:t>
-            </a:r>
-            <a:r>
-              <a:rPr lang="en-US" dirty="0">
-                <a:ea typeface="+mn-lt"/>
-                <a:cs typeface="+mn-lt"/>
-              </a:rPr>
-              <a:t> laves </a:t>
-            </a:r>
-            <a:r>
-              <a:rPr lang="en-US" dirty="0" err="1">
-                <a:ea typeface="+mn-lt"/>
-                <a:cs typeface="+mn-lt"/>
-              </a:rPr>
-              <a:t>mens</a:t>
-            </a:r>
-            <a:r>
-              <a:rPr lang="en-US" dirty="0">
-                <a:ea typeface="+mn-lt"/>
-                <a:cs typeface="+mn-lt"/>
-              </a:rPr>
-              <a:t> </a:t>
-            </a:r>
-            <a:r>
-              <a:rPr lang="en-US" dirty="0" err="1">
-                <a:ea typeface="+mn-lt"/>
-                <a:cs typeface="+mn-lt"/>
-              </a:rPr>
-              <a:t>AI'en</a:t>
-            </a:r>
-            <a:r>
-              <a:rPr lang="en-US" dirty="0">
-                <a:ea typeface="+mn-lt"/>
-                <a:cs typeface="+mn-lt"/>
-              </a:rPr>
-              <a:t> "</a:t>
-            </a:r>
-            <a:r>
-              <a:rPr lang="en-US" dirty="0" err="1">
-                <a:ea typeface="+mn-lt"/>
-                <a:cs typeface="+mn-lt"/>
-              </a:rPr>
-              <a:t>tænker</a:t>
-            </a:r>
-            <a:r>
-              <a:rPr lang="en-US" dirty="0">
-                <a:ea typeface="+mn-lt"/>
-                <a:cs typeface="+mn-lt"/>
-              </a:rPr>
-              <a:t>". Nogle </a:t>
-            </a:r>
-            <a:r>
-              <a:rPr lang="en-US" dirty="0" err="1">
-                <a:ea typeface="+mn-lt"/>
-                <a:cs typeface="+mn-lt"/>
-              </a:rPr>
-              <a:t>opgaver</a:t>
-            </a:r>
-            <a:r>
-              <a:rPr lang="en-US" dirty="0">
-                <a:ea typeface="+mn-lt"/>
-                <a:cs typeface="+mn-lt"/>
-              </a:rPr>
-              <a:t> </a:t>
-            </a:r>
-            <a:r>
-              <a:rPr lang="en-US" dirty="0" err="1">
-                <a:ea typeface="+mn-lt"/>
-                <a:cs typeface="+mn-lt"/>
-              </a:rPr>
-              <a:t>tager</a:t>
-            </a:r>
-            <a:r>
-              <a:rPr lang="en-US" dirty="0">
-                <a:ea typeface="+mn-lt"/>
-                <a:cs typeface="+mn-lt"/>
-              </a:rPr>
-              <a:t> lang </a:t>
-            </a:r>
-            <a:r>
-              <a:rPr lang="en-US" dirty="0" err="1">
-                <a:ea typeface="+mn-lt"/>
-                <a:cs typeface="+mn-lt"/>
-              </a:rPr>
-              <a:t>tid</a:t>
-            </a:r>
-            <a:r>
-              <a:rPr lang="en-US" dirty="0">
-                <a:ea typeface="+mn-lt"/>
-                <a:cs typeface="+mn-lt"/>
-              </a:rPr>
-              <a:t>.</a:t>
-            </a:r>
-            <a:endParaRPr lang="en-US" dirty="0"/>
-          </a:p>
-          <a:p>
-            <a:pPr marL="341630" indent="-341630"/>
-            <a:r>
-              <a:rPr lang="en-US" dirty="0" err="1">
-                <a:ea typeface="+mn-lt"/>
-                <a:cs typeface="+mn-lt"/>
-              </a:rPr>
-              <a:t>Hvis</a:t>
-            </a:r>
-            <a:r>
-              <a:rPr lang="en-US" dirty="0">
-                <a:ea typeface="+mn-lt"/>
-                <a:cs typeface="+mn-lt"/>
-              </a:rPr>
-              <a:t> du </a:t>
-            </a:r>
-            <a:r>
-              <a:rPr lang="en-US" dirty="0" err="1">
-                <a:ea typeface="+mn-lt"/>
-                <a:cs typeface="+mn-lt"/>
-              </a:rPr>
-              <a:t>ved</a:t>
-            </a:r>
-            <a:r>
-              <a:rPr lang="en-US" dirty="0">
-                <a:ea typeface="+mn-lt"/>
-                <a:cs typeface="+mn-lt"/>
-              </a:rPr>
-              <a:t>, </a:t>
-            </a:r>
-            <a:r>
-              <a:rPr lang="en-US" dirty="0" err="1">
-                <a:ea typeface="+mn-lt"/>
-                <a:cs typeface="+mn-lt"/>
-              </a:rPr>
-              <a:t>hvad</a:t>
-            </a:r>
-            <a:r>
-              <a:rPr lang="en-US" dirty="0">
-                <a:ea typeface="+mn-lt"/>
-                <a:cs typeface="+mn-lt"/>
-              </a:rPr>
-              <a:t> du </a:t>
-            </a:r>
-            <a:r>
-              <a:rPr lang="en-US" dirty="0" err="1">
-                <a:ea typeface="+mn-lt"/>
-                <a:cs typeface="+mn-lt"/>
-              </a:rPr>
-              <a:t>skal</a:t>
-            </a:r>
-            <a:r>
-              <a:rPr lang="en-US" dirty="0">
-                <a:ea typeface="+mn-lt"/>
-                <a:cs typeface="+mn-lt"/>
-              </a:rPr>
-              <a:t> </a:t>
-            </a:r>
-            <a:r>
-              <a:rPr lang="en-US" dirty="0" err="1">
-                <a:ea typeface="+mn-lt"/>
-                <a:cs typeface="+mn-lt"/>
-              </a:rPr>
-              <a:t>gøre</a:t>
-            </a:r>
-            <a:r>
-              <a:rPr lang="en-US" dirty="0">
-                <a:ea typeface="+mn-lt"/>
-                <a:cs typeface="+mn-lt"/>
-              </a:rPr>
-              <a:t> </a:t>
-            </a:r>
-            <a:r>
-              <a:rPr lang="en-US" dirty="0" err="1">
-                <a:ea typeface="+mn-lt"/>
-                <a:cs typeface="+mn-lt"/>
-              </a:rPr>
-              <a:t>og</a:t>
-            </a:r>
-            <a:r>
-              <a:rPr lang="en-US" dirty="0">
-                <a:ea typeface="+mn-lt"/>
-                <a:cs typeface="+mn-lt"/>
-              </a:rPr>
-              <a:t> det </a:t>
-            </a:r>
-            <a:r>
-              <a:rPr lang="en-US" dirty="0" err="1">
-                <a:ea typeface="+mn-lt"/>
-                <a:cs typeface="+mn-lt"/>
-              </a:rPr>
-              <a:t>ikke</a:t>
-            </a:r>
-            <a:r>
-              <a:rPr lang="en-US" dirty="0">
-                <a:ea typeface="+mn-lt"/>
-                <a:cs typeface="+mn-lt"/>
-              </a:rPr>
-              <a:t> </a:t>
-            </a:r>
-            <a:r>
-              <a:rPr lang="en-US" dirty="0" err="1">
-                <a:ea typeface="+mn-lt"/>
-                <a:cs typeface="+mn-lt"/>
-              </a:rPr>
-              <a:t>tager</a:t>
-            </a:r>
-            <a:r>
-              <a:rPr lang="en-US" dirty="0">
-                <a:ea typeface="+mn-lt"/>
-                <a:cs typeface="+mn-lt"/>
-              </a:rPr>
-              <a:t> lang </a:t>
-            </a:r>
-            <a:r>
-              <a:rPr lang="en-US" dirty="0" err="1">
-                <a:ea typeface="+mn-lt"/>
-                <a:cs typeface="+mn-lt"/>
-              </a:rPr>
-              <a:t>tid</a:t>
-            </a:r>
-            <a:r>
-              <a:rPr lang="en-US" dirty="0">
-                <a:ea typeface="+mn-lt"/>
-                <a:cs typeface="+mn-lt"/>
-              </a:rPr>
-              <a:t>, </a:t>
-            </a:r>
-            <a:r>
-              <a:rPr lang="en-US" dirty="0" err="1">
-                <a:ea typeface="+mn-lt"/>
-                <a:cs typeface="+mn-lt"/>
-              </a:rPr>
-              <a:t>så</a:t>
-            </a:r>
-            <a:r>
-              <a:rPr lang="en-US" dirty="0">
-                <a:ea typeface="+mn-lt"/>
-                <a:cs typeface="+mn-lt"/>
-              </a:rPr>
-              <a:t> </a:t>
-            </a:r>
-            <a:r>
-              <a:rPr lang="en-US" dirty="0" err="1">
-                <a:ea typeface="+mn-lt"/>
-                <a:cs typeface="+mn-lt"/>
-              </a:rPr>
-              <a:t>gør</a:t>
-            </a:r>
-            <a:r>
-              <a:rPr lang="en-US" dirty="0">
-                <a:ea typeface="+mn-lt"/>
-                <a:cs typeface="+mn-lt"/>
-              </a:rPr>
-              <a:t> det </a:t>
-            </a:r>
-            <a:r>
-              <a:rPr lang="en-US" dirty="0" err="1">
-                <a:ea typeface="+mn-lt"/>
-                <a:cs typeface="+mn-lt"/>
-              </a:rPr>
-              <a:t>selv</a:t>
-            </a:r>
-            <a:endParaRPr lang="en-US" dirty="0" err="1"/>
-          </a:p>
-          <a:p>
-            <a:pPr marL="341630" indent="-341630"/>
-            <a:r>
-              <a:rPr lang="en-US" dirty="0" err="1">
-                <a:ea typeface="+mn-lt"/>
-                <a:cs typeface="+mn-lt"/>
-              </a:rPr>
-              <a:t>Konkrete</a:t>
-            </a:r>
-            <a:r>
-              <a:rPr lang="en-US" dirty="0">
-                <a:ea typeface="+mn-lt"/>
-                <a:cs typeface="+mn-lt"/>
-              </a:rPr>
-              <a:t> </a:t>
-            </a:r>
-            <a:r>
-              <a:rPr lang="en-US" dirty="0" err="1">
-                <a:ea typeface="+mn-lt"/>
-                <a:cs typeface="+mn-lt"/>
-              </a:rPr>
-              <a:t>råd</a:t>
-            </a:r>
-            <a:r>
-              <a:rPr lang="en-US" dirty="0">
-                <a:ea typeface="+mn-lt"/>
-                <a:cs typeface="+mn-lt"/>
-              </a:rPr>
-              <a:t> </a:t>
+              <a:t>) </a:t>
+            </a:r>
+            <a:r>
+              <a:rPr lang="en-US" dirty="0" err="1">
+                <a:ea typeface="+mn-lt"/>
+                <a:cs typeface="+mn-lt"/>
+              </a:rPr>
+              <a:t>eller</a:t>
+            </a:r>
+            <a:r>
+              <a:rPr lang="en-US" dirty="0">
+                <a:ea typeface="+mn-lt"/>
+                <a:cs typeface="+mn-lt"/>
+              </a:rPr>
+              <a:t> </a:t>
+            </a:r>
+            <a:r>
+              <a:rPr lang="en-US" dirty="0" err="1">
+                <a:ea typeface="+mn-lt"/>
+                <a:cs typeface="+mn-lt"/>
+              </a:rPr>
+              <a:t>få</a:t>
+            </a:r>
+            <a:r>
+              <a:rPr lang="en-US" dirty="0">
+                <a:ea typeface="+mn-lt"/>
+                <a:cs typeface="+mn-lt"/>
+              </a:rPr>
+              <a:t> </a:t>
+            </a:r>
+            <a:r>
+              <a:rPr lang="en-US" dirty="0" err="1">
+                <a:ea typeface="+mn-lt"/>
+                <a:cs typeface="+mn-lt"/>
+              </a:rPr>
+              <a:t>hjælp</a:t>
+            </a:r>
+            <a:r>
+              <a:rPr lang="en-US" dirty="0">
+                <a:ea typeface="+mn-lt"/>
+                <a:cs typeface="+mn-lt"/>
+              </a:rPr>
+              <a:t> </a:t>
+            </a:r>
+            <a:r>
+              <a:rPr lang="en-US" dirty="0" err="1">
+                <a:ea typeface="+mn-lt"/>
+                <a:cs typeface="+mn-lt"/>
+              </a:rPr>
+              <a:t>af</a:t>
+            </a:r>
+            <a:r>
+              <a:rPr lang="en-US" dirty="0">
+                <a:ea typeface="+mn-lt"/>
+                <a:cs typeface="+mn-lt"/>
+              </a:rPr>
+              <a:t> AI </a:t>
             </a:r>
             <a:r>
               <a:rPr lang="en-US" dirty="0" err="1">
@@ -11575,457 +12023,8 @@
                 <a:ea typeface="+mn-lt"/>
                 <a:cs typeface="+mn-lt"/>
               </a:rPr>
-              <a:t> at </a:t>
-            </a:r>
-            <a:r>
-              <a:rPr lang="en-US" dirty="0" err="1">
-                <a:ea typeface="+mn-lt"/>
-                <a:cs typeface="+mn-lt"/>
-              </a:rPr>
-              <a:t>prøve</a:t>
-            </a:r>
-            <a:r>
-              <a:rPr lang="en-US" dirty="0">
-                <a:ea typeface="+mn-lt"/>
-                <a:cs typeface="+mn-lt"/>
-              </a:rPr>
-              <a:t> vibe coding </a:t>
-            </a:r>
-            <a:r>
-              <a:rPr lang="en-US" dirty="0" err="1">
-                <a:ea typeface="+mn-lt"/>
-                <a:cs typeface="+mn-lt"/>
-              </a:rPr>
-              <a:t>på</a:t>
-            </a:r>
-            <a:r>
-              <a:rPr lang="en-US" dirty="0">
-                <a:ea typeface="+mn-lt"/>
-                <a:cs typeface="+mn-lt"/>
-              </a:rPr>
-              <a:t> </a:t>
-            </a:r>
-            <a:r>
-              <a:rPr lang="en-US" dirty="0" err="1">
-                <a:ea typeface="+mn-lt"/>
-                <a:cs typeface="+mn-lt"/>
-              </a:rPr>
-              <a:t>dit</a:t>
-            </a:r>
-            <a:r>
-              <a:rPr lang="en-US" dirty="0">
-                <a:ea typeface="+mn-lt"/>
-                <a:cs typeface="+mn-lt"/>
-              </a:rPr>
-              <a:t> </a:t>
-            </a:r>
-            <a:r>
-              <a:rPr lang="en-US" dirty="0" err="1">
-                <a:ea typeface="+mn-lt"/>
-                <a:cs typeface="+mn-lt"/>
-              </a:rPr>
-              <a:t>eget</a:t>
-            </a:r>
-            <a:r>
-              <a:rPr lang="en-US" dirty="0">
-                <a:ea typeface="+mn-lt"/>
-                <a:cs typeface="+mn-lt"/>
-              </a:rPr>
-              <a:t> dashboard</a:t>
-            </a:r>
-            <a:endParaRPr lang="en-US" dirty="0"/>
-          </a:p>
-          <a:p>
-            <a:pPr marL="683895" indent="-341630"/>
-            <a:r>
-              <a:rPr lang="en-US" dirty="0" err="1">
-                <a:ea typeface="+mn-lt"/>
-                <a:cs typeface="+mn-lt"/>
-              </a:rPr>
-              <a:t>lav</a:t>
-            </a:r>
-            <a:r>
-              <a:rPr lang="en-US" dirty="0">
-                <a:ea typeface="+mn-lt"/>
-                <a:cs typeface="+mn-lt"/>
-              </a:rPr>
-              <a:t> </a:t>
-            </a:r>
-            <a:r>
-              <a:rPr lang="en-US" dirty="0" err="1">
-                <a:ea typeface="+mn-lt"/>
-                <a:cs typeface="+mn-lt"/>
-              </a:rPr>
-              <a:t>en</a:t>
-            </a:r>
-            <a:r>
-              <a:rPr lang="en-US" dirty="0">
-                <a:ea typeface="+mn-lt"/>
-                <a:cs typeface="+mn-lt"/>
-              </a:rPr>
-              <a:t> agents.md (</a:t>
-            </a:r>
-            <a:r>
-              <a:rPr lang="en-US" dirty="0" err="1">
-                <a:ea typeface="+mn-lt"/>
-                <a:cs typeface="+mn-lt"/>
-              </a:rPr>
-              <a:t>eller</a:t>
-            </a:r>
-            <a:r>
-              <a:rPr lang="en-US" dirty="0">
-                <a:ea typeface="+mn-lt"/>
-                <a:cs typeface="+mn-lt"/>
-              </a:rPr>
-              <a:t> find </a:t>
-            </a:r>
-            <a:r>
-              <a:rPr lang="en-US" dirty="0" err="1">
-                <a:ea typeface="+mn-lt"/>
-                <a:cs typeface="+mn-lt"/>
-              </a:rPr>
-              <a:t>en</a:t>
-            </a:r>
-            <a:r>
-              <a:rPr lang="en-US" dirty="0">
-                <a:ea typeface="+mn-lt"/>
-                <a:cs typeface="+mn-lt"/>
-              </a:rPr>
-              <a:t> </a:t>
-            </a:r>
-            <a:r>
-              <a:rPr lang="en-US" dirty="0" err="1">
-                <a:ea typeface="+mn-lt"/>
-                <a:cs typeface="+mn-lt"/>
-              </a:rPr>
-              <a:t>på</a:t>
-            </a:r>
-            <a:r>
-              <a:rPr lang="en-US" dirty="0">
-                <a:ea typeface="+mn-lt"/>
-                <a:cs typeface="+mn-lt"/>
-              </a:rPr>
-              <a:t> </a:t>
-            </a:r>
-            <a:r>
-              <a:rPr lang="en-US" dirty="0" err="1">
-                <a:ea typeface="+mn-lt"/>
-                <a:cs typeface="+mn-lt"/>
-              </a:rPr>
-              <a:t>nettet</a:t>
-            </a:r>
-            <a:r>
-              <a:rPr lang="en-US" dirty="0">
-                <a:ea typeface="+mn-lt"/>
-                <a:cs typeface="+mn-lt"/>
-              </a:rPr>
-              <a:t> </a:t>
-            </a:r>
-            <a:r>
-              <a:rPr lang="en-US" dirty="0" err="1">
-                <a:ea typeface="+mn-lt"/>
-                <a:cs typeface="+mn-lt"/>
-              </a:rPr>
-              <a:t>eller</a:t>
-            </a:r>
-            <a:r>
-              <a:rPr lang="en-US" dirty="0">
-                <a:ea typeface="+mn-lt"/>
-                <a:cs typeface="+mn-lt"/>
-              </a:rPr>
-              <a:t> </a:t>
-            </a:r>
-            <a:r>
-              <a:rPr lang="en-US" dirty="0" err="1">
-                <a:ea typeface="+mn-lt"/>
-                <a:cs typeface="+mn-lt"/>
-              </a:rPr>
-              <a:t>få</a:t>
-            </a:r>
-            <a:r>
-              <a:rPr lang="en-US" dirty="0">
-                <a:ea typeface="+mn-lt"/>
-                <a:cs typeface="+mn-lt"/>
-              </a:rPr>
-              <a:t> </a:t>
-            </a:r>
-            <a:r>
-              <a:rPr lang="en-US" dirty="0" err="1">
-                <a:ea typeface="+mn-lt"/>
-                <a:cs typeface="+mn-lt"/>
-              </a:rPr>
-              <a:t>hjælp</a:t>
-            </a:r>
-            <a:r>
-              <a:rPr lang="en-US" dirty="0">
-                <a:ea typeface="+mn-lt"/>
-                <a:cs typeface="+mn-lt"/>
-              </a:rPr>
-              <a:t> </a:t>
-            </a:r>
-            <a:r>
-              <a:rPr lang="en-US" dirty="0" err="1">
-                <a:ea typeface="+mn-lt"/>
-                <a:cs typeface="+mn-lt"/>
-              </a:rPr>
-              <a:t>af</a:t>
-            </a:r>
-            <a:r>
-              <a:rPr lang="en-US" dirty="0">
-                <a:ea typeface="+mn-lt"/>
-                <a:cs typeface="+mn-lt"/>
-              </a:rPr>
-              <a:t> AI </a:t>
-            </a:r>
-            <a:r>
-              <a:rPr lang="en-US" dirty="0" err="1">
-                <a:ea typeface="+mn-lt"/>
-                <a:cs typeface="+mn-lt"/>
-              </a:rPr>
-              <a:t>til</a:t>
-            </a:r>
-            <a:r>
-              <a:rPr lang="en-US" dirty="0">
-                <a:ea typeface="+mn-lt"/>
-                <a:cs typeface="+mn-lt"/>
-              </a:rPr>
-              <a:t> at lave den)</a:t>
-            </a:r>
-            <a:endParaRPr lang="en-US" dirty="0">
-              <a:ea typeface="Calibri"/>
-            </a:endParaRPr>
-          </a:p>
-          <a:p>
-            <a:pPr marL="683895" lvl="1" indent="-341630"/>
-            <a:r>
-              <a:rPr lang="en-US" dirty="0" err="1">
-                <a:ea typeface="+mn-lt"/>
-                <a:cs typeface="+mn-lt"/>
-              </a:rPr>
-              <a:t>vælg</a:t>
-            </a:r>
-            <a:r>
-              <a:rPr lang="en-US" dirty="0">
-                <a:ea typeface="+mn-lt"/>
-                <a:cs typeface="+mn-lt"/>
-              </a:rPr>
-              <a:t> </a:t>
-            </a:r>
-            <a:r>
-              <a:rPr lang="en-US" dirty="0" err="1">
-                <a:ea typeface="+mn-lt"/>
-                <a:cs typeface="+mn-lt"/>
-              </a:rPr>
-              <a:t>en</a:t>
-            </a:r>
-            <a:r>
-              <a:rPr lang="en-US" dirty="0">
-                <a:ea typeface="+mn-lt"/>
-                <a:cs typeface="+mn-lt"/>
-              </a:rPr>
-              <a:t> </a:t>
-            </a:r>
-            <a:r>
-              <a:rPr lang="en-US" dirty="0" err="1">
-                <a:ea typeface="+mn-lt"/>
-                <a:cs typeface="+mn-lt"/>
-              </a:rPr>
-              <a:t>teknologi</a:t>
-            </a:r>
-            <a:r>
-              <a:rPr lang="en-US" dirty="0">
-                <a:ea typeface="+mn-lt"/>
-                <a:cs typeface="+mn-lt"/>
-              </a:rPr>
-              <a:t>, der </a:t>
-            </a:r>
-            <a:r>
-              <a:rPr lang="en-US" dirty="0" err="1">
-                <a:ea typeface="+mn-lt"/>
-                <a:cs typeface="+mn-lt"/>
-              </a:rPr>
-              <a:t>bliver</a:t>
-            </a:r>
-            <a:r>
-              <a:rPr lang="en-US" dirty="0">
-                <a:ea typeface="+mn-lt"/>
-                <a:cs typeface="+mn-lt"/>
-              </a:rPr>
-              <a:t> </a:t>
-            </a:r>
-            <a:r>
-              <a:rPr lang="en-US" dirty="0" err="1">
-                <a:ea typeface="+mn-lt"/>
-                <a:cs typeface="+mn-lt"/>
-              </a:rPr>
-              <a:t>brugt</a:t>
-            </a:r>
-            <a:r>
-              <a:rPr lang="en-US" dirty="0">
-                <a:ea typeface="+mn-lt"/>
-                <a:cs typeface="+mn-lt"/>
-              </a:rPr>
-              <a:t> </a:t>
-            </a:r>
-            <a:r>
-              <a:rPr lang="en-US" dirty="0" err="1">
-                <a:ea typeface="+mn-lt"/>
-                <a:cs typeface="+mn-lt"/>
-              </a:rPr>
-              <a:t>af</a:t>
-            </a:r>
-            <a:r>
-              <a:rPr lang="en-US" dirty="0">
-                <a:ea typeface="+mn-lt"/>
-                <a:cs typeface="+mn-lt"/>
-              </a:rPr>
-              <a:t> mange</a:t>
-            </a:r>
-            <a:endParaRPr lang="en-US" dirty="0"/>
-          </a:p>
-          <a:p>
-            <a:pPr marL="683895" lvl="1" indent="-341630"/>
-            <a:r>
-              <a:rPr lang="en-US" dirty="0" err="1">
-                <a:ea typeface="+mn-lt"/>
-                <a:cs typeface="+mn-lt"/>
-              </a:rPr>
-              <a:t>vælg</a:t>
-            </a:r>
-            <a:r>
-              <a:rPr lang="en-US" dirty="0">
-                <a:ea typeface="+mn-lt"/>
-                <a:cs typeface="+mn-lt"/>
-              </a:rPr>
-              <a:t> </a:t>
-            </a:r>
-            <a:r>
-              <a:rPr lang="en-US" dirty="0" err="1">
-                <a:ea typeface="+mn-lt"/>
-                <a:cs typeface="+mn-lt"/>
-              </a:rPr>
-              <a:t>metode</a:t>
-            </a:r>
-            <a:r>
-              <a:rPr lang="en-US" dirty="0">
-                <a:ea typeface="+mn-lt"/>
-                <a:cs typeface="+mn-lt"/>
-              </a:rPr>
-              <a:t>/</a:t>
-            </a:r>
-            <a:r>
-              <a:rPr lang="en-US" dirty="0" err="1">
-                <a:ea typeface="+mn-lt"/>
-                <a:cs typeface="+mn-lt"/>
-              </a:rPr>
-              <a:t>teknologi</a:t>
-            </a:r>
-            <a:r>
-              <a:rPr lang="en-US" dirty="0">
-                <a:ea typeface="+mn-lt"/>
-                <a:cs typeface="+mn-lt"/>
-              </a:rPr>
-              <a:t> </a:t>
-            </a:r>
-            <a:r>
-              <a:rPr lang="en-US" dirty="0" err="1">
-                <a:ea typeface="+mn-lt"/>
-                <a:cs typeface="+mn-lt"/>
-              </a:rPr>
-              <a:t>som</a:t>
-            </a:r>
-            <a:r>
-              <a:rPr lang="en-US" dirty="0">
-                <a:ea typeface="+mn-lt"/>
-                <a:cs typeface="+mn-lt"/>
-              </a:rPr>
-              <a:t> du </a:t>
-            </a:r>
-            <a:r>
-              <a:rPr lang="en-US" dirty="0" err="1">
-                <a:ea typeface="+mn-lt"/>
-                <a:cs typeface="+mn-lt"/>
-              </a:rPr>
-              <a:t>selv</a:t>
-            </a:r>
-            <a:r>
-              <a:rPr lang="en-US" dirty="0">
-                <a:ea typeface="+mn-lt"/>
-                <a:cs typeface="+mn-lt"/>
-              </a:rPr>
-              <a:t> </a:t>
-            </a:r>
-            <a:r>
-              <a:rPr lang="en-US" dirty="0" err="1">
-                <a:ea typeface="+mn-lt"/>
-                <a:cs typeface="+mn-lt"/>
-              </a:rPr>
-              <a:t>forstår</a:t>
-            </a:r>
-            <a:r>
-              <a:rPr lang="en-US" dirty="0">
-                <a:ea typeface="+mn-lt"/>
-                <a:cs typeface="+mn-lt"/>
-              </a:rPr>
-              <a:t> (</a:t>
-            </a:r>
-            <a:r>
-              <a:rPr lang="en-US" dirty="0" err="1">
-                <a:ea typeface="+mn-lt"/>
-                <a:cs typeface="+mn-lt"/>
-              </a:rPr>
-              <a:t>ikke</a:t>
-            </a:r>
-            <a:r>
-              <a:rPr lang="en-US" dirty="0">
-                <a:ea typeface="+mn-lt"/>
-                <a:cs typeface="+mn-lt"/>
-              </a:rPr>
-              <a:t> et must, men det </a:t>
-            </a:r>
-            <a:r>
-              <a:rPr lang="en-US" dirty="0" err="1">
-                <a:ea typeface="+mn-lt"/>
-                <a:cs typeface="+mn-lt"/>
-              </a:rPr>
-              <a:t>gør</a:t>
-            </a:r>
-            <a:r>
-              <a:rPr lang="en-US" dirty="0">
-                <a:ea typeface="+mn-lt"/>
-                <a:cs typeface="+mn-lt"/>
-              </a:rPr>
-              <a:t> </a:t>
-            </a:r>
-            <a:r>
-              <a:rPr lang="en-US" dirty="0" err="1">
-                <a:ea typeface="+mn-lt"/>
-                <a:cs typeface="+mn-lt"/>
-              </a:rPr>
-              <a:t>alting</a:t>
-            </a:r>
-            <a:r>
-              <a:rPr lang="en-US" dirty="0">
-                <a:ea typeface="+mn-lt"/>
-                <a:cs typeface="+mn-lt"/>
-              </a:rPr>
-              <a:t> </a:t>
-            </a:r>
-            <a:r>
-              <a:rPr lang="en-US" dirty="0" err="1">
-                <a:ea typeface="+mn-lt"/>
-                <a:cs typeface="+mn-lt"/>
-              </a:rPr>
-              <a:t>nemmere</a:t>
-            </a:r>
-            <a:r>
-              <a:rPr lang="en-US" dirty="0">
-                <a:ea typeface="+mn-lt"/>
-                <a:cs typeface="+mn-lt"/>
-              </a:rPr>
-              <a:t>)</a:t>
-            </a:r>
-            <a:endParaRPr lang="en-US" dirty="0"/>
+              <a:t> at lave den.</a:t>
+            </a:r>
           </a:p>
         </p:txBody>
       </p:sp>
@@ -12323,6 +12322,7 @@
                 <a:latin typeface="Calibri"/>
                 <a:ea typeface="Calibri"/>
                 <a:cs typeface="Arial"/>
+                <a:hlinkClick r:id="rId2"/>
               </a:rPr>
               <a:t>https://github.com/steenhulthin/vibe-coding-kortdage-2025 </a:t>
             </a:r>
@@ -12351,6 +12351,7 @@
                 <a:latin typeface="Calibri"/>
                 <a:ea typeface="Calibri"/>
                 <a:cs typeface="Arial"/>
+                <a:hlinkClick r:id="rId3"/>
               </a:rPr>
               <a:t>https://steenhulthin.github.io/vibe-coding-kortdage-2025/ </a:t>
             </a:r>
@@ -14418,14 +14419,14 @@
           <a:p>
             <a:pPr marL="683630" lvl="1" indent="-341630"/>
             <a:r>
-              <a:rPr lang="en-US" dirty="0" err="1">
+              <a:rPr lang="en-US" sz="1800" dirty="0" err="1">
                 <a:ea typeface="Calibri"/>
                 <a:cs typeface="Calibri"/>
               </a:rPr>
               <a:t>Globalt</a:t>
             </a:r>
             <a:r>
-              <a:rPr lang="en-US" dirty="0">
+              <a:rPr lang="en-US" sz="1800" dirty="0">
                 <a:ea typeface="Calibri"/>
                 <a:cs typeface="Calibri"/>
               </a:rPr>
@@ -14435,7 +14436,7 @@
           <a:p>
             <a:pPr marL="683630" lvl="1" indent="-341630"/>
             <a:r>
-              <a:rPr lang="en-US" dirty="0">
+              <a:rPr lang="en-US" sz="1800" dirty="0">
                 <a:ea typeface="Calibri"/>
                 <a:cs typeface="Calibri"/>
               </a:rPr>
@@ -14445,13 +14446,13 @@
           <a:p>
             <a:pPr marL="683630" lvl="1" indent="-341630"/>
             <a:r>
-              <a:rPr lang="en-US" dirty="0">
+              <a:rPr lang="en-US" sz="1800" dirty="0">
                 <a:ea typeface="Calibri"/>
                 <a:cs typeface="Calibri"/>
               </a:rPr>
               <a:t>Dansk: SSI </a:t>
             </a:r>
-            <a:endParaRPr lang="en-US" dirty="0">
+            <a:endParaRPr lang="en-US" sz="1800" dirty="0">
               <a:ea typeface="Calibri"/>
             </a:endParaRPr>
           </a:p>
@@ -14618,7 +14619,7 @@
                 <a:ea typeface="Calibri"/>
                 <a:cs typeface="Arial"/>
               </a:rPr>
-              <a:t> (</a:t>
+              <a:t> var (</a:t>
             </a:r>
             <a:r>
               <a:rPr lang="en-US" dirty="0">
@@ -14664,11 +14665,18 @@
           <a:p>
             <a:pPr marL="683895" indent="-341630"/>
             <a:r>
-              <a:rPr lang="en-US" dirty="0" err="1">
-                <a:ea typeface="+mn-lt"/>
-                <a:cs typeface="+mn-lt"/>
-              </a:rPr>
-              <a:t>Lær</a:t>
+              <a:rPr lang="en-US" dirty="0">
+                <a:ea typeface="+mn-lt"/>
+                <a:cs typeface="+mn-lt"/>
+              </a:rPr>
+              <a:t>At </a:t>
+            </a:r>
+            <a:r>
+              <a:rPr lang="en-US" dirty="0" err="1">
+                <a:ea typeface="+mn-lt"/>
+                <a:cs typeface="+mn-lt"/>
+              </a:rPr>
+              <a:t>lære</a:t>
             </a:r>
             <a:r>
               <a:rPr lang="en-US" dirty="0">
@@ -14710,7 +14718,49 @@
                 <a:ea typeface="+mn-lt"/>
                 <a:cs typeface="+mn-lt"/>
               </a:rPr>
-              <a:t>videreformidl</a:t>
+              <a:t>videreformidle</a:t>
+            </a:r>
+            <a:r>
+              <a:rPr lang="en-US" dirty="0">
+                <a:ea typeface="+mn-lt"/>
+                <a:cs typeface="+mn-lt"/>
+              </a:rPr>
+              <a:t>, </a:t>
+            </a:r>
+            <a:r>
+              <a:rPr lang="en-US" dirty="0" err="1">
+                <a:ea typeface="+mn-lt"/>
+                <a:cs typeface="+mn-lt"/>
+              </a:rPr>
+              <a:t>hvad</a:t>
+            </a:r>
+            <a:r>
+              <a:rPr lang="en-US" dirty="0">
+                <a:ea typeface="+mn-lt"/>
+                <a:cs typeface="+mn-lt"/>
+              </a:rPr>
+              <a:t> </a:t>
+            </a:r>
+            <a:r>
+              <a:rPr lang="en-US" dirty="0" err="1">
+                <a:ea typeface="+mn-lt"/>
+                <a:cs typeface="+mn-lt"/>
+              </a:rPr>
+              <a:t>jeg</a:t>
+            </a:r>
+            <a:r>
+              <a:rPr lang="en-US" dirty="0">
+                <a:ea typeface="+mn-lt"/>
+                <a:cs typeface="+mn-lt"/>
+              </a:rPr>
+              <a:t> har </a:t>
+            </a:r>
+            <a:r>
+              <a:rPr lang="en-US" dirty="0" err="1">
+                <a:ea typeface="+mn-lt"/>
+                <a:cs typeface="+mn-lt"/>
+              </a:rPr>
+              <a:t>lært</a:t>
             </a:r>
             <a:endParaRPr lang="en-US" dirty="0">
               <a:ea typeface="Calibri"/>
@@ -14723,7 +14773,7 @@
                 <a:ea typeface="+mn-lt"/>
                 <a:cs typeface="+mn-lt"/>
               </a:rPr>
-              <a:t>Lad alt </a:t>
+              <a:t>At lade alt </a:t>
             </a:r>
             <a:r>
               <a:rPr lang="en-US" dirty="0" err="1">
@@ -14760,16 +14810,30 @@
               </a:rPr>
               <a:t>tilgængelig</a:t>
             </a:r>
+            <a:r>
+              <a:rPr lang="en-US" dirty="0">
+                <a:ea typeface="+mn-lt"/>
+                <a:cs typeface="+mn-lt"/>
+              </a:rPr>
+              <a:t> </a:t>
+            </a:r>
             <a:endParaRPr lang="en-US" dirty="0"/>
           </a:p>
           <a:p>
             <a:pPr marL="683895" lvl="1" indent="-341630"/>
             <a:r>
-              <a:rPr lang="en-US" dirty="0" err="1">
-                <a:ea typeface="+mn-lt"/>
-                <a:cs typeface="+mn-lt"/>
-              </a:rPr>
-              <a:t>Kom</a:t>
+              <a:rPr lang="en-US" dirty="0">
+                <a:ea typeface="+mn-lt"/>
+                <a:cs typeface="+mn-lt"/>
+              </a:rPr>
+              <a:t>At </a:t>
+            </a:r>
+            <a:r>
+              <a:rPr lang="en-US" dirty="0" err="1">
+                <a:ea typeface="+mn-lt"/>
+                <a:cs typeface="+mn-lt"/>
+              </a:rPr>
+              <a:t>komme</a:t>
             </a:r>
             <a:r>
               <a:rPr lang="en-US" dirty="0">
@@ -14832,18 +14896,11 @@
           <a:p>
             <a:pPr marL="683895" lvl="1" indent="-341630"/>
             <a:r>
-              <a:rPr lang="en-US" dirty="0" err="1">
-                <a:ea typeface="+mn-lt"/>
-                <a:cs typeface="+mn-lt"/>
-              </a:rPr>
-              <a:t>Hav</a:t>
-            </a:r>
-            <a:r>
-              <a:rPr lang="en-US" dirty="0">
-                <a:ea typeface="+mn-lt"/>
-                <a:cs typeface="+mn-lt"/>
-              </a:rPr>
-              <a:t> det </a:t>
+              <a:rPr lang="en-US" dirty="0">
+                <a:ea typeface="+mn-lt"/>
+                <a:cs typeface="+mn-lt"/>
+              </a:rPr>
+              <a:t>At have det </a:t>
             </a:r>
             <a:r>
               <a:rPr lang="en-US" dirty="0" err="1">
@@ -14851,6 +14908,13 @@
                 <a:cs typeface="+mn-lt"/>
               </a:rPr>
               <a:t>sjovt</a:t>
+            </a:r>
+            <a:r>
+              <a:rPr lang="en-US" dirty="0">
+                <a:ea typeface="+mn-lt"/>
+                <a:cs typeface="+mn-lt"/>
+              </a:rPr>
+              <a:t> 🎉</a:t>
             </a:r>
             <a:endParaRPr lang="en-US" dirty="0"/>
           </a:p>
@@ -15005,217 +15069,231 @@
           <a:p>
             <a:pPr marL="341630" indent="-341630"/>
             <a:r>
-              <a:rPr lang="en-GB">
+              <a:rPr lang="en-GB" dirty="0">
                 <a:ea typeface="+mn-lt"/>
                 <a:cs typeface="+mn-lt"/>
               </a:rPr>
               <a:t>Steen: "Lad AI lave </a:t>
             </a:r>
             <a:r>
-              <a:rPr lang="en-GB" err="1">
+              <a:rPr lang="en-GB" dirty="0" err="1">
                 <a:ea typeface="+mn-lt"/>
                 <a:cs typeface="+mn-lt"/>
               </a:rPr>
               <a:t>en</a:t>
             </a:r>
             <a:r>
-              <a:rPr lang="en-GB">
+              <a:rPr lang="en-GB" dirty="0">
                 <a:ea typeface="+mn-lt"/>
                 <a:cs typeface="+mn-lt"/>
               </a:rPr>
               <a:t> PowerPoint-</a:t>
             </a:r>
             <a:r>
-              <a:rPr lang="en-GB" err="1">
+              <a:rPr lang="en-GB" dirty="0" err="1">
                 <a:ea typeface="+mn-lt"/>
                 <a:cs typeface="+mn-lt"/>
               </a:rPr>
               <a:t>præsentation</a:t>
             </a:r>
             <a:r>
-              <a:rPr lang="en-GB">
-                <a:ea typeface="+mn-lt"/>
-                <a:cs typeface="+mn-lt"/>
-              </a:rPr>
-              <a:t> </a:t>
-            </a:r>
-            <a:r>
-              <a:rPr lang="en-GB" err="1">
+              <a:rPr lang="en-GB" dirty="0">
+                <a:ea typeface="+mn-lt"/>
+                <a:cs typeface="+mn-lt"/>
+              </a:rPr>
+              <a:t> </a:t>
+            </a:r>
+            <a:r>
+              <a:rPr lang="en-GB" dirty="0" err="1">
                 <a:ea typeface="+mn-lt"/>
                 <a:cs typeface="+mn-lt"/>
               </a:rPr>
               <a:t>i</a:t>
             </a:r>
             <a:r>
-              <a:rPr lang="en-GB">
+              <a:rPr lang="en-GB" dirty="0">
                 <a:ea typeface="+mn-lt"/>
                 <a:cs typeface="+mn-lt"/>
               </a:rPr>
               <a:t> SSI </a:t>
             </a:r>
             <a:r>
-              <a:rPr lang="en-GB" err="1">
+              <a:rPr lang="en-GB" dirty="0" err="1">
                 <a:ea typeface="+mn-lt"/>
                 <a:cs typeface="+mn-lt"/>
               </a:rPr>
               <a:t>skabelonen</a:t>
             </a:r>
             <a:r>
-              <a:rPr lang="en-GB">
+              <a:rPr lang="en-GB" dirty="0">
                 <a:ea typeface="+mn-lt"/>
                 <a:cs typeface="+mn-lt"/>
               </a:rPr>
               <a:t>..."</a:t>
             </a:r>
-            <a:endParaRPr lang="en-US"/>
+            <a:endParaRPr lang="en-US" dirty="0"/>
           </a:p>
           <a:p>
             <a:pPr marL="341630" indent="-341630"/>
             <a:r>
-              <a:rPr lang="en-GB">
+              <a:rPr lang="en-GB" dirty="0">
                 <a:ea typeface="+mn-lt"/>
                 <a:cs typeface="+mn-lt"/>
               </a:rPr>
               <a:t>2 timer </a:t>
             </a:r>
             <a:r>
-              <a:rPr lang="en-GB" err="1">
+              <a:rPr lang="en-GB" dirty="0" err="1">
                 <a:ea typeface="+mn-lt"/>
                 <a:cs typeface="+mn-lt"/>
               </a:rPr>
               <a:t>og</a:t>
             </a:r>
             <a:r>
-              <a:rPr lang="en-GB">
+              <a:rPr lang="en-GB" dirty="0">
                 <a:ea typeface="+mn-lt"/>
                 <a:cs typeface="+mn-lt"/>
               </a:rPr>
               <a:t> mange </a:t>
             </a:r>
             <a:r>
-              <a:rPr lang="en-GB" err="1">
+              <a:rPr lang="en-GB" dirty="0" err="1">
                 <a:ea typeface="+mn-lt"/>
                 <a:cs typeface="+mn-lt"/>
               </a:rPr>
               <a:t>forsøg</a:t>
             </a:r>
             <a:r>
-              <a:rPr lang="en-GB">
-                <a:ea typeface="+mn-lt"/>
-                <a:cs typeface="+mn-lt"/>
-              </a:rPr>
-              <a:t> </a:t>
-            </a:r>
-            <a:r>
-              <a:rPr lang="en-GB" err="1">
+              <a:rPr lang="en-GB" dirty="0">
+                <a:ea typeface="+mn-lt"/>
+                <a:cs typeface="+mn-lt"/>
+              </a:rPr>
+              <a:t> </a:t>
+            </a:r>
+            <a:r>
+              <a:rPr lang="en-GB" dirty="0" err="1">
                 <a:ea typeface="+mn-lt"/>
                 <a:cs typeface="+mn-lt"/>
               </a:rPr>
               <a:t>senere</a:t>
             </a:r>
             <a:r>
-              <a:rPr lang="en-GB">
+              <a:rPr lang="en-GB" dirty="0">
                 <a:ea typeface="+mn-lt"/>
                 <a:cs typeface="+mn-lt"/>
               </a:rPr>
               <a:t>: "</a:t>
             </a:r>
             <a:r>
-              <a:rPr lang="en-GB" err="1">
+              <a:rPr lang="en-GB" dirty="0" err="1">
                 <a:ea typeface="+mn-lt"/>
                 <a:cs typeface="+mn-lt"/>
               </a:rPr>
               <a:t>Nå</a:t>
             </a:r>
             <a:r>
-              <a:rPr lang="en-GB">
+              <a:rPr lang="en-GB" dirty="0">
                 <a:ea typeface="+mn-lt"/>
                 <a:cs typeface="+mn-lt"/>
               </a:rPr>
               <a:t>, </a:t>
             </a:r>
             <a:r>
-              <a:rPr lang="en-GB" err="1">
+              <a:rPr lang="en-GB" dirty="0" err="1">
                 <a:ea typeface="+mn-lt"/>
                 <a:cs typeface="+mn-lt"/>
               </a:rPr>
               <a:t>måske</a:t>
             </a:r>
             <a:r>
-              <a:rPr lang="en-GB">
-                <a:ea typeface="+mn-lt"/>
-                <a:cs typeface="+mn-lt"/>
-              </a:rPr>
-              <a:t> er AI </a:t>
-            </a:r>
-            <a:r>
-              <a:rPr lang="en-GB" err="1">
+              <a:rPr lang="en-GB" dirty="0">
+                <a:ea typeface="+mn-lt"/>
+                <a:cs typeface="+mn-lt"/>
+              </a:rPr>
+              <a:t> </a:t>
+            </a:r>
+            <a:r>
+              <a:rPr lang="en-GB" dirty="0" err="1">
+                <a:ea typeface="+mn-lt"/>
+                <a:cs typeface="+mn-lt"/>
+              </a:rPr>
+              <a:t>er</a:t>
+            </a:r>
+            <a:r>
+              <a:rPr lang="en-GB" dirty="0">
+                <a:ea typeface="+mn-lt"/>
+                <a:cs typeface="+mn-lt"/>
+              </a:rPr>
+              <a:t> AI </a:t>
+            </a:r>
+            <a:r>
+              <a:rPr lang="en-GB" dirty="0" err="1">
                 <a:ea typeface="+mn-lt"/>
                 <a:cs typeface="+mn-lt"/>
               </a:rPr>
               <a:t>bedre</a:t>
             </a:r>
             <a:r>
-              <a:rPr lang="en-GB">
-                <a:ea typeface="+mn-lt"/>
-                <a:cs typeface="+mn-lt"/>
-              </a:rPr>
-              <a:t> </a:t>
-            </a:r>
-            <a:r>
-              <a:rPr lang="en-GB" err="1">
+              <a:rPr lang="en-GB" dirty="0">
+                <a:ea typeface="+mn-lt"/>
+                <a:cs typeface="+mn-lt"/>
+              </a:rPr>
+              <a:t> </a:t>
+            </a:r>
+            <a:r>
+              <a:rPr lang="en-GB" dirty="0" err="1">
                 <a:ea typeface="+mn-lt"/>
                 <a:cs typeface="+mn-lt"/>
               </a:rPr>
               <a:t>til</a:t>
             </a:r>
             <a:r>
-              <a:rPr lang="en-GB">
+              <a:rPr lang="en-GB" dirty="0">
                 <a:ea typeface="+mn-lt"/>
                 <a:cs typeface="+mn-lt"/>
               </a:rPr>
               <a:t> at </a:t>
             </a:r>
             <a:r>
-              <a:rPr lang="en-GB" err="1">
+              <a:rPr lang="en-GB" dirty="0" err="1">
                 <a:ea typeface="+mn-lt"/>
                 <a:cs typeface="+mn-lt"/>
               </a:rPr>
               <a:t>skrive</a:t>
             </a:r>
             <a:r>
-              <a:rPr lang="en-GB">
-                <a:ea typeface="+mn-lt"/>
-                <a:cs typeface="+mn-lt"/>
-              </a:rPr>
-              <a:t> </a:t>
-            </a:r>
-            <a:r>
-              <a:rPr lang="en-GB" err="1">
+              <a:rPr lang="en-GB" dirty="0">
+                <a:ea typeface="+mn-lt"/>
+                <a:cs typeface="+mn-lt"/>
+              </a:rPr>
+              <a:t> </a:t>
+            </a:r>
+            <a:r>
+              <a:rPr lang="en-GB" dirty="0" err="1">
                 <a:ea typeface="+mn-lt"/>
                 <a:cs typeface="+mn-lt"/>
               </a:rPr>
               <a:t>kode</a:t>
             </a:r>
             <a:r>
-              <a:rPr lang="en-GB">
-                <a:ea typeface="+mn-lt"/>
-                <a:cs typeface="+mn-lt"/>
-              </a:rPr>
-              <a:t> and PowerPoint..."</a:t>
-            </a:r>
-            <a:endParaRPr lang="en-GB"/>
+              <a:rPr lang="en-GB" dirty="0">
+                <a:ea typeface="+mn-lt"/>
+                <a:cs typeface="+mn-lt"/>
+              </a:rPr>
+              <a:t> end PowerPoint..."</a:t>
+            </a:r>
+            <a:endParaRPr lang="en-GB" dirty="0"/>
           </a:p>
           <a:p>
             <a:pPr marL="341630" indent="-341630"/>
-            <a:endParaRPr lang="en-GB">
+            <a:endParaRPr lang="en-GB" dirty="0">
               <a:ea typeface="Calibri"/>
               <a:cs typeface="Arial"/>
             </a:endParaRPr>
           </a:p>
           <a:p>
             <a:pPr marL="341630" indent="-341630"/>
-            <a:endParaRPr lang="en-GB">
+            <a:endParaRPr lang="en-GB" dirty="0">
               <a:ea typeface="Calibri"/>
             </a:endParaRPr>
           </a:p>
@@ -15546,6 +15624,54 @@
                 <a:ea typeface="Calibri"/>
                 <a:cs typeface="Calibri"/>
               </a:rPr>
+              <a:t> AI-</a:t>
+            </a:r>
+            <a:r>
+              <a:rPr lang="en-US" dirty="0" err="1">
+                <a:latin typeface="Calibri"/>
+                <a:ea typeface="Calibri"/>
+                <a:cs typeface="Calibri"/>
+              </a:rPr>
+              <a:t>assisteret</a:t>
+            </a:r>
+            <a:r>
+              <a:rPr lang="en-US" dirty="0">
+                <a:latin typeface="Calibri"/>
+                <a:ea typeface="Calibri"/>
+                <a:cs typeface="Calibri"/>
+              </a:rPr>
+              <a:t> </a:t>
+            </a:r>
+            <a:r>
+              <a:rPr lang="en-US" dirty="0" err="1">
+                <a:latin typeface="Calibri"/>
+                <a:ea typeface="Calibri"/>
+                <a:cs typeface="Calibri"/>
+              </a:rPr>
+              <a:t>udvikling</a:t>
+            </a:r>
+            <a:r>
+              <a:rPr lang="en-US" dirty="0">
+                <a:latin typeface="Calibri"/>
+                <a:ea typeface="Calibri"/>
+                <a:cs typeface="Calibri"/>
+              </a:rPr>
+              <a:t> </a:t>
+            </a:r>
+            <a:r>
+              <a:rPr lang="en-US" dirty="0" err="1">
+                <a:latin typeface="Calibri"/>
+                <a:ea typeface="Calibri"/>
+                <a:cs typeface="Calibri"/>
+              </a:rPr>
+              <a:t>og</a:t>
+            </a:r>
+            <a:r>
+              <a:rPr lang="en-US" dirty="0">
+                <a:latin typeface="Calibri"/>
+                <a:ea typeface="Calibri"/>
+                <a:cs typeface="Calibri"/>
+              </a:rPr>
               <a:t> “Vibe Coding”?</a:t>
             </a:r>
             <a:endParaRPr lang="en-US" dirty="0"/>
@@ -15581,8 +15707,154 @@
           </a:xfrm>
         </p:spPr>
         <p:txBody>
-          <a:bodyPr/>
+          <a:bodyPr>
+            <a:normAutofit/>
+          </a:bodyPr>
           <a:lstStyle/>
+          <a:p>
+            <a:pPr marL="341630" indent="-341630"/>
+            <a:r>
+              <a:rPr lang="en-US" dirty="0">
+                <a:solidFill>
+                  <a:srgbClr val="000000"/>
+                </a:solidFill>
+                <a:ea typeface="Calibri"/>
+                <a:cs typeface="Calibri"/>
+              </a:rPr>
+              <a:t>AI-</a:t>
+            </a:r>
+            <a:r>
+              <a:rPr lang="en-US" dirty="0" err="1">
+                <a:solidFill>
+                  <a:srgbClr val="000000"/>
+                </a:solidFill>
+                <a:ea typeface="Calibri"/>
+                <a:cs typeface="Calibri"/>
+              </a:rPr>
+              <a:t>assisteret</a:t>
+            </a:r>
+            <a:r>
+              <a:rPr lang="en-US" dirty="0">
+                <a:solidFill>
+                  <a:srgbClr val="000000"/>
+                </a:solidFill>
+                <a:ea typeface="Calibri"/>
+                <a:cs typeface="Calibri"/>
+              </a:rPr>
+              <a:t> </a:t>
+            </a:r>
+            <a:r>
+              <a:rPr lang="en-US" dirty="0" err="1">
+                <a:solidFill>
+                  <a:srgbClr val="000000"/>
+                </a:solidFill>
+                <a:ea typeface="Calibri"/>
+                <a:cs typeface="Calibri"/>
+              </a:rPr>
+              <a:t>udvikling</a:t>
+            </a:r>
+            <a:r>
+              <a:rPr lang="en-US" dirty="0">
+                <a:solidFill>
+                  <a:srgbClr val="000000"/>
+                </a:solidFill>
+                <a:ea typeface="Calibri"/>
+                <a:cs typeface="Calibri"/>
+              </a:rPr>
+              <a:t>: </a:t>
+            </a:r>
+            <a:r>
+              <a:rPr lang="en-US" dirty="0" err="1">
+                <a:solidFill>
+                  <a:srgbClr val="000000"/>
+                </a:solidFill>
+                <a:ea typeface="Calibri"/>
+                <a:cs typeface="Calibri"/>
+              </a:rPr>
+              <a:t>manuel</a:t>
+            </a:r>
+            <a:r>
+              <a:rPr lang="en-US" dirty="0">
+                <a:solidFill>
+                  <a:srgbClr val="000000"/>
+                </a:solidFill>
+                <a:ea typeface="Calibri"/>
+                <a:cs typeface="Calibri"/>
+              </a:rPr>
+              <a:t> prompt-workflow </a:t>
+            </a:r>
+            <a:r>
+              <a:rPr lang="en-US" dirty="0" err="1">
+                <a:solidFill>
+                  <a:srgbClr val="000000"/>
+                </a:solidFill>
+                <a:ea typeface="Calibri"/>
+                <a:cs typeface="Calibri"/>
+              </a:rPr>
+              <a:t>udenfor</a:t>
+            </a:r>
+            <a:r>
+              <a:rPr lang="en-US" dirty="0">
+                <a:solidFill>
+                  <a:srgbClr val="000000"/>
+                </a:solidFill>
+                <a:ea typeface="Calibri"/>
+                <a:cs typeface="Calibri"/>
+              </a:rPr>
+              <a:t> </a:t>
+            </a:r>
+            <a:r>
+              <a:rPr lang="en-US" dirty="0" err="1">
+                <a:solidFill>
+                  <a:srgbClr val="000000"/>
+                </a:solidFill>
+                <a:ea typeface="Calibri"/>
+                <a:cs typeface="Calibri"/>
+              </a:rPr>
+              <a:t>IDE’et</a:t>
+            </a:r>
+            <a:r>
+              <a:rPr lang="en-US" dirty="0">
+                <a:solidFill>
+                  <a:srgbClr val="000000"/>
+                </a:solidFill>
+                <a:ea typeface="Calibri"/>
+                <a:cs typeface="Calibri"/>
+              </a:rPr>
+              <a:t> (den "</a:t>
+            </a:r>
+            <a:r>
+              <a:rPr lang="en-US" dirty="0" err="1">
+                <a:solidFill>
+                  <a:srgbClr val="000000"/>
+                </a:solidFill>
+                <a:ea typeface="Calibri"/>
+                <a:cs typeface="Calibri"/>
+              </a:rPr>
+              <a:t>almindelige"prompt</a:t>
+            </a:r>
+            <a:r>
+              <a:rPr lang="en-US" dirty="0">
+                <a:solidFill>
+                  <a:srgbClr val="000000"/>
+                </a:solidFill>
+                <a:ea typeface="Calibri"/>
+                <a:cs typeface="Calibri"/>
+              </a:rPr>
+              <a:t>)</a:t>
+            </a:r>
+          </a:p>
+          <a:p>
+            <a:pPr marL="341630" indent="-341630"/>
+            <a:endParaRPr lang="en-US" dirty="0">
+              <a:solidFill>
+                <a:srgbClr val="000000"/>
+              </a:solidFill>
+              <a:latin typeface="Calibri"/>
+              <a:ea typeface="Calibri"/>
+              <a:cs typeface="Arial"/>
+            </a:endParaRPr>
+          </a:p>
           <a:p>
             <a:pPr marL="341630" indent="-341630"/>
             <a:r>
@@ -16406,163 +16678,6 @@
             <a:endParaRPr lang="en-US" dirty="0">
               <a:ea typeface="Calibri"/>
             </a:endParaRPr>
-          </a:p>
-          <a:p>
-            <a:pPr marL="341630" indent="-341630"/>
-            <a:endParaRPr lang="en-US" dirty="0">
-              <a:solidFill>
-                <a:srgbClr val="000000"/>
-              </a:solidFill>
-              <a:latin typeface="Calibri"/>
-              <a:ea typeface="Calibri"/>
-              <a:cs typeface="Calibri"/>
-            </a:endParaRPr>
-          </a:p>
-          <a:p>
-            <a:pPr marL="341630" indent="-341630"/>
-            <a:r>
-              <a:rPr lang="en-US" dirty="0">
-                <a:solidFill>
-                  <a:srgbClr val="000000"/>
-                </a:solidFill>
-                <a:latin typeface="Calibri"/>
-                <a:ea typeface="Calibri"/>
-                <a:cs typeface="Calibri"/>
-              </a:rPr>
-              <a:t>AI-</a:t>
-            </a:r>
-            <a:r>
-              <a:rPr lang="en-US" dirty="0" err="1">
-                <a:solidFill>
-                  <a:srgbClr val="000000"/>
-                </a:solidFill>
-                <a:latin typeface="Calibri"/>
-                <a:ea typeface="Calibri"/>
-                <a:cs typeface="Calibri"/>
-              </a:rPr>
-              <a:t>assisteret</a:t>
-            </a:r>
-            <a:r>
-              <a:rPr lang="en-US" dirty="0">
-                <a:solidFill>
-                  <a:srgbClr val="000000"/>
-                </a:solidFill>
-                <a:latin typeface="Calibri"/>
-                <a:ea typeface="Calibri"/>
-                <a:cs typeface="Calibri"/>
-              </a:rPr>
-              <a:t> </a:t>
-            </a:r>
-            <a:r>
-              <a:rPr lang="en-US" dirty="0" err="1">
-                <a:solidFill>
-                  <a:srgbClr val="000000"/>
-                </a:solidFill>
-                <a:latin typeface="Calibri"/>
-                <a:ea typeface="Calibri"/>
-                <a:cs typeface="Calibri"/>
-              </a:rPr>
-              <a:t>udvikling</a:t>
-            </a:r>
-            <a:r>
-              <a:rPr lang="en-US" dirty="0">
-                <a:solidFill>
-                  <a:srgbClr val="000000"/>
-                </a:solidFill>
-                <a:latin typeface="Calibri"/>
-                <a:ea typeface="Calibri"/>
-                <a:cs typeface="Calibri"/>
-              </a:rPr>
-              <a:t>: </a:t>
-            </a:r>
-            <a:r>
-              <a:rPr lang="en-US" dirty="0" err="1">
-                <a:solidFill>
-                  <a:srgbClr val="000000"/>
-                </a:solidFill>
-                <a:latin typeface="Calibri"/>
-                <a:ea typeface="Calibri"/>
-                <a:cs typeface="Calibri"/>
-              </a:rPr>
-              <a:t>manuel</a:t>
-            </a:r>
-            <a:r>
-              <a:rPr lang="en-US" dirty="0">
-                <a:solidFill>
-                  <a:srgbClr val="000000"/>
-                </a:solidFill>
-                <a:latin typeface="Calibri"/>
-                <a:ea typeface="Calibri"/>
-                <a:cs typeface="Calibri"/>
-              </a:rPr>
-              <a:t> prompt-workflow </a:t>
-            </a:r>
-            <a:r>
-              <a:rPr lang="en-US" dirty="0" err="1">
-                <a:solidFill>
-                  <a:srgbClr val="000000"/>
-                </a:solidFill>
-                <a:latin typeface="Calibri"/>
-                <a:ea typeface="Calibri"/>
-                <a:cs typeface="Calibri"/>
-              </a:rPr>
-              <a:t>udenfor</a:t>
-            </a:r>
-            <a:r>
-              <a:rPr lang="en-US" dirty="0">
-                <a:solidFill>
-                  <a:srgbClr val="000000"/>
-                </a:solidFill>
-                <a:latin typeface="Calibri"/>
-                <a:ea typeface="Calibri"/>
-                <a:cs typeface="Calibri"/>
-              </a:rPr>
-              <a:t> </a:t>
-            </a:r>
-            <a:r>
-              <a:rPr lang="en-US" dirty="0" err="1">
-                <a:solidFill>
-                  <a:srgbClr val="000000"/>
-                </a:solidFill>
-                <a:latin typeface="Calibri"/>
-                <a:ea typeface="Calibri"/>
-                <a:cs typeface="Calibri"/>
-              </a:rPr>
-              <a:t>IDE’et</a:t>
-            </a:r>
-            <a:r>
-              <a:rPr lang="en-US" dirty="0">
-                <a:solidFill>
-                  <a:srgbClr val="000000"/>
-                </a:solidFill>
-                <a:latin typeface="Calibri"/>
-                <a:ea typeface="Calibri"/>
-                <a:cs typeface="Calibri"/>
-              </a:rPr>
-              <a:t> (den "</a:t>
-            </a:r>
-            <a:r>
-              <a:rPr lang="en-US" dirty="0" err="1">
-                <a:solidFill>
-                  <a:srgbClr val="000000"/>
-                </a:solidFill>
-                <a:latin typeface="Calibri"/>
-                <a:ea typeface="Calibri"/>
-                <a:cs typeface="Calibri"/>
-              </a:rPr>
-              <a:t>almindelige"prompt</a:t>
-            </a:r>
-            <a:r>
-              <a:rPr lang="en-US" dirty="0">
-                <a:solidFill>
-                  <a:srgbClr val="000000"/>
-                </a:solidFill>
-                <a:latin typeface="Calibri"/>
-                <a:ea typeface="Calibri"/>
-                <a:cs typeface="Calibri"/>
-              </a:rPr>
-              <a:t>)</a:t>
-            </a:r>
           </a:p>
           <a:p>
             <a:pPr marL="341630" indent="-341630"/>
@@ -17436,6 +17551,15 @@
 </file>
 
 <file path=customXml/item1.xml><?xml version="1.0" encoding="utf-8"?>
+<?mso-contentType ?>
+<FormTemplates xmlns="http://schemas.microsoft.com/sharepoint/v3/contenttype/forms">
+  <Display>DocumentLibraryForm</Display>
+  <Edit>DocumentLibraryForm</Edit>
+  <New>DocumentLibraryForm</New>
+</FormTemplates>
+</file>
+
+<file path=customXml/item2.xml><?xml version="1.0" encoding="utf-8"?>
 <ct:contentTypeSchema xmlns:ct="http://schemas.microsoft.com/office/2006/metadata/contentType" xmlns:ma="http://schemas.microsoft.com/office/2006/metadata/properties/metaAttributes" ct:_="" ma:_="" ma:contentTypeName="Dokument" ma:contentTypeID="0x0101007701BA1634B2B04D8AB99B32221FEA66" ma:contentTypeVersion="20" ma:contentTypeDescription="Opret et nyt dokument." ma:contentTypeScope="" ma:versionID="6bc72618500a8a6efef4e15fe3458a19">
   <xsd:schema xmlns:xsd="http://www.w3.org/2001/XMLSchema" xmlns:xs="http://www.w3.org/2001/XMLSchema" xmlns:p="http://schemas.microsoft.com/office/2006/metadata/properties" xmlns:ns2="12ff74cc-9611-4422-8f5f-2fd59a0d1353" xmlns:ns3="eee2f643-61f1-4bc5-bd2f-0ddea5310e08" targetNamespace="http://schemas.microsoft.com/office/2006/metadata/properties" ma:root="true" ma:fieldsID="fb24fa6afb0e51ed4580ee901350a5d1" ns2:_="" ns3:_="">
     <xsd:import namespace="12ff74cc-9611-4422-8f5f-2fd59a0d1353"/>
@@ -17698,15 +17822,6 @@
 </ct:contentTypeSchema>
 </file>
 
-<file path=customXml/item2.xml><?xml version="1.0" encoding="utf-8"?>
-<?mso-contentType ?>
-<FormTemplates xmlns="http://schemas.microsoft.com/sharepoint/v3/contenttype/forms">
-  <Display>DocumentLibraryForm</Display>
-  <Edit>DocumentLibraryForm</Edit>
-  <New>DocumentLibraryForm</New>
-</FormTemplates>
-</file>
-
 <file path=customXml/item3.xml><?xml version="1.0" encoding="utf-8"?>
 <p:properties xmlns:p="http://schemas.microsoft.com/office/2006/metadata/properties" xmlns:xsi="http://www.w3.org/2001/XMLSchema-instance" xmlns:pc="http://schemas.microsoft.com/office/infopath/2007/PartnerControls">
   <documentManagement>
@@ -17721,6 +17836,14 @@
 </file>
 
 <file path=customXml/itemProps1.xml><?xml version="1.0" encoding="utf-8"?>
+<ds:datastoreItem xmlns:ds="http://schemas.openxmlformats.org/officeDocument/2006/customXml" ds:itemID="{14AB1A68-8018-4E90-BA70-6DC9173B1623}">
+  <ds:schemaRefs>
+    <ds:schemaRef ds:uri="http://schemas.microsoft.com/sharepoint/v3/contenttype/forms"/>
+  </ds:schemaRefs>
+</ds:datastoreItem>
+</file>
+
+<file path=customXml/itemProps2.xml><?xml version="1.0" encoding="utf-8"?>
 <ds:datastoreItem xmlns:ds="http://schemas.openxmlformats.org/officeDocument/2006/customXml" ds:itemID="{20E7631D-FF33-4A81-83A1-18D3900D12F5}">
   <ds:schemaRefs>
     <ds:schemaRef ds:uri="12ff74cc-9611-4422-8f5f-2fd59a0d1353"/>
@@ -17735,14 +17858,6 @@
     <ds:schemaRef ds:uri="http://schemas.microsoft.com/office/infopath/2007/PartnerControls"/>
     <ds:schemaRef ds:uri="http://schemas.openxmlformats.org/package/2006/metadata/core-properties"/>
     <ds:schemaRef ds:uri="http://www.w3.org/2001/XMLSchema"/>
-  </ds:schemaRefs>
-</ds:datastoreItem>
-</file>
-
-<file path=customXml/itemProps2.xml><?xml version="1.0" encoding="utf-8"?>
-<ds:datastoreItem xmlns:ds="http://schemas.openxmlformats.org/officeDocument/2006/customXml" ds:itemID="{14AB1A68-8018-4E90-BA70-6DC9173B1623}">
-  <ds:schemaRefs>
-    <ds:schemaRef ds:uri="http://schemas.microsoft.com/sharepoint/v3/contenttype/forms"/>
   </ds:schemaRefs>
 </ds:datastoreItem>
 </file>

--- a/Vibe coding og AI-assisteret udvikling af geodata-dashboards - Steen Hulthin Rasmussen - SSI - 14.11.2025.pptx
+++ b/Vibe coding og AI-assisteret udvikling af geodata-dashboards - Steen Hulthin Rasmussen - SSI - 14.11.2025.pptx
@@ -9356,91 +9356,2696 @@
           </a:p>
         </p:txBody>
       </p:sp>
-      <p:sp>
-        <p:nvSpPr>
-          <p:cNvPr id="4" name="Content Placeholder 3">
+      <p:graphicFrame>
+        <p:nvGraphicFramePr>
+          <p:cNvPr id="5" name="Content Placeholder 4">
             <a:extLst>
               <a:ext uri="{FF2B5EF4-FFF2-40B4-BE49-F238E27FC236}">
-                <a16:creationId xmlns:a16="http://schemas.microsoft.com/office/drawing/2014/main" id="{E717CEF2-9828-405C-B1AC-2E976C925E60}"/>
-              </a:ext>
-            </a:extLst>
-          </p:cNvPr>
-          <p:cNvSpPr>
-            <a:spLocks noGrp="1"/>
-          </p:cNvSpPr>
-          <p:nvPr>
-            <p:ph idx="1"/>
-          </p:nvPr>
-        </p:nvSpPr>
-        <p:spPr/>
-        <p:txBody>
-          <a:bodyPr/>
-          <a:lstStyle/>
-          <a:p>
-            <a:endParaRPr lang="da-DK" dirty="0"/>
-          </a:p>
-        </p:txBody>
-      </p:sp>
-      <p:graphicFrame>
-        <p:nvGraphicFramePr>
-          <p:cNvPr id="7" name="Object 6">
-            <a:extLst>
-              <a:ext uri="{FF2B5EF4-FFF2-40B4-BE49-F238E27FC236}">
-                <a16:creationId xmlns:a16="http://schemas.microsoft.com/office/drawing/2014/main" id="{7846A2AD-93E2-406F-8DD0-8942309636DE}"/>
+                <a16:creationId xmlns:a16="http://schemas.microsoft.com/office/drawing/2014/main" id="{E64FE203-022C-40C5-95BE-F9EF64F2C835}"/>
               </a:ext>
             </a:extLst>
           </p:cNvPr>
           <p:cNvGraphicFramePr>
-            <a:graphicFrameLocks noChangeAspect="1"/>
+            <a:graphicFrameLocks noGrp="1"/>
           </p:cNvGraphicFramePr>
           <p:nvPr>
+            <p:ph idx="1"/>
             <p:extLst>
               <p:ext uri="{D42A27DB-BD31-4B8C-83A1-F6EECF244321}">
-                <p14:modId xmlns:p14="http://schemas.microsoft.com/office/powerpoint/2010/main" val="2479381878"/>
+                <p14:modId xmlns:p14="http://schemas.microsoft.com/office/powerpoint/2010/main" val="3222168532"/>
               </p:ext>
             </p:extLst>
           </p:nvPr>
         </p:nvGraphicFramePr>
         <p:xfrm>
-          <a:off x="290512" y="1518210"/>
-          <a:ext cx="11610975" cy="4410075"/>
+          <a:off x="385481" y="1289720"/>
+          <a:ext cx="11438220" cy="4278560"/>
         </p:xfrm>
         <a:graphic>
-          <a:graphicData uri="http://schemas.openxmlformats.org/presentationml/2006/ole">
-            <mc:AlternateContent xmlns:mc="http://schemas.openxmlformats.org/markup-compatibility/2006">
-              <mc:Choice xmlns:v="urn:schemas-microsoft-com:vml" Requires="v">
-                <p:oleObj spid="_x0000_s1030" name="Worksheet" r:id="rId3" imgW="11610971" imgH="4410204" progId="Excel.Sheet.12">
-                  <p:embed/>
-                </p:oleObj>
-              </mc:Choice>
-              <mc:Fallback>
-                <p:oleObj name="Worksheet" r:id="rId3" imgW="11610971" imgH="4410204" progId="Excel.Sheet.12">
-                  <p:embed/>
-                  <p:pic>
-                    <p:nvPicPr>
-                      <p:cNvPr id="0" name=""/>
-                      <p:cNvPicPr/>
-                      <p:nvPr/>
-                    </p:nvPicPr>
-                    <p:blipFill>
-                      <a:blip r:embed="rId4"/>
-                      <a:stretch>
-                        <a:fillRect/>
-                      </a:stretch>
-                    </p:blipFill>
-                    <p:spPr>
-                      <a:xfrm>
-                        <a:off x="290512" y="1518210"/>
-                        <a:ext cx="11610975" cy="4410075"/>
-                      </a:xfrm>
-                      <a:prstGeom prst="rect">
-                        <a:avLst/>
-                      </a:prstGeom>
-                    </p:spPr>
-                  </p:pic>
-                </p:oleObj>
-              </mc:Fallback>
-            </mc:AlternateContent>
+          <a:graphicData uri="http://schemas.openxmlformats.org/drawingml/2006/table">
+            <a:tbl>
+              <a:tblPr/>
+              <a:tblGrid>
+                <a:gridCol w="1906370">
+                  <a:extLst>
+                    <a:ext uri="{9D8B030D-6E8A-4147-A177-3AD203B41FA5}">
+                      <a16:colId xmlns:a16="http://schemas.microsoft.com/office/drawing/2014/main" val="1791050672"/>
+                    </a:ext>
+                  </a:extLst>
+                </a:gridCol>
+                <a:gridCol w="1906370">
+                  <a:extLst>
+                    <a:ext uri="{9D8B030D-6E8A-4147-A177-3AD203B41FA5}">
+                      <a16:colId xmlns:a16="http://schemas.microsoft.com/office/drawing/2014/main" val="2777721888"/>
+                    </a:ext>
+                  </a:extLst>
+                </a:gridCol>
+                <a:gridCol w="1906370">
+                  <a:extLst>
+                    <a:ext uri="{9D8B030D-6E8A-4147-A177-3AD203B41FA5}">
+                      <a16:colId xmlns:a16="http://schemas.microsoft.com/office/drawing/2014/main" val="3011163199"/>
+                    </a:ext>
+                  </a:extLst>
+                </a:gridCol>
+                <a:gridCol w="1906370">
+                  <a:extLst>
+                    <a:ext uri="{9D8B030D-6E8A-4147-A177-3AD203B41FA5}">
+                      <a16:colId xmlns:a16="http://schemas.microsoft.com/office/drawing/2014/main" val="3428251616"/>
+                    </a:ext>
+                  </a:extLst>
+                </a:gridCol>
+                <a:gridCol w="1906370">
+                  <a:extLst>
+                    <a:ext uri="{9D8B030D-6E8A-4147-A177-3AD203B41FA5}">
+                      <a16:colId xmlns:a16="http://schemas.microsoft.com/office/drawing/2014/main" val="3509201111"/>
+                    </a:ext>
+                  </a:extLst>
+                </a:gridCol>
+                <a:gridCol w="1906370">
+                  <a:extLst>
+                    <a:ext uri="{9D8B030D-6E8A-4147-A177-3AD203B41FA5}">
+                      <a16:colId xmlns:a16="http://schemas.microsoft.com/office/drawing/2014/main" val="4289391201"/>
+                    </a:ext>
+                  </a:extLst>
+                </a:gridCol>
+              </a:tblGrid>
+              <a:tr h="368700">
+                <a:tc>
+                  <a:txBody>
+                    <a:bodyPr/>
+                    <a:lstStyle/>
+                    <a:p>
+                      <a:pPr algn="l" fontAlgn="ctr"/>
+                      <a:r>
+                        <a:rPr lang="da-DK" sz="1100" b="1" i="0" u="none" strike="noStrike" dirty="0">
+                          <a:solidFill>
+                            <a:srgbClr val="CCCCCC"/>
+                          </a:solidFill>
+                          <a:effectLst/>
+                          <a:latin typeface="Segoe UI" panose="020B0502040204020203" pitchFamily="34" charset="0"/>
+                        </a:rPr>
+                        <a:t>Parameter</a:t>
+                      </a:r>
+                    </a:p>
+                  </a:txBody>
+                  <a:tcPr marL="82177" marR="9131" marT="9131" marB="0" anchor="ctr">
+                    <a:lnL w="6350" cap="flat" cmpd="sng" algn="ctr">
+                      <a:solidFill>
+                        <a:srgbClr val="000000"/>
+                      </a:solidFill>
+                      <a:prstDash val="solid"/>
+                      <a:round/>
+                      <a:headEnd type="none" w="med" len="med"/>
+                      <a:tailEnd type="none" w="med" len="med"/>
+                    </a:lnL>
+                    <a:lnR w="6350" cap="flat" cmpd="sng" algn="ctr">
+                      <a:solidFill>
+                        <a:srgbClr val="000000"/>
+                      </a:solidFill>
+                      <a:prstDash val="solid"/>
+                      <a:round/>
+                      <a:headEnd type="none" w="med" len="med"/>
+                      <a:tailEnd type="none" w="med" len="med"/>
+                    </a:lnR>
+                    <a:lnT w="12700" cap="flat" cmpd="sng" algn="ctr">
+                      <a:solidFill>
+                        <a:srgbClr val="000000"/>
+                      </a:solidFill>
+                      <a:prstDash val="solid"/>
+                      <a:round/>
+                      <a:headEnd type="none" w="med" len="med"/>
+                      <a:tailEnd type="none" w="med" len="med"/>
+                    </a:lnT>
+                    <a:lnB w="6350" cap="flat" cmpd="sng" algn="ctr">
+                      <a:solidFill>
+                        <a:srgbClr val="000000"/>
+                      </a:solidFill>
+                      <a:prstDash val="solid"/>
+                      <a:round/>
+                      <a:headEnd type="none" w="med" len="med"/>
+                      <a:tailEnd type="none" w="med" len="med"/>
+                    </a:lnB>
+                    <a:solidFill>
+                      <a:srgbClr val="000000"/>
+                    </a:solidFill>
+                  </a:tcPr>
+                </a:tc>
+                <a:tc>
+                  <a:txBody>
+                    <a:bodyPr/>
+                    <a:lstStyle/>
+                    <a:p>
+                      <a:pPr algn="l" fontAlgn="ctr"/>
+                      <a:r>
+                        <a:rPr lang="da-DK" sz="1100" b="1" i="0" u="none" strike="noStrike" dirty="0" err="1">
+                          <a:solidFill>
+                            <a:srgbClr val="CCCCCC"/>
+                          </a:solidFill>
+                          <a:effectLst/>
+                          <a:latin typeface="Segoe UI" panose="020B0502040204020203" pitchFamily="34" charset="0"/>
+                        </a:rPr>
+                        <a:t>Shiny</a:t>
+                      </a:r>
+                      <a:r>
+                        <a:rPr lang="da-DK" sz="1100" b="1" i="0" u="none" strike="noStrike" dirty="0">
+                          <a:solidFill>
+                            <a:srgbClr val="CCCCCC"/>
+                          </a:solidFill>
+                          <a:effectLst/>
+                          <a:latin typeface="Segoe UI" panose="020B0502040204020203" pitchFamily="34" charset="0"/>
+                        </a:rPr>
+                        <a:t> (</a:t>
+                      </a:r>
+                      <a:r>
+                        <a:rPr lang="da-DK" sz="1100" b="1" i="0" u="none" strike="noStrike" dirty="0" err="1">
+                          <a:solidFill>
+                            <a:srgbClr val="CCCCCC"/>
+                          </a:solidFill>
+                          <a:effectLst/>
+                          <a:latin typeface="Segoe UI" panose="020B0502040204020203" pitchFamily="34" charset="0"/>
+                        </a:rPr>
+                        <a:t>Shinylive</a:t>
+                      </a:r>
+                      <a:r>
+                        <a:rPr lang="da-DK" sz="1100" b="1" i="0" u="none" strike="noStrike" dirty="0">
+                          <a:solidFill>
+                            <a:srgbClr val="CCCCCC"/>
+                          </a:solidFill>
+                          <a:effectLst/>
+                          <a:latin typeface="Segoe UI" panose="020B0502040204020203" pitchFamily="34" charset="0"/>
+                        </a:rPr>
+                        <a:t>/</a:t>
+                      </a:r>
+                      <a:r>
+                        <a:rPr lang="da-DK" sz="1100" b="1" i="0" u="none" strike="noStrike" dirty="0" err="1">
+                          <a:solidFill>
+                            <a:srgbClr val="CCCCCC"/>
+                          </a:solidFill>
+                          <a:effectLst/>
+                          <a:latin typeface="Segoe UI" panose="020B0502040204020203" pitchFamily="34" charset="0"/>
+                        </a:rPr>
+                        <a:t>ShinyApps</a:t>
+                      </a:r>
+                      <a:r>
+                        <a:rPr lang="da-DK" sz="1100" b="1" i="0" u="none" strike="noStrike" dirty="0">
+                          <a:solidFill>
+                            <a:srgbClr val="CCCCCC"/>
+                          </a:solidFill>
+                          <a:effectLst/>
+                          <a:latin typeface="Segoe UI" panose="020B0502040204020203" pitchFamily="34" charset="0"/>
+                        </a:rPr>
+                        <a:t>)</a:t>
+                      </a:r>
+                    </a:p>
+                  </a:txBody>
+                  <a:tcPr marL="82177" marR="9131" marT="9131" marB="0" anchor="ctr">
+                    <a:lnL w="6350" cap="flat" cmpd="sng" algn="ctr">
+                      <a:solidFill>
+                        <a:srgbClr val="000000"/>
+                      </a:solidFill>
+                      <a:prstDash val="solid"/>
+                      <a:round/>
+                      <a:headEnd type="none" w="med" len="med"/>
+                      <a:tailEnd type="none" w="med" len="med"/>
+                    </a:lnL>
+                    <a:lnR w="6350" cap="flat" cmpd="sng" algn="ctr">
+                      <a:solidFill>
+                        <a:srgbClr val="000000"/>
+                      </a:solidFill>
+                      <a:prstDash val="solid"/>
+                      <a:round/>
+                      <a:headEnd type="none" w="med" len="med"/>
+                      <a:tailEnd type="none" w="med" len="med"/>
+                    </a:lnR>
+                    <a:lnT w="12700" cap="flat" cmpd="sng" algn="ctr">
+                      <a:solidFill>
+                        <a:srgbClr val="000000"/>
+                      </a:solidFill>
+                      <a:prstDash val="solid"/>
+                      <a:round/>
+                      <a:headEnd type="none" w="med" len="med"/>
+                      <a:tailEnd type="none" w="med" len="med"/>
+                    </a:lnT>
+                    <a:lnB w="6350" cap="flat" cmpd="sng" algn="ctr">
+                      <a:solidFill>
+                        <a:srgbClr val="000000"/>
+                      </a:solidFill>
+                      <a:prstDash val="solid"/>
+                      <a:round/>
+                      <a:headEnd type="none" w="med" len="med"/>
+                      <a:tailEnd type="none" w="med" len="med"/>
+                    </a:lnB>
+                    <a:solidFill>
+                      <a:srgbClr val="000000"/>
+                    </a:solidFill>
+                  </a:tcPr>
+                </a:tc>
+                <a:tc>
+                  <a:txBody>
+                    <a:bodyPr/>
+                    <a:lstStyle/>
+                    <a:p>
+                      <a:pPr algn="l" fontAlgn="ctr"/>
+                      <a:r>
+                        <a:rPr lang="da-DK" sz="1100" b="1" i="0" u="none" strike="noStrike">
+                          <a:solidFill>
+                            <a:srgbClr val="CCCCCC"/>
+                          </a:solidFill>
+                          <a:effectLst/>
+                          <a:latin typeface="Segoe UI" panose="020B0502040204020203" pitchFamily="34" charset="0"/>
+                        </a:rPr>
+                        <a:t>Dash</a:t>
+                      </a:r>
+                    </a:p>
+                  </a:txBody>
+                  <a:tcPr marL="82177" marR="9131" marT="9131" marB="0" anchor="ctr">
+                    <a:lnL w="6350" cap="flat" cmpd="sng" algn="ctr">
+                      <a:solidFill>
+                        <a:srgbClr val="000000"/>
+                      </a:solidFill>
+                      <a:prstDash val="solid"/>
+                      <a:round/>
+                      <a:headEnd type="none" w="med" len="med"/>
+                      <a:tailEnd type="none" w="med" len="med"/>
+                    </a:lnL>
+                    <a:lnR w="6350" cap="flat" cmpd="sng" algn="ctr">
+                      <a:solidFill>
+                        <a:srgbClr val="000000"/>
+                      </a:solidFill>
+                      <a:prstDash val="solid"/>
+                      <a:round/>
+                      <a:headEnd type="none" w="med" len="med"/>
+                      <a:tailEnd type="none" w="med" len="med"/>
+                    </a:lnR>
+                    <a:lnT w="12700" cap="flat" cmpd="sng" algn="ctr">
+                      <a:solidFill>
+                        <a:srgbClr val="000000"/>
+                      </a:solidFill>
+                      <a:prstDash val="solid"/>
+                      <a:round/>
+                      <a:headEnd type="none" w="med" len="med"/>
+                      <a:tailEnd type="none" w="med" len="med"/>
+                    </a:lnT>
+                    <a:lnB w="6350" cap="flat" cmpd="sng" algn="ctr">
+                      <a:solidFill>
+                        <a:srgbClr val="000000"/>
+                      </a:solidFill>
+                      <a:prstDash val="solid"/>
+                      <a:round/>
+                      <a:headEnd type="none" w="med" len="med"/>
+                      <a:tailEnd type="none" w="med" len="med"/>
+                    </a:lnB>
+                    <a:solidFill>
+                      <a:srgbClr val="000000"/>
+                    </a:solidFill>
+                  </a:tcPr>
+                </a:tc>
+                <a:tc>
+                  <a:txBody>
+                    <a:bodyPr/>
+                    <a:lstStyle/>
+                    <a:p>
+                      <a:pPr algn="l" fontAlgn="ctr"/>
+                      <a:r>
+                        <a:rPr lang="da-DK" sz="1100" b="1" i="0" u="none" strike="noStrike">
+                          <a:solidFill>
+                            <a:srgbClr val="CCCCCC"/>
+                          </a:solidFill>
+                          <a:effectLst/>
+                          <a:latin typeface="Segoe UI" panose="020B0502040204020203" pitchFamily="34" charset="0"/>
+                        </a:rPr>
+                        <a:t>Streamlit</a:t>
+                      </a:r>
+                    </a:p>
+                  </a:txBody>
+                  <a:tcPr marL="82177" marR="9131" marT="9131" marB="0" anchor="ctr">
+                    <a:lnL w="6350" cap="flat" cmpd="sng" algn="ctr">
+                      <a:solidFill>
+                        <a:srgbClr val="000000"/>
+                      </a:solidFill>
+                      <a:prstDash val="solid"/>
+                      <a:round/>
+                      <a:headEnd type="none" w="med" len="med"/>
+                      <a:tailEnd type="none" w="med" len="med"/>
+                    </a:lnL>
+                    <a:lnR w="6350" cap="flat" cmpd="sng" algn="ctr">
+                      <a:solidFill>
+                        <a:srgbClr val="000000"/>
+                      </a:solidFill>
+                      <a:prstDash val="solid"/>
+                      <a:round/>
+                      <a:headEnd type="none" w="med" len="med"/>
+                      <a:tailEnd type="none" w="med" len="med"/>
+                    </a:lnR>
+                    <a:lnT w="12700" cap="flat" cmpd="sng" algn="ctr">
+                      <a:solidFill>
+                        <a:srgbClr val="000000"/>
+                      </a:solidFill>
+                      <a:prstDash val="solid"/>
+                      <a:round/>
+                      <a:headEnd type="none" w="med" len="med"/>
+                      <a:tailEnd type="none" w="med" len="med"/>
+                    </a:lnT>
+                    <a:lnB w="6350" cap="flat" cmpd="sng" algn="ctr">
+                      <a:solidFill>
+                        <a:srgbClr val="000000"/>
+                      </a:solidFill>
+                      <a:prstDash val="solid"/>
+                      <a:round/>
+                      <a:headEnd type="none" w="med" len="med"/>
+                      <a:tailEnd type="none" w="med" len="med"/>
+                    </a:lnB>
+                    <a:solidFill>
+                      <a:srgbClr val="000000"/>
+                    </a:solidFill>
+                  </a:tcPr>
+                </a:tc>
+                <a:tc>
+                  <a:txBody>
+                    <a:bodyPr/>
+                    <a:lstStyle/>
+                    <a:p>
+                      <a:pPr algn="l" fontAlgn="ctr"/>
+                      <a:r>
+                        <a:rPr lang="da-DK" sz="1100" b="1" i="0" u="none" strike="noStrike">
+                          <a:solidFill>
+                            <a:srgbClr val="CCCCCC"/>
+                          </a:solidFill>
+                          <a:effectLst/>
+                          <a:latin typeface="Segoe UI" panose="020B0502040204020203" pitchFamily="34" charset="0"/>
+                        </a:rPr>
+                        <a:t>ArcGIS Scene / 3D Viewer</a:t>
+                      </a:r>
+                    </a:p>
+                  </a:txBody>
+                  <a:tcPr marL="82177" marR="9131" marT="9131" marB="0" anchor="ctr">
+                    <a:lnL w="6350" cap="flat" cmpd="sng" algn="ctr">
+                      <a:solidFill>
+                        <a:srgbClr val="000000"/>
+                      </a:solidFill>
+                      <a:prstDash val="solid"/>
+                      <a:round/>
+                      <a:headEnd type="none" w="med" len="med"/>
+                      <a:tailEnd type="none" w="med" len="med"/>
+                    </a:lnL>
+                    <a:lnR w="6350" cap="flat" cmpd="sng" algn="ctr">
+                      <a:solidFill>
+                        <a:srgbClr val="000000"/>
+                      </a:solidFill>
+                      <a:prstDash val="solid"/>
+                      <a:round/>
+                      <a:headEnd type="none" w="med" len="med"/>
+                      <a:tailEnd type="none" w="med" len="med"/>
+                    </a:lnR>
+                    <a:lnT w="12700" cap="flat" cmpd="sng" algn="ctr">
+                      <a:solidFill>
+                        <a:srgbClr val="000000"/>
+                      </a:solidFill>
+                      <a:prstDash val="solid"/>
+                      <a:round/>
+                      <a:headEnd type="none" w="med" len="med"/>
+                      <a:tailEnd type="none" w="med" len="med"/>
+                    </a:lnT>
+                    <a:lnB w="6350" cap="flat" cmpd="sng" algn="ctr">
+                      <a:solidFill>
+                        <a:srgbClr val="000000"/>
+                      </a:solidFill>
+                      <a:prstDash val="solid"/>
+                      <a:round/>
+                      <a:headEnd type="none" w="med" len="med"/>
+                      <a:tailEnd type="none" w="med" len="med"/>
+                    </a:lnB>
+                    <a:solidFill>
+                      <a:srgbClr val="000000"/>
+                    </a:solidFill>
+                  </a:tcPr>
+                </a:tc>
+                <a:tc>
+                  <a:txBody>
+                    <a:bodyPr/>
+                    <a:lstStyle/>
+                    <a:p>
+                      <a:pPr algn="l" fontAlgn="ctr"/>
+                      <a:r>
+                        <a:rPr lang="da-DK" sz="1100" b="1" i="0" u="none" strike="noStrike">
+                          <a:solidFill>
+                            <a:srgbClr val="CCCCCC"/>
+                          </a:solidFill>
+                          <a:effectLst/>
+                          <a:latin typeface="Segoe UI" panose="020B0502040204020203" pitchFamily="34" charset="0"/>
+                        </a:rPr>
+                        <a:t>Power BI</a:t>
+                      </a:r>
+                    </a:p>
+                  </a:txBody>
+                  <a:tcPr marL="82177" marR="9131" marT="9131" marB="0" anchor="ctr">
+                    <a:lnL w="6350" cap="flat" cmpd="sng" algn="ctr">
+                      <a:solidFill>
+                        <a:srgbClr val="000000"/>
+                      </a:solidFill>
+                      <a:prstDash val="solid"/>
+                      <a:round/>
+                      <a:headEnd type="none" w="med" len="med"/>
+                      <a:tailEnd type="none" w="med" len="med"/>
+                    </a:lnL>
+                    <a:lnR w="6350" cap="flat" cmpd="sng" algn="ctr">
+                      <a:solidFill>
+                        <a:srgbClr val="000000"/>
+                      </a:solidFill>
+                      <a:prstDash val="solid"/>
+                      <a:round/>
+                      <a:headEnd type="none" w="med" len="med"/>
+                      <a:tailEnd type="none" w="med" len="med"/>
+                    </a:lnR>
+                    <a:lnT w="12700" cap="flat" cmpd="sng" algn="ctr">
+                      <a:solidFill>
+                        <a:srgbClr val="000000"/>
+                      </a:solidFill>
+                      <a:prstDash val="solid"/>
+                      <a:round/>
+                      <a:headEnd type="none" w="med" len="med"/>
+                      <a:tailEnd type="none" w="med" len="med"/>
+                    </a:lnT>
+                    <a:lnB w="6350" cap="flat" cmpd="sng" algn="ctr">
+                      <a:solidFill>
+                        <a:srgbClr val="000000"/>
+                      </a:solidFill>
+                      <a:prstDash val="solid"/>
+                      <a:round/>
+                      <a:headEnd type="none" w="med" len="med"/>
+                      <a:tailEnd type="none" w="med" len="med"/>
+                    </a:lnB>
+                    <a:solidFill>
+                      <a:srgbClr val="000000"/>
+                    </a:solidFill>
+                  </a:tcPr>
+                </a:tc>
+                <a:extLst>
+                  <a:ext uri="{0D108BD9-81ED-4DB2-BD59-A6C34878D82A}">
+                    <a16:rowId xmlns:a16="http://schemas.microsoft.com/office/drawing/2014/main" val="2462403612"/>
+                  </a:ext>
+                </a:extLst>
+              </a:tr>
+              <a:tr h="781972">
+                <a:tc>
+                  <a:txBody>
+                    <a:bodyPr/>
+                    <a:lstStyle/>
+                    <a:p>
+                      <a:pPr algn="l" fontAlgn="ctr"/>
+                      <a:r>
+                        <a:rPr lang="da-DK" sz="1100" b="0" i="0" u="none" strike="noStrike">
+                          <a:solidFill>
+                            <a:srgbClr val="000000"/>
+                          </a:solidFill>
+                          <a:effectLst/>
+                          <a:latin typeface="Calibri" panose="020F0502020204030204" pitchFamily="34" charset="0"/>
+                        </a:rPr>
+                        <a:t>Opsætning af udviklingsmiljø</a:t>
+                      </a:r>
+                    </a:p>
+                  </a:txBody>
+                  <a:tcPr marL="82177" marR="9131" marT="9131" marB="0" anchor="ctr">
+                    <a:lnL w="6350" cap="flat" cmpd="sng" algn="ctr">
+                      <a:solidFill>
+                        <a:srgbClr val="000000"/>
+                      </a:solidFill>
+                      <a:prstDash val="solid"/>
+                      <a:round/>
+                      <a:headEnd type="none" w="med" len="med"/>
+                      <a:tailEnd type="none" w="med" len="med"/>
+                    </a:lnL>
+                    <a:lnR w="6350" cap="flat" cmpd="sng" algn="ctr">
+                      <a:solidFill>
+                        <a:srgbClr val="000000"/>
+                      </a:solidFill>
+                      <a:prstDash val="solid"/>
+                      <a:round/>
+                      <a:headEnd type="none" w="med" len="med"/>
+                      <a:tailEnd type="none" w="med" len="med"/>
+                    </a:lnR>
+                    <a:lnT w="6350" cap="flat" cmpd="sng" algn="ctr">
+                      <a:solidFill>
+                        <a:srgbClr val="000000"/>
+                      </a:solidFill>
+                      <a:prstDash val="solid"/>
+                      <a:round/>
+                      <a:headEnd type="none" w="med" len="med"/>
+                      <a:tailEnd type="none" w="med" len="med"/>
+                    </a:lnT>
+                    <a:lnB w="6350" cap="flat" cmpd="sng" algn="ctr">
+                      <a:solidFill>
+                        <a:srgbClr val="000000"/>
+                      </a:solidFill>
+                      <a:prstDash val="solid"/>
+                      <a:round/>
+                      <a:headEnd type="none" w="med" len="med"/>
+                      <a:tailEnd type="none" w="med" len="med"/>
+                    </a:lnB>
+                    <a:solidFill>
+                      <a:srgbClr val="C9C9C9"/>
+                    </a:solidFill>
+                  </a:tcPr>
+                </a:tc>
+                <a:tc>
+                  <a:txBody>
+                    <a:bodyPr/>
+                    <a:lstStyle/>
+                    <a:p>
+                      <a:pPr algn="ctr" fontAlgn="ctr"/>
+                      <a:r>
+                        <a:rPr lang="da-DK" sz="1100" b="0" i="0" u="none" strike="noStrike">
+                          <a:solidFill>
+                            <a:srgbClr val="000000"/>
+                          </a:solidFill>
+                          <a:effectLst/>
+                          <a:latin typeface="Calibri" panose="020F0502020204030204" pitchFamily="34" charset="0"/>
+                        </a:rPr>
+                        <a:t>Hurtig at komme igang, fx med VSCode med shiny extension</a:t>
+                      </a:r>
+                    </a:p>
+                  </a:txBody>
+                  <a:tcPr marL="9131" marR="9131" marT="9131" marB="0" anchor="ctr">
+                    <a:lnL w="6350" cap="flat" cmpd="sng" algn="ctr">
+                      <a:solidFill>
+                        <a:srgbClr val="000000"/>
+                      </a:solidFill>
+                      <a:prstDash val="solid"/>
+                      <a:round/>
+                      <a:headEnd type="none" w="med" len="med"/>
+                      <a:tailEnd type="none" w="med" len="med"/>
+                    </a:lnL>
+                    <a:lnR w="6350" cap="flat" cmpd="sng" algn="ctr">
+                      <a:solidFill>
+                        <a:srgbClr val="000000"/>
+                      </a:solidFill>
+                      <a:prstDash val="solid"/>
+                      <a:round/>
+                      <a:headEnd type="none" w="med" len="med"/>
+                      <a:tailEnd type="none" w="med" len="med"/>
+                    </a:lnR>
+                    <a:lnT w="6350" cap="flat" cmpd="sng" algn="ctr">
+                      <a:solidFill>
+                        <a:srgbClr val="000000"/>
+                      </a:solidFill>
+                      <a:prstDash val="solid"/>
+                      <a:round/>
+                      <a:headEnd type="none" w="med" len="med"/>
+                      <a:tailEnd type="none" w="med" len="med"/>
+                    </a:lnT>
+                    <a:lnB w="6350" cap="flat" cmpd="sng" algn="ctr">
+                      <a:solidFill>
+                        <a:srgbClr val="000000"/>
+                      </a:solidFill>
+                      <a:prstDash val="solid"/>
+                      <a:round/>
+                      <a:headEnd type="none" w="med" len="med"/>
+                      <a:tailEnd type="none" w="med" len="med"/>
+                    </a:lnB>
+                    <a:solidFill>
+                      <a:srgbClr val="C6E0B4"/>
+                    </a:solidFill>
+                  </a:tcPr>
+                </a:tc>
+                <a:tc>
+                  <a:txBody>
+                    <a:bodyPr/>
+                    <a:lstStyle/>
+                    <a:p>
+                      <a:pPr algn="ctr" fontAlgn="ctr"/>
+                      <a:r>
+                        <a:rPr lang="da-DK" sz="1100" b="0" i="0" u="none" strike="noStrike">
+                          <a:solidFill>
+                            <a:srgbClr val="000000"/>
+                          </a:solidFill>
+                          <a:effectLst/>
+                          <a:latin typeface="Calibri" panose="020F0502020204030204" pitchFamily="34" charset="0"/>
+                        </a:rPr>
+                        <a:t>Hurtig at komme igang med fx VSCode med shiny extension</a:t>
+                      </a:r>
+                    </a:p>
+                  </a:txBody>
+                  <a:tcPr marL="9131" marR="9131" marT="9131" marB="0" anchor="ctr">
+                    <a:lnL w="6350" cap="flat" cmpd="sng" algn="ctr">
+                      <a:solidFill>
+                        <a:srgbClr val="000000"/>
+                      </a:solidFill>
+                      <a:prstDash val="solid"/>
+                      <a:round/>
+                      <a:headEnd type="none" w="med" len="med"/>
+                      <a:tailEnd type="none" w="med" len="med"/>
+                    </a:lnL>
+                    <a:lnR w="6350" cap="flat" cmpd="sng" algn="ctr">
+                      <a:solidFill>
+                        <a:srgbClr val="000000"/>
+                      </a:solidFill>
+                      <a:prstDash val="solid"/>
+                      <a:round/>
+                      <a:headEnd type="none" w="med" len="med"/>
+                      <a:tailEnd type="none" w="med" len="med"/>
+                    </a:lnR>
+                    <a:lnT w="6350" cap="flat" cmpd="sng" algn="ctr">
+                      <a:solidFill>
+                        <a:srgbClr val="000000"/>
+                      </a:solidFill>
+                      <a:prstDash val="solid"/>
+                      <a:round/>
+                      <a:headEnd type="none" w="med" len="med"/>
+                      <a:tailEnd type="none" w="med" len="med"/>
+                    </a:lnT>
+                    <a:lnB w="6350" cap="flat" cmpd="sng" algn="ctr">
+                      <a:solidFill>
+                        <a:srgbClr val="000000"/>
+                      </a:solidFill>
+                      <a:prstDash val="solid"/>
+                      <a:round/>
+                      <a:headEnd type="none" w="med" len="med"/>
+                      <a:tailEnd type="none" w="med" len="med"/>
+                    </a:lnB>
+                    <a:solidFill>
+                      <a:srgbClr val="C6E0B4"/>
+                    </a:solidFill>
+                  </a:tcPr>
+                </a:tc>
+                <a:tc>
+                  <a:txBody>
+                    <a:bodyPr/>
+                    <a:lstStyle/>
+                    <a:p>
+                      <a:pPr algn="l" fontAlgn="ctr"/>
+                      <a:r>
+                        <a:rPr lang="da-DK" sz="1100" b="0" i="0" u="none" strike="noStrike">
+                          <a:solidFill>
+                            <a:srgbClr val="000000"/>
+                          </a:solidFill>
+                          <a:effectLst/>
+                          <a:latin typeface="Calibri" panose="020F0502020204030204" pitchFamily="34" charset="0"/>
+                        </a:rPr>
+                        <a:t>Meget nemt at starte, fx med GitHub Codespaces</a:t>
+                      </a:r>
+                    </a:p>
+                  </a:txBody>
+                  <a:tcPr marL="82177" marR="9131" marT="9131" marB="0" anchor="ctr">
+                    <a:lnL w="6350" cap="flat" cmpd="sng" algn="ctr">
+                      <a:solidFill>
+                        <a:srgbClr val="000000"/>
+                      </a:solidFill>
+                      <a:prstDash val="solid"/>
+                      <a:round/>
+                      <a:headEnd type="none" w="med" len="med"/>
+                      <a:tailEnd type="none" w="med" len="med"/>
+                    </a:lnL>
+                    <a:lnR w="6350" cap="flat" cmpd="sng" algn="ctr">
+                      <a:solidFill>
+                        <a:srgbClr val="000000"/>
+                      </a:solidFill>
+                      <a:prstDash val="solid"/>
+                      <a:round/>
+                      <a:headEnd type="none" w="med" len="med"/>
+                      <a:tailEnd type="none" w="med" len="med"/>
+                    </a:lnR>
+                    <a:lnT w="6350" cap="flat" cmpd="sng" algn="ctr">
+                      <a:solidFill>
+                        <a:srgbClr val="000000"/>
+                      </a:solidFill>
+                      <a:prstDash val="solid"/>
+                      <a:round/>
+                      <a:headEnd type="none" w="med" len="med"/>
+                      <a:tailEnd type="none" w="med" len="med"/>
+                    </a:lnT>
+                    <a:lnB w="6350" cap="flat" cmpd="sng" algn="ctr">
+                      <a:solidFill>
+                        <a:srgbClr val="000000"/>
+                      </a:solidFill>
+                      <a:prstDash val="solid"/>
+                      <a:round/>
+                      <a:headEnd type="none" w="med" len="med"/>
+                      <a:tailEnd type="none" w="med" len="med"/>
+                    </a:lnB>
+                    <a:solidFill>
+                      <a:srgbClr val="A9D08E"/>
+                    </a:solidFill>
+                  </a:tcPr>
+                </a:tc>
+                <a:tc>
+                  <a:txBody>
+                    <a:bodyPr/>
+                    <a:lstStyle/>
+                    <a:p>
+                      <a:pPr algn="l" fontAlgn="ctr"/>
+                      <a:r>
+                        <a:rPr lang="da-DK" sz="1100" b="0" i="0" u="none" strike="noStrike">
+                          <a:solidFill>
+                            <a:srgbClr val="000000"/>
+                          </a:solidFill>
+                          <a:effectLst/>
+                          <a:latin typeface="Calibri" panose="020F0502020204030204" pitchFamily="34" charset="0"/>
+                        </a:rPr>
+                        <a:t>Nemt at sætte ArcGIS API for op, men ArcGIS online eller lignende kræves</a:t>
+                      </a:r>
+                    </a:p>
+                  </a:txBody>
+                  <a:tcPr marL="82177" marR="9131" marT="9131" marB="0" anchor="ctr">
+                    <a:lnL w="6350" cap="flat" cmpd="sng" algn="ctr">
+                      <a:solidFill>
+                        <a:srgbClr val="000000"/>
+                      </a:solidFill>
+                      <a:prstDash val="solid"/>
+                      <a:round/>
+                      <a:headEnd type="none" w="med" len="med"/>
+                      <a:tailEnd type="none" w="med" len="med"/>
+                    </a:lnL>
+                    <a:lnR w="6350" cap="flat" cmpd="sng" algn="ctr">
+                      <a:solidFill>
+                        <a:srgbClr val="000000"/>
+                      </a:solidFill>
+                      <a:prstDash val="solid"/>
+                      <a:round/>
+                      <a:headEnd type="none" w="med" len="med"/>
+                      <a:tailEnd type="none" w="med" len="med"/>
+                    </a:lnR>
+                    <a:lnT w="6350" cap="flat" cmpd="sng" algn="ctr">
+                      <a:solidFill>
+                        <a:srgbClr val="000000"/>
+                      </a:solidFill>
+                      <a:prstDash val="solid"/>
+                      <a:round/>
+                      <a:headEnd type="none" w="med" len="med"/>
+                      <a:tailEnd type="none" w="med" len="med"/>
+                    </a:lnT>
+                    <a:lnB w="6350" cap="flat" cmpd="sng" algn="ctr">
+                      <a:solidFill>
+                        <a:srgbClr val="000000"/>
+                      </a:solidFill>
+                      <a:prstDash val="solid"/>
+                      <a:round/>
+                      <a:headEnd type="none" w="med" len="med"/>
+                      <a:tailEnd type="none" w="med" len="med"/>
+                    </a:lnB>
+                    <a:solidFill>
+                      <a:srgbClr val="FFD966"/>
+                    </a:solidFill>
+                  </a:tcPr>
+                </a:tc>
+                <a:tc>
+                  <a:txBody>
+                    <a:bodyPr/>
+                    <a:lstStyle/>
+                    <a:p>
+                      <a:pPr algn="l" fontAlgn="ctr"/>
+                      <a:r>
+                        <a:rPr lang="da-DK" sz="1100" b="0" i="0" u="none" strike="noStrike">
+                          <a:solidFill>
+                            <a:srgbClr val="000000"/>
+                          </a:solidFill>
+                          <a:effectLst/>
+                          <a:latin typeface="Calibri" panose="020F0502020204030204" pitchFamily="34" charset="0"/>
+                        </a:rPr>
+                        <a:t>Fungere bedst/kun i Power BI desktop eller web</a:t>
+                      </a:r>
+                    </a:p>
+                  </a:txBody>
+                  <a:tcPr marL="82177" marR="9131" marT="9131" marB="0" anchor="ctr">
+                    <a:lnL w="6350" cap="flat" cmpd="sng" algn="ctr">
+                      <a:solidFill>
+                        <a:srgbClr val="000000"/>
+                      </a:solidFill>
+                      <a:prstDash val="solid"/>
+                      <a:round/>
+                      <a:headEnd type="none" w="med" len="med"/>
+                      <a:tailEnd type="none" w="med" len="med"/>
+                    </a:lnL>
+                    <a:lnR w="6350" cap="flat" cmpd="sng" algn="ctr">
+                      <a:solidFill>
+                        <a:srgbClr val="000000"/>
+                      </a:solidFill>
+                      <a:prstDash val="solid"/>
+                      <a:round/>
+                      <a:headEnd type="none" w="med" len="med"/>
+                      <a:tailEnd type="none" w="med" len="med"/>
+                    </a:lnR>
+                    <a:lnT w="6350" cap="flat" cmpd="sng" algn="ctr">
+                      <a:solidFill>
+                        <a:srgbClr val="000000"/>
+                      </a:solidFill>
+                      <a:prstDash val="solid"/>
+                      <a:round/>
+                      <a:headEnd type="none" w="med" len="med"/>
+                      <a:tailEnd type="none" w="med" len="med"/>
+                    </a:lnT>
+                    <a:lnB w="6350" cap="flat" cmpd="sng" algn="ctr">
+                      <a:solidFill>
+                        <a:srgbClr val="000000"/>
+                      </a:solidFill>
+                      <a:prstDash val="solid"/>
+                      <a:round/>
+                      <a:headEnd type="none" w="med" len="med"/>
+                      <a:tailEnd type="none" w="med" len="med"/>
+                    </a:lnB>
+                    <a:solidFill>
+                      <a:srgbClr val="F4B084"/>
+                    </a:solidFill>
+                  </a:tcPr>
+                </a:tc>
+                <a:extLst>
+                  <a:ext uri="{0D108BD9-81ED-4DB2-BD59-A6C34878D82A}">
+                    <a16:rowId xmlns:a16="http://schemas.microsoft.com/office/drawing/2014/main" val="3690670673"/>
+                  </a:ext>
+                </a:extLst>
+              </a:tr>
+              <a:tr h="781972">
+                <a:tc>
+                  <a:txBody>
+                    <a:bodyPr/>
+                    <a:lstStyle/>
+                    <a:p>
+                      <a:pPr algn="l" fontAlgn="ctr"/>
+                      <a:r>
+                        <a:rPr lang="da-DK" sz="1100" b="0" i="0" u="none" strike="noStrike">
+                          <a:solidFill>
+                            <a:srgbClr val="000000"/>
+                          </a:solidFill>
+                          <a:effectLst/>
+                          <a:latin typeface="Calibri" panose="020F0502020204030204" pitchFamily="34" charset="0"/>
+                        </a:rPr>
+                        <a:t>AI-assistance af datapipeline</a:t>
+                      </a:r>
+                    </a:p>
+                  </a:txBody>
+                  <a:tcPr marL="82177" marR="9131" marT="9131" marB="0" anchor="ctr">
+                    <a:lnL w="6350" cap="flat" cmpd="sng" algn="ctr">
+                      <a:solidFill>
+                        <a:srgbClr val="000000"/>
+                      </a:solidFill>
+                      <a:prstDash val="solid"/>
+                      <a:round/>
+                      <a:headEnd type="none" w="med" len="med"/>
+                      <a:tailEnd type="none" w="med" len="med"/>
+                    </a:lnL>
+                    <a:lnR w="6350" cap="flat" cmpd="sng" algn="ctr">
+                      <a:solidFill>
+                        <a:srgbClr val="000000"/>
+                      </a:solidFill>
+                      <a:prstDash val="solid"/>
+                      <a:round/>
+                      <a:headEnd type="none" w="med" len="med"/>
+                      <a:tailEnd type="none" w="med" len="med"/>
+                    </a:lnR>
+                    <a:lnT w="6350" cap="flat" cmpd="sng" algn="ctr">
+                      <a:solidFill>
+                        <a:srgbClr val="000000"/>
+                      </a:solidFill>
+                      <a:prstDash val="solid"/>
+                      <a:round/>
+                      <a:headEnd type="none" w="med" len="med"/>
+                      <a:tailEnd type="none" w="med" len="med"/>
+                    </a:lnT>
+                    <a:lnB w="6350" cap="flat" cmpd="sng" algn="ctr">
+                      <a:solidFill>
+                        <a:srgbClr val="000000"/>
+                      </a:solidFill>
+                      <a:prstDash val="solid"/>
+                      <a:round/>
+                      <a:headEnd type="none" w="med" len="med"/>
+                      <a:tailEnd type="none" w="med" len="med"/>
+                    </a:lnB>
+                    <a:solidFill>
+                      <a:srgbClr val="C9C9C9"/>
+                    </a:solidFill>
+                  </a:tcPr>
+                </a:tc>
+                <a:tc>
+                  <a:txBody>
+                    <a:bodyPr/>
+                    <a:lstStyle/>
+                    <a:p>
+                      <a:pPr algn="l" fontAlgn="ctr"/>
+                      <a:r>
+                        <a:rPr lang="da-DK" sz="1100" b="0" i="0" u="none" strike="noStrike">
+                          <a:solidFill>
+                            <a:srgbClr val="000000"/>
+                          </a:solidFill>
+                          <a:effectLst/>
+                          <a:latin typeface="Calibri" panose="020F0502020204030204" pitchFamily="34" charset="0"/>
+                        </a:rPr>
+                        <a:t>Generelt god hjælp, men udfordret med geodata</a:t>
+                      </a:r>
+                    </a:p>
+                  </a:txBody>
+                  <a:tcPr marL="82177" marR="9131" marT="9131" marB="0" anchor="ctr">
+                    <a:lnL w="6350" cap="flat" cmpd="sng" algn="ctr">
+                      <a:solidFill>
+                        <a:srgbClr val="000000"/>
+                      </a:solidFill>
+                      <a:prstDash val="solid"/>
+                      <a:round/>
+                      <a:headEnd type="none" w="med" len="med"/>
+                      <a:tailEnd type="none" w="med" len="med"/>
+                    </a:lnL>
+                    <a:lnR w="6350" cap="flat" cmpd="sng" algn="ctr">
+                      <a:solidFill>
+                        <a:srgbClr val="000000"/>
+                      </a:solidFill>
+                      <a:prstDash val="solid"/>
+                      <a:round/>
+                      <a:headEnd type="none" w="med" len="med"/>
+                      <a:tailEnd type="none" w="med" len="med"/>
+                    </a:lnR>
+                    <a:lnT w="6350" cap="flat" cmpd="sng" algn="ctr">
+                      <a:solidFill>
+                        <a:srgbClr val="000000"/>
+                      </a:solidFill>
+                      <a:prstDash val="solid"/>
+                      <a:round/>
+                      <a:headEnd type="none" w="med" len="med"/>
+                      <a:tailEnd type="none" w="med" len="med"/>
+                    </a:lnT>
+                    <a:lnB w="6350" cap="flat" cmpd="sng" algn="ctr">
+                      <a:solidFill>
+                        <a:srgbClr val="000000"/>
+                      </a:solidFill>
+                      <a:prstDash val="solid"/>
+                      <a:round/>
+                      <a:headEnd type="none" w="med" len="med"/>
+                      <a:tailEnd type="none" w="med" len="med"/>
+                    </a:lnB>
+                    <a:solidFill>
+                      <a:srgbClr val="C6E0B4"/>
+                    </a:solidFill>
+                  </a:tcPr>
+                </a:tc>
+                <a:tc>
+                  <a:txBody>
+                    <a:bodyPr/>
+                    <a:lstStyle/>
+                    <a:p>
+                      <a:pPr algn="l" fontAlgn="ctr"/>
+                      <a:r>
+                        <a:rPr lang="da-DK" sz="1100" b="0" i="0" u="none" strike="noStrike">
+                          <a:solidFill>
+                            <a:srgbClr val="000000"/>
+                          </a:solidFill>
+                          <a:effectLst/>
+                          <a:latin typeface="Calibri" panose="020F0502020204030204" pitchFamily="34" charset="0"/>
+                        </a:rPr>
+                        <a:t>Generelt god hjælp, men udfordret med geodata</a:t>
+                      </a:r>
+                    </a:p>
+                  </a:txBody>
+                  <a:tcPr marL="82177" marR="9131" marT="9131" marB="0" anchor="ctr">
+                    <a:lnL w="6350" cap="flat" cmpd="sng" algn="ctr">
+                      <a:solidFill>
+                        <a:srgbClr val="000000"/>
+                      </a:solidFill>
+                      <a:prstDash val="solid"/>
+                      <a:round/>
+                      <a:headEnd type="none" w="med" len="med"/>
+                      <a:tailEnd type="none" w="med" len="med"/>
+                    </a:lnL>
+                    <a:lnR w="6350" cap="flat" cmpd="sng" algn="ctr">
+                      <a:solidFill>
+                        <a:srgbClr val="000000"/>
+                      </a:solidFill>
+                      <a:prstDash val="solid"/>
+                      <a:round/>
+                      <a:headEnd type="none" w="med" len="med"/>
+                      <a:tailEnd type="none" w="med" len="med"/>
+                    </a:lnR>
+                    <a:lnT w="6350" cap="flat" cmpd="sng" algn="ctr">
+                      <a:solidFill>
+                        <a:srgbClr val="000000"/>
+                      </a:solidFill>
+                      <a:prstDash val="solid"/>
+                      <a:round/>
+                      <a:headEnd type="none" w="med" len="med"/>
+                      <a:tailEnd type="none" w="med" len="med"/>
+                    </a:lnT>
+                    <a:lnB w="6350" cap="flat" cmpd="sng" algn="ctr">
+                      <a:solidFill>
+                        <a:srgbClr val="000000"/>
+                      </a:solidFill>
+                      <a:prstDash val="solid"/>
+                      <a:round/>
+                      <a:headEnd type="none" w="med" len="med"/>
+                      <a:tailEnd type="none" w="med" len="med"/>
+                    </a:lnB>
+                    <a:solidFill>
+                      <a:srgbClr val="C6E0B4"/>
+                    </a:solidFill>
+                  </a:tcPr>
+                </a:tc>
+                <a:tc>
+                  <a:txBody>
+                    <a:bodyPr/>
+                    <a:lstStyle/>
+                    <a:p>
+                      <a:pPr algn="l" fontAlgn="ctr"/>
+                      <a:r>
+                        <a:rPr lang="da-DK" sz="1100" b="0" i="0" u="none" strike="noStrike">
+                          <a:solidFill>
+                            <a:srgbClr val="000000"/>
+                          </a:solidFill>
+                          <a:effectLst/>
+                          <a:latin typeface="Calibri" panose="020F0502020204030204" pitchFamily="34" charset="0"/>
+                        </a:rPr>
+                        <a:t>Generelt god hjælp - også et landegeokodning</a:t>
+                      </a:r>
+                    </a:p>
+                  </a:txBody>
+                  <a:tcPr marL="82177" marR="9131" marT="9131" marB="0" anchor="ctr">
+                    <a:lnL w="6350" cap="flat" cmpd="sng" algn="ctr">
+                      <a:solidFill>
+                        <a:srgbClr val="000000"/>
+                      </a:solidFill>
+                      <a:prstDash val="solid"/>
+                      <a:round/>
+                      <a:headEnd type="none" w="med" len="med"/>
+                      <a:tailEnd type="none" w="med" len="med"/>
+                    </a:lnL>
+                    <a:lnR w="6350" cap="flat" cmpd="sng" algn="ctr">
+                      <a:solidFill>
+                        <a:srgbClr val="000000"/>
+                      </a:solidFill>
+                      <a:prstDash val="solid"/>
+                      <a:round/>
+                      <a:headEnd type="none" w="med" len="med"/>
+                      <a:tailEnd type="none" w="med" len="med"/>
+                    </a:lnR>
+                    <a:lnT w="6350" cap="flat" cmpd="sng" algn="ctr">
+                      <a:solidFill>
+                        <a:srgbClr val="000000"/>
+                      </a:solidFill>
+                      <a:prstDash val="solid"/>
+                      <a:round/>
+                      <a:headEnd type="none" w="med" len="med"/>
+                      <a:tailEnd type="none" w="med" len="med"/>
+                    </a:lnT>
+                    <a:lnB w="6350" cap="flat" cmpd="sng" algn="ctr">
+                      <a:solidFill>
+                        <a:srgbClr val="000000"/>
+                      </a:solidFill>
+                      <a:prstDash val="solid"/>
+                      <a:round/>
+                      <a:headEnd type="none" w="med" len="med"/>
+                      <a:tailEnd type="none" w="med" len="med"/>
+                    </a:lnB>
+                    <a:solidFill>
+                      <a:srgbClr val="C6E0B4"/>
+                    </a:solidFill>
+                  </a:tcPr>
+                </a:tc>
+                <a:tc>
+                  <a:txBody>
+                    <a:bodyPr/>
+                    <a:lstStyle/>
+                    <a:p>
+                      <a:pPr algn="l" fontAlgn="ctr"/>
+                      <a:r>
+                        <a:rPr lang="da-DK" sz="1100" b="0" i="0" u="none" strike="noStrike">
+                          <a:solidFill>
+                            <a:srgbClr val="000000"/>
+                          </a:solidFill>
+                          <a:effectLst/>
+                          <a:latin typeface="Calibri" panose="020F0502020204030204" pitchFamily="34" charset="0"/>
+                        </a:rPr>
+                        <a:t>Generelt rimelig hjælp - kan godt ArcGIS geodata</a:t>
+                      </a:r>
+                    </a:p>
+                  </a:txBody>
+                  <a:tcPr marL="82177" marR="9131" marT="9131" marB="0" anchor="ctr">
+                    <a:lnL w="6350" cap="flat" cmpd="sng" algn="ctr">
+                      <a:solidFill>
+                        <a:srgbClr val="000000"/>
+                      </a:solidFill>
+                      <a:prstDash val="solid"/>
+                      <a:round/>
+                      <a:headEnd type="none" w="med" len="med"/>
+                      <a:tailEnd type="none" w="med" len="med"/>
+                    </a:lnL>
+                    <a:lnR w="6350" cap="flat" cmpd="sng" algn="ctr">
+                      <a:solidFill>
+                        <a:srgbClr val="000000"/>
+                      </a:solidFill>
+                      <a:prstDash val="solid"/>
+                      <a:round/>
+                      <a:headEnd type="none" w="med" len="med"/>
+                      <a:tailEnd type="none" w="med" len="med"/>
+                    </a:lnR>
+                    <a:lnT w="6350" cap="flat" cmpd="sng" algn="ctr">
+                      <a:solidFill>
+                        <a:srgbClr val="000000"/>
+                      </a:solidFill>
+                      <a:prstDash val="solid"/>
+                      <a:round/>
+                      <a:headEnd type="none" w="med" len="med"/>
+                      <a:tailEnd type="none" w="med" len="med"/>
+                    </a:lnT>
+                    <a:lnB w="6350" cap="flat" cmpd="sng" algn="ctr">
+                      <a:solidFill>
+                        <a:srgbClr val="000000"/>
+                      </a:solidFill>
+                      <a:prstDash val="solid"/>
+                      <a:round/>
+                      <a:headEnd type="none" w="med" len="med"/>
+                      <a:tailEnd type="none" w="med" len="med"/>
+                    </a:lnB>
+                    <a:solidFill>
+                      <a:srgbClr val="C6E0B4"/>
+                    </a:solidFill>
+                  </a:tcPr>
+                </a:tc>
+                <a:tc>
+                  <a:txBody>
+                    <a:bodyPr/>
+                    <a:lstStyle/>
+                    <a:p>
+                      <a:pPr algn="l" fontAlgn="ctr"/>
+                      <a:r>
+                        <a:rPr lang="da-DK" sz="1100" b="0" i="0" u="none" strike="noStrike">
+                          <a:solidFill>
+                            <a:srgbClr val="000000"/>
+                          </a:solidFill>
+                          <a:effectLst/>
+                          <a:latin typeface="Calibri" panose="020F0502020204030204" pitchFamily="34" charset="0"/>
+                        </a:rPr>
+                        <a:t>Klargøring af data </a:t>
+                      </a:r>
+                    </a:p>
+                  </a:txBody>
+                  <a:tcPr marL="82177" marR="9131" marT="9131" marB="0" anchor="ctr">
+                    <a:lnL w="6350" cap="flat" cmpd="sng" algn="ctr">
+                      <a:solidFill>
+                        <a:srgbClr val="000000"/>
+                      </a:solidFill>
+                      <a:prstDash val="solid"/>
+                      <a:round/>
+                      <a:headEnd type="none" w="med" len="med"/>
+                      <a:tailEnd type="none" w="med" len="med"/>
+                    </a:lnL>
+                    <a:lnR w="6350" cap="flat" cmpd="sng" algn="ctr">
+                      <a:solidFill>
+                        <a:srgbClr val="000000"/>
+                      </a:solidFill>
+                      <a:prstDash val="solid"/>
+                      <a:round/>
+                      <a:headEnd type="none" w="med" len="med"/>
+                      <a:tailEnd type="none" w="med" len="med"/>
+                    </a:lnR>
+                    <a:lnT w="6350" cap="flat" cmpd="sng" algn="ctr">
+                      <a:solidFill>
+                        <a:srgbClr val="000000"/>
+                      </a:solidFill>
+                      <a:prstDash val="solid"/>
+                      <a:round/>
+                      <a:headEnd type="none" w="med" len="med"/>
+                      <a:tailEnd type="none" w="med" len="med"/>
+                    </a:lnT>
+                    <a:lnB w="6350" cap="flat" cmpd="sng" algn="ctr">
+                      <a:solidFill>
+                        <a:srgbClr val="000000"/>
+                      </a:solidFill>
+                      <a:prstDash val="solid"/>
+                      <a:round/>
+                      <a:headEnd type="none" w="med" len="med"/>
+                      <a:tailEnd type="none" w="med" len="med"/>
+                    </a:lnB>
+                    <a:solidFill>
+                      <a:srgbClr val="FFD966"/>
+                    </a:solidFill>
+                  </a:tcPr>
+                </a:tc>
+                <a:extLst>
+                  <a:ext uri="{0D108BD9-81ED-4DB2-BD59-A6C34878D82A}">
+                    <a16:rowId xmlns:a16="http://schemas.microsoft.com/office/drawing/2014/main" val="2567239789"/>
+                  </a:ext>
+                </a:extLst>
+              </a:tr>
+              <a:tr h="781972">
+                <a:tc>
+                  <a:txBody>
+                    <a:bodyPr/>
+                    <a:lstStyle/>
+                    <a:p>
+                      <a:pPr algn="l" fontAlgn="ctr"/>
+                      <a:r>
+                        <a:rPr lang="da-DK" sz="1100" b="0" i="0" u="none" strike="noStrike">
+                          <a:solidFill>
+                            <a:srgbClr val="000000"/>
+                          </a:solidFill>
+                          <a:effectLst/>
+                          <a:latin typeface="Calibri" panose="020F0502020204030204" pitchFamily="34" charset="0"/>
+                        </a:rPr>
+                        <a:t>AI-assistance af app-udvikling</a:t>
+                      </a:r>
+                    </a:p>
+                  </a:txBody>
+                  <a:tcPr marL="82177" marR="9131" marT="9131" marB="0" anchor="ctr">
+                    <a:lnL w="6350" cap="flat" cmpd="sng" algn="ctr">
+                      <a:solidFill>
+                        <a:srgbClr val="000000"/>
+                      </a:solidFill>
+                      <a:prstDash val="solid"/>
+                      <a:round/>
+                      <a:headEnd type="none" w="med" len="med"/>
+                      <a:tailEnd type="none" w="med" len="med"/>
+                    </a:lnL>
+                    <a:lnR w="6350" cap="flat" cmpd="sng" algn="ctr">
+                      <a:solidFill>
+                        <a:srgbClr val="000000"/>
+                      </a:solidFill>
+                      <a:prstDash val="solid"/>
+                      <a:round/>
+                      <a:headEnd type="none" w="med" len="med"/>
+                      <a:tailEnd type="none" w="med" len="med"/>
+                    </a:lnR>
+                    <a:lnT w="6350" cap="flat" cmpd="sng" algn="ctr">
+                      <a:solidFill>
+                        <a:srgbClr val="000000"/>
+                      </a:solidFill>
+                      <a:prstDash val="solid"/>
+                      <a:round/>
+                      <a:headEnd type="none" w="med" len="med"/>
+                      <a:tailEnd type="none" w="med" len="med"/>
+                    </a:lnT>
+                    <a:lnB w="6350" cap="flat" cmpd="sng" algn="ctr">
+                      <a:solidFill>
+                        <a:srgbClr val="000000"/>
+                      </a:solidFill>
+                      <a:prstDash val="solid"/>
+                      <a:round/>
+                      <a:headEnd type="none" w="med" len="med"/>
+                      <a:tailEnd type="none" w="med" len="med"/>
+                    </a:lnB>
+                    <a:solidFill>
+                      <a:srgbClr val="C9C9C9"/>
+                    </a:solidFill>
+                  </a:tcPr>
+                </a:tc>
+                <a:tc>
+                  <a:txBody>
+                    <a:bodyPr/>
+                    <a:lstStyle/>
+                    <a:p>
+                      <a:pPr algn="l" fontAlgn="ctr"/>
+                      <a:r>
+                        <a:rPr lang="da-DK" sz="1100" b="0" i="0" u="none" strike="noStrike">
+                          <a:solidFill>
+                            <a:srgbClr val="000000"/>
+                          </a:solidFill>
+                          <a:effectLst/>
+                          <a:latin typeface="Calibri" panose="020F0502020204030204" pitchFamily="34" charset="0"/>
+                        </a:rPr>
+                        <a:t>Fin implementering, men med nogen fejlrettelser</a:t>
+                      </a:r>
+                    </a:p>
+                  </a:txBody>
+                  <a:tcPr marL="82177" marR="9131" marT="9131" marB="0" anchor="ctr">
+                    <a:lnL w="6350" cap="flat" cmpd="sng" algn="ctr">
+                      <a:solidFill>
+                        <a:srgbClr val="000000"/>
+                      </a:solidFill>
+                      <a:prstDash val="solid"/>
+                      <a:round/>
+                      <a:headEnd type="none" w="med" len="med"/>
+                      <a:tailEnd type="none" w="med" len="med"/>
+                    </a:lnL>
+                    <a:lnR w="6350" cap="flat" cmpd="sng" algn="ctr">
+                      <a:solidFill>
+                        <a:srgbClr val="000000"/>
+                      </a:solidFill>
+                      <a:prstDash val="solid"/>
+                      <a:round/>
+                      <a:headEnd type="none" w="med" len="med"/>
+                      <a:tailEnd type="none" w="med" len="med"/>
+                    </a:lnR>
+                    <a:lnT w="6350" cap="flat" cmpd="sng" algn="ctr">
+                      <a:solidFill>
+                        <a:srgbClr val="000000"/>
+                      </a:solidFill>
+                      <a:prstDash val="solid"/>
+                      <a:round/>
+                      <a:headEnd type="none" w="med" len="med"/>
+                      <a:tailEnd type="none" w="med" len="med"/>
+                    </a:lnT>
+                    <a:lnB w="6350" cap="flat" cmpd="sng" algn="ctr">
+                      <a:solidFill>
+                        <a:srgbClr val="000000"/>
+                      </a:solidFill>
+                      <a:prstDash val="solid"/>
+                      <a:round/>
+                      <a:headEnd type="none" w="med" len="med"/>
+                      <a:tailEnd type="none" w="med" len="med"/>
+                    </a:lnB>
+                    <a:solidFill>
+                      <a:srgbClr val="C6E0B4"/>
+                    </a:solidFill>
+                  </a:tcPr>
+                </a:tc>
+                <a:tc>
+                  <a:txBody>
+                    <a:bodyPr/>
+                    <a:lstStyle/>
+                    <a:p>
+                      <a:pPr algn="l" fontAlgn="ctr"/>
+                      <a:r>
+                        <a:rPr lang="da-DK" sz="1100" b="0" i="0" u="none" strike="noStrike">
+                          <a:solidFill>
+                            <a:srgbClr val="000000"/>
+                          </a:solidFill>
+                          <a:effectLst/>
+                          <a:latin typeface="Calibri" panose="020F0502020204030204" pitchFamily="34" charset="0"/>
+                        </a:rPr>
+                        <a:t>Fin implementering, men med nogen fejlrettelser</a:t>
+                      </a:r>
+                    </a:p>
+                  </a:txBody>
+                  <a:tcPr marL="82177" marR="9131" marT="9131" marB="0" anchor="ctr">
+                    <a:lnL w="6350" cap="flat" cmpd="sng" algn="ctr">
+                      <a:solidFill>
+                        <a:srgbClr val="000000"/>
+                      </a:solidFill>
+                      <a:prstDash val="solid"/>
+                      <a:round/>
+                      <a:headEnd type="none" w="med" len="med"/>
+                      <a:tailEnd type="none" w="med" len="med"/>
+                    </a:lnL>
+                    <a:lnR w="6350" cap="flat" cmpd="sng" algn="ctr">
+                      <a:solidFill>
+                        <a:srgbClr val="000000"/>
+                      </a:solidFill>
+                      <a:prstDash val="solid"/>
+                      <a:round/>
+                      <a:headEnd type="none" w="med" len="med"/>
+                      <a:tailEnd type="none" w="med" len="med"/>
+                    </a:lnR>
+                    <a:lnT w="6350" cap="flat" cmpd="sng" algn="ctr">
+                      <a:solidFill>
+                        <a:srgbClr val="000000"/>
+                      </a:solidFill>
+                      <a:prstDash val="solid"/>
+                      <a:round/>
+                      <a:headEnd type="none" w="med" len="med"/>
+                      <a:tailEnd type="none" w="med" len="med"/>
+                    </a:lnT>
+                    <a:lnB w="6350" cap="flat" cmpd="sng" algn="ctr">
+                      <a:solidFill>
+                        <a:srgbClr val="000000"/>
+                      </a:solidFill>
+                      <a:prstDash val="solid"/>
+                      <a:round/>
+                      <a:headEnd type="none" w="med" len="med"/>
+                      <a:tailEnd type="none" w="med" len="med"/>
+                    </a:lnB>
+                    <a:solidFill>
+                      <a:srgbClr val="C6E0B4"/>
+                    </a:solidFill>
+                  </a:tcPr>
+                </a:tc>
+                <a:tc>
+                  <a:txBody>
+                    <a:bodyPr/>
+                    <a:lstStyle/>
+                    <a:p>
+                      <a:pPr algn="l" fontAlgn="ctr"/>
+                      <a:r>
+                        <a:rPr lang="da-DK" sz="1100" b="0" i="0" u="none" strike="noStrike">
+                          <a:solidFill>
+                            <a:srgbClr val="000000"/>
+                          </a:solidFill>
+                          <a:effectLst/>
+                          <a:latin typeface="Calibri" panose="020F0502020204030204" pitchFamily="34" charset="0"/>
+                        </a:rPr>
+                        <a:t>Implementerede fuldt funktionelt dashboard hurtig med få fejlrettelser</a:t>
+                      </a:r>
+                    </a:p>
+                  </a:txBody>
+                  <a:tcPr marL="82177" marR="9131" marT="9131" marB="0" anchor="ctr">
+                    <a:lnL w="6350" cap="flat" cmpd="sng" algn="ctr">
+                      <a:solidFill>
+                        <a:srgbClr val="000000"/>
+                      </a:solidFill>
+                      <a:prstDash val="solid"/>
+                      <a:round/>
+                      <a:headEnd type="none" w="med" len="med"/>
+                      <a:tailEnd type="none" w="med" len="med"/>
+                    </a:lnL>
+                    <a:lnR w="6350" cap="flat" cmpd="sng" algn="ctr">
+                      <a:solidFill>
+                        <a:srgbClr val="000000"/>
+                      </a:solidFill>
+                      <a:prstDash val="solid"/>
+                      <a:round/>
+                      <a:headEnd type="none" w="med" len="med"/>
+                      <a:tailEnd type="none" w="med" len="med"/>
+                    </a:lnR>
+                    <a:lnT w="6350" cap="flat" cmpd="sng" algn="ctr">
+                      <a:solidFill>
+                        <a:srgbClr val="000000"/>
+                      </a:solidFill>
+                      <a:prstDash val="solid"/>
+                      <a:round/>
+                      <a:headEnd type="none" w="med" len="med"/>
+                      <a:tailEnd type="none" w="med" len="med"/>
+                    </a:lnT>
+                    <a:lnB w="6350" cap="flat" cmpd="sng" algn="ctr">
+                      <a:solidFill>
+                        <a:srgbClr val="000000"/>
+                      </a:solidFill>
+                      <a:prstDash val="solid"/>
+                      <a:round/>
+                      <a:headEnd type="none" w="med" len="med"/>
+                      <a:tailEnd type="none" w="med" len="med"/>
+                    </a:lnB>
+                    <a:solidFill>
+                      <a:srgbClr val="A9D08E"/>
+                    </a:solidFill>
+                  </a:tcPr>
+                </a:tc>
+                <a:tc>
+                  <a:txBody>
+                    <a:bodyPr/>
+                    <a:lstStyle/>
+                    <a:p>
+                      <a:pPr algn="l" fontAlgn="ctr"/>
+                      <a:r>
+                        <a:rPr lang="da-DK" sz="1100" b="0" i="0" u="none" strike="noStrike">
+                          <a:solidFill>
+                            <a:srgbClr val="000000"/>
+                          </a:solidFill>
+                          <a:effectLst/>
+                          <a:latin typeface="Calibri" panose="020F0502020204030204" pitchFamily="34" charset="0"/>
+                        </a:rPr>
+                        <a:t>Nemt at sætte ArcGIS API for op, men ArcGIS online eller lignende kræves</a:t>
+                      </a:r>
+                    </a:p>
+                  </a:txBody>
+                  <a:tcPr marL="82177" marR="9131" marT="9131" marB="0" anchor="ctr">
+                    <a:lnL w="6350" cap="flat" cmpd="sng" algn="ctr">
+                      <a:solidFill>
+                        <a:srgbClr val="000000"/>
+                      </a:solidFill>
+                      <a:prstDash val="solid"/>
+                      <a:round/>
+                      <a:headEnd type="none" w="med" len="med"/>
+                      <a:tailEnd type="none" w="med" len="med"/>
+                    </a:lnL>
+                    <a:lnR w="6350" cap="flat" cmpd="sng" algn="ctr">
+                      <a:solidFill>
+                        <a:srgbClr val="000000"/>
+                      </a:solidFill>
+                      <a:prstDash val="solid"/>
+                      <a:round/>
+                      <a:headEnd type="none" w="med" len="med"/>
+                      <a:tailEnd type="none" w="med" len="med"/>
+                    </a:lnR>
+                    <a:lnT w="6350" cap="flat" cmpd="sng" algn="ctr">
+                      <a:solidFill>
+                        <a:srgbClr val="000000"/>
+                      </a:solidFill>
+                      <a:prstDash val="solid"/>
+                      <a:round/>
+                      <a:headEnd type="none" w="med" len="med"/>
+                      <a:tailEnd type="none" w="med" len="med"/>
+                    </a:lnT>
+                    <a:lnB w="6350" cap="flat" cmpd="sng" algn="ctr">
+                      <a:solidFill>
+                        <a:srgbClr val="000000"/>
+                      </a:solidFill>
+                      <a:prstDash val="solid"/>
+                      <a:round/>
+                      <a:headEnd type="none" w="med" len="med"/>
+                      <a:tailEnd type="none" w="med" len="med"/>
+                    </a:lnB>
+                    <a:solidFill>
+                      <a:srgbClr val="FFD966"/>
+                    </a:solidFill>
+                  </a:tcPr>
+                </a:tc>
+                <a:tc>
+                  <a:txBody>
+                    <a:bodyPr/>
+                    <a:lstStyle/>
+                    <a:p>
+                      <a:pPr algn="l" fontAlgn="ctr"/>
+                      <a:r>
+                        <a:rPr lang="da-DK" sz="1100" b="0" i="0" u="none" strike="noStrike">
+                          <a:solidFill>
+                            <a:srgbClr val="000000"/>
+                          </a:solidFill>
+                          <a:effectLst/>
+                          <a:latin typeface="Calibri" panose="020F0502020204030204" pitchFamily="34" charset="0"/>
+                        </a:rPr>
+                        <a:t>Fungerede ikke godt, AI bliver "forvirret" over forskellige version med ny brugerflade</a:t>
+                      </a:r>
+                    </a:p>
+                  </a:txBody>
+                  <a:tcPr marL="82177" marR="9131" marT="9131" marB="0" anchor="ctr">
+                    <a:lnL w="6350" cap="flat" cmpd="sng" algn="ctr">
+                      <a:solidFill>
+                        <a:srgbClr val="000000"/>
+                      </a:solidFill>
+                      <a:prstDash val="solid"/>
+                      <a:round/>
+                      <a:headEnd type="none" w="med" len="med"/>
+                      <a:tailEnd type="none" w="med" len="med"/>
+                    </a:lnL>
+                    <a:lnR w="6350" cap="flat" cmpd="sng" algn="ctr">
+                      <a:solidFill>
+                        <a:srgbClr val="000000"/>
+                      </a:solidFill>
+                      <a:prstDash val="solid"/>
+                      <a:round/>
+                      <a:headEnd type="none" w="med" len="med"/>
+                      <a:tailEnd type="none" w="med" len="med"/>
+                    </a:lnR>
+                    <a:lnT w="6350" cap="flat" cmpd="sng" algn="ctr">
+                      <a:solidFill>
+                        <a:srgbClr val="000000"/>
+                      </a:solidFill>
+                      <a:prstDash val="solid"/>
+                      <a:round/>
+                      <a:headEnd type="none" w="med" len="med"/>
+                      <a:tailEnd type="none" w="med" len="med"/>
+                    </a:lnT>
+                    <a:lnB w="6350" cap="flat" cmpd="sng" algn="ctr">
+                      <a:solidFill>
+                        <a:srgbClr val="000000"/>
+                      </a:solidFill>
+                      <a:prstDash val="solid"/>
+                      <a:round/>
+                      <a:headEnd type="none" w="med" len="med"/>
+                      <a:tailEnd type="none" w="med" len="med"/>
+                    </a:lnB>
+                    <a:solidFill>
+                      <a:srgbClr val="F4B084"/>
+                    </a:solidFill>
+                  </a:tcPr>
+                </a:tc>
+                <a:extLst>
+                  <a:ext uri="{0D108BD9-81ED-4DB2-BD59-A6C34878D82A}">
+                    <a16:rowId xmlns:a16="http://schemas.microsoft.com/office/drawing/2014/main" val="2991427720"/>
+                  </a:ext>
+                </a:extLst>
+              </a:tr>
+              <a:tr h="781972">
+                <a:tc>
+                  <a:txBody>
+                    <a:bodyPr/>
+                    <a:lstStyle/>
+                    <a:p>
+                      <a:pPr algn="l" fontAlgn="ctr"/>
+                      <a:r>
+                        <a:rPr lang="da-DK" sz="1100" b="0" i="0" u="none" strike="noStrike">
+                          <a:solidFill>
+                            <a:srgbClr val="000000"/>
+                          </a:solidFill>
+                          <a:effectLst/>
+                          <a:latin typeface="Calibri" panose="020F0502020204030204" pitchFamily="34" charset="0"/>
+                        </a:rPr>
+                        <a:t>Hosting - deployment</a:t>
+                      </a:r>
+                    </a:p>
+                  </a:txBody>
+                  <a:tcPr marL="82177" marR="9131" marT="9131" marB="0" anchor="ctr">
+                    <a:lnL w="6350" cap="flat" cmpd="sng" algn="ctr">
+                      <a:solidFill>
+                        <a:srgbClr val="000000"/>
+                      </a:solidFill>
+                      <a:prstDash val="solid"/>
+                      <a:round/>
+                      <a:headEnd type="none" w="med" len="med"/>
+                      <a:tailEnd type="none" w="med" len="med"/>
+                    </a:lnL>
+                    <a:lnR w="6350" cap="flat" cmpd="sng" algn="ctr">
+                      <a:solidFill>
+                        <a:srgbClr val="000000"/>
+                      </a:solidFill>
+                      <a:prstDash val="solid"/>
+                      <a:round/>
+                      <a:headEnd type="none" w="med" len="med"/>
+                      <a:tailEnd type="none" w="med" len="med"/>
+                    </a:lnR>
+                    <a:lnT w="6350" cap="flat" cmpd="sng" algn="ctr">
+                      <a:solidFill>
+                        <a:srgbClr val="000000"/>
+                      </a:solidFill>
+                      <a:prstDash val="solid"/>
+                      <a:round/>
+                      <a:headEnd type="none" w="med" len="med"/>
+                      <a:tailEnd type="none" w="med" len="med"/>
+                    </a:lnT>
+                    <a:lnB w="6350" cap="flat" cmpd="sng" algn="ctr">
+                      <a:solidFill>
+                        <a:srgbClr val="000000"/>
+                      </a:solidFill>
+                      <a:prstDash val="solid"/>
+                      <a:round/>
+                      <a:headEnd type="none" w="med" len="med"/>
+                      <a:tailEnd type="none" w="med" len="med"/>
+                    </a:lnB>
+                    <a:solidFill>
+                      <a:srgbClr val="C9C9C9"/>
+                    </a:solidFill>
+                  </a:tcPr>
+                </a:tc>
+                <a:tc>
+                  <a:txBody>
+                    <a:bodyPr/>
+                    <a:lstStyle/>
+                    <a:p>
+                      <a:pPr algn="l" fontAlgn="ctr"/>
+                      <a:r>
+                        <a:rPr lang="da-DK" sz="1100" b="0" i="0" u="none" strike="noStrike">
+                          <a:solidFill>
+                            <a:srgbClr val="000000"/>
+                          </a:solidFill>
+                          <a:effectLst/>
+                          <a:latin typeface="Calibri" panose="020F0502020204030204" pitchFamily="34" charset="0"/>
+                        </a:rPr>
+                        <a:t>ShinyApps er nem at sætte op.</a:t>
+                      </a:r>
+                      <a:br>
+                        <a:rPr lang="da-DK" sz="1100" b="0" i="0" u="none" strike="noStrike">
+                          <a:solidFill>
+                            <a:srgbClr val="000000"/>
+                          </a:solidFill>
+                          <a:effectLst/>
+                          <a:latin typeface="Calibri" panose="020F0502020204030204" pitchFamily="34" charset="0"/>
+                        </a:rPr>
+                      </a:br>
+                      <a:r>
+                        <a:rPr lang="da-DK" sz="1100" b="0" i="0" u="none" strike="noStrike">
+                          <a:solidFill>
+                            <a:srgbClr val="000000"/>
+                          </a:solidFill>
+                          <a:effectLst/>
+                          <a:latin typeface="Calibri" panose="020F0502020204030204" pitchFamily="34" charset="0"/>
+                        </a:rPr>
+                        <a:t>Shinylive (statisk site) er rigtig god til datamængder</a:t>
+                      </a:r>
+                    </a:p>
+                  </a:txBody>
+                  <a:tcPr marL="82177" marR="9131" marT="9131" marB="0" anchor="ctr">
+                    <a:lnL w="6350" cap="flat" cmpd="sng" algn="ctr">
+                      <a:solidFill>
+                        <a:srgbClr val="000000"/>
+                      </a:solidFill>
+                      <a:prstDash val="solid"/>
+                      <a:round/>
+                      <a:headEnd type="none" w="med" len="med"/>
+                      <a:tailEnd type="none" w="med" len="med"/>
+                    </a:lnL>
+                    <a:lnR w="6350" cap="flat" cmpd="sng" algn="ctr">
+                      <a:solidFill>
+                        <a:srgbClr val="000000"/>
+                      </a:solidFill>
+                      <a:prstDash val="solid"/>
+                      <a:round/>
+                      <a:headEnd type="none" w="med" len="med"/>
+                      <a:tailEnd type="none" w="med" len="med"/>
+                    </a:lnR>
+                    <a:lnT w="6350" cap="flat" cmpd="sng" algn="ctr">
+                      <a:solidFill>
+                        <a:srgbClr val="000000"/>
+                      </a:solidFill>
+                      <a:prstDash val="solid"/>
+                      <a:round/>
+                      <a:headEnd type="none" w="med" len="med"/>
+                      <a:tailEnd type="none" w="med" len="med"/>
+                    </a:lnT>
+                    <a:lnB w="6350" cap="flat" cmpd="sng" algn="ctr">
+                      <a:solidFill>
+                        <a:srgbClr val="000000"/>
+                      </a:solidFill>
+                      <a:prstDash val="solid"/>
+                      <a:round/>
+                      <a:headEnd type="none" w="med" len="med"/>
+                      <a:tailEnd type="none" w="med" len="med"/>
+                    </a:lnB>
+                    <a:solidFill>
+                      <a:srgbClr val="C6E0B4"/>
+                    </a:solidFill>
+                  </a:tcPr>
+                </a:tc>
+                <a:tc>
+                  <a:txBody>
+                    <a:bodyPr/>
+                    <a:lstStyle/>
+                    <a:p>
+                      <a:pPr algn="l" fontAlgn="ctr"/>
+                      <a:r>
+                        <a:rPr lang="da-DK" sz="1100" b="0" i="0" u="none" strike="noStrike">
+                          <a:solidFill>
+                            <a:srgbClr val="000000"/>
+                          </a:solidFill>
+                          <a:effectLst/>
+                          <a:latin typeface="Calibri" panose="020F0502020204030204" pitchFamily="34" charset="0"/>
+                        </a:rPr>
+                        <a:t>Hosting er lidt mere krævende end med Shiny, men dog rimelig nemt med fx Render</a:t>
+                      </a:r>
+                    </a:p>
+                  </a:txBody>
+                  <a:tcPr marL="82177" marR="9131" marT="9131" marB="0" anchor="ctr">
+                    <a:lnL w="6350" cap="flat" cmpd="sng" algn="ctr">
+                      <a:solidFill>
+                        <a:srgbClr val="000000"/>
+                      </a:solidFill>
+                      <a:prstDash val="solid"/>
+                      <a:round/>
+                      <a:headEnd type="none" w="med" len="med"/>
+                      <a:tailEnd type="none" w="med" len="med"/>
+                    </a:lnL>
+                    <a:lnR w="6350" cap="flat" cmpd="sng" algn="ctr">
+                      <a:solidFill>
+                        <a:srgbClr val="000000"/>
+                      </a:solidFill>
+                      <a:prstDash val="solid"/>
+                      <a:round/>
+                      <a:headEnd type="none" w="med" len="med"/>
+                      <a:tailEnd type="none" w="med" len="med"/>
+                    </a:lnR>
+                    <a:lnT w="6350" cap="flat" cmpd="sng" algn="ctr">
+                      <a:solidFill>
+                        <a:srgbClr val="000000"/>
+                      </a:solidFill>
+                      <a:prstDash val="solid"/>
+                      <a:round/>
+                      <a:headEnd type="none" w="med" len="med"/>
+                      <a:tailEnd type="none" w="med" len="med"/>
+                    </a:lnT>
+                    <a:lnB w="6350" cap="flat" cmpd="sng" algn="ctr">
+                      <a:solidFill>
+                        <a:srgbClr val="000000"/>
+                      </a:solidFill>
+                      <a:prstDash val="solid"/>
+                      <a:round/>
+                      <a:headEnd type="none" w="med" len="med"/>
+                      <a:tailEnd type="none" w="med" len="med"/>
+                    </a:lnB>
+                    <a:solidFill>
+                      <a:srgbClr val="C6E0B4"/>
+                    </a:solidFill>
+                  </a:tcPr>
+                </a:tc>
+                <a:tc>
+                  <a:txBody>
+                    <a:bodyPr/>
+                    <a:lstStyle/>
+                    <a:p>
+                      <a:pPr algn="l" fontAlgn="ctr"/>
+                      <a:r>
+                        <a:rPr lang="da-DK" sz="1100" b="0" i="0" u="none" strike="noStrike">
+                          <a:solidFill>
+                            <a:srgbClr val="000000"/>
+                          </a:solidFill>
+                          <a:effectLst/>
+                          <a:latin typeface="Calibri" panose="020F0502020204030204" pitchFamily="34" charset="0"/>
+                        </a:rPr>
+                        <a:t>Streamlit.app er meget simpel. </a:t>
+                      </a:r>
+                      <a:br>
+                        <a:rPr lang="da-DK" sz="1100" b="0" i="0" u="none" strike="noStrike">
+                          <a:solidFill>
+                            <a:srgbClr val="000000"/>
+                          </a:solidFill>
+                          <a:effectLst/>
+                          <a:latin typeface="Calibri" panose="020F0502020204030204" pitchFamily="34" charset="0"/>
+                        </a:rPr>
+                      </a:br>
+                      <a:r>
+                        <a:rPr lang="da-DK" sz="1100" b="0" i="0" u="none" strike="noStrike">
+                          <a:solidFill>
+                            <a:srgbClr val="000000"/>
+                          </a:solidFill>
+                          <a:effectLst/>
+                          <a:latin typeface="Calibri" panose="020F0502020204030204" pitchFamily="34" charset="0"/>
+                        </a:rPr>
+                        <a:t>Stlite (statisk site) virker godt til mindre datamængder.</a:t>
+                      </a:r>
+                    </a:p>
+                  </a:txBody>
+                  <a:tcPr marL="82177" marR="9131" marT="9131" marB="0" anchor="ctr">
+                    <a:lnL w="6350" cap="flat" cmpd="sng" algn="ctr">
+                      <a:solidFill>
+                        <a:srgbClr val="000000"/>
+                      </a:solidFill>
+                      <a:prstDash val="solid"/>
+                      <a:round/>
+                      <a:headEnd type="none" w="med" len="med"/>
+                      <a:tailEnd type="none" w="med" len="med"/>
+                    </a:lnL>
+                    <a:lnR w="6350" cap="flat" cmpd="sng" algn="ctr">
+                      <a:solidFill>
+                        <a:srgbClr val="000000"/>
+                      </a:solidFill>
+                      <a:prstDash val="solid"/>
+                      <a:round/>
+                      <a:headEnd type="none" w="med" len="med"/>
+                      <a:tailEnd type="none" w="med" len="med"/>
+                    </a:lnR>
+                    <a:lnT w="6350" cap="flat" cmpd="sng" algn="ctr">
+                      <a:solidFill>
+                        <a:srgbClr val="000000"/>
+                      </a:solidFill>
+                      <a:prstDash val="solid"/>
+                      <a:round/>
+                      <a:headEnd type="none" w="med" len="med"/>
+                      <a:tailEnd type="none" w="med" len="med"/>
+                    </a:lnT>
+                    <a:lnB w="6350" cap="flat" cmpd="sng" algn="ctr">
+                      <a:solidFill>
+                        <a:srgbClr val="000000"/>
+                      </a:solidFill>
+                      <a:prstDash val="solid"/>
+                      <a:round/>
+                      <a:headEnd type="none" w="med" len="med"/>
+                      <a:tailEnd type="none" w="med" len="med"/>
+                    </a:lnB>
+                    <a:solidFill>
+                      <a:srgbClr val="A9D08E"/>
+                    </a:solidFill>
+                  </a:tcPr>
+                </a:tc>
+                <a:tc>
+                  <a:txBody>
+                    <a:bodyPr/>
+                    <a:lstStyle/>
+                    <a:p>
+                      <a:pPr algn="l" fontAlgn="ctr"/>
+                      <a:r>
+                        <a:rPr lang="da-DK" sz="1100" b="0" i="0" u="none" strike="noStrike">
+                          <a:solidFill>
+                            <a:srgbClr val="000000"/>
+                          </a:solidFill>
+                          <a:effectLst/>
+                          <a:latin typeface="Calibri" panose="020F0502020204030204" pitchFamily="34" charset="0"/>
+                        </a:rPr>
+                        <a:t>Nem hosting, men kræver licens (fx ArcGIS online)</a:t>
+                      </a:r>
+                    </a:p>
+                  </a:txBody>
+                  <a:tcPr marL="82177" marR="9131" marT="9131" marB="0" anchor="ctr">
+                    <a:lnL w="6350" cap="flat" cmpd="sng" algn="ctr">
+                      <a:solidFill>
+                        <a:srgbClr val="000000"/>
+                      </a:solidFill>
+                      <a:prstDash val="solid"/>
+                      <a:round/>
+                      <a:headEnd type="none" w="med" len="med"/>
+                      <a:tailEnd type="none" w="med" len="med"/>
+                    </a:lnL>
+                    <a:lnR w="6350" cap="flat" cmpd="sng" algn="ctr">
+                      <a:solidFill>
+                        <a:srgbClr val="000000"/>
+                      </a:solidFill>
+                      <a:prstDash val="solid"/>
+                      <a:round/>
+                      <a:headEnd type="none" w="med" len="med"/>
+                      <a:tailEnd type="none" w="med" len="med"/>
+                    </a:lnR>
+                    <a:lnT w="6350" cap="flat" cmpd="sng" algn="ctr">
+                      <a:solidFill>
+                        <a:srgbClr val="000000"/>
+                      </a:solidFill>
+                      <a:prstDash val="solid"/>
+                      <a:round/>
+                      <a:headEnd type="none" w="med" len="med"/>
+                      <a:tailEnd type="none" w="med" len="med"/>
+                    </a:lnT>
+                    <a:lnB w="6350" cap="flat" cmpd="sng" algn="ctr">
+                      <a:solidFill>
+                        <a:srgbClr val="000000"/>
+                      </a:solidFill>
+                      <a:prstDash val="solid"/>
+                      <a:round/>
+                      <a:headEnd type="none" w="med" len="med"/>
+                      <a:tailEnd type="none" w="med" len="med"/>
+                    </a:lnB>
+                    <a:solidFill>
+                      <a:srgbClr val="C6E0B4"/>
+                    </a:solidFill>
+                  </a:tcPr>
+                </a:tc>
+                <a:tc>
+                  <a:txBody>
+                    <a:bodyPr/>
+                    <a:lstStyle/>
+                    <a:p>
+                      <a:pPr algn="l" fontAlgn="ctr"/>
+                      <a:r>
+                        <a:rPr lang="da-DK" sz="1100" b="0" i="0" u="none" strike="noStrike">
+                          <a:solidFill>
+                            <a:srgbClr val="000000"/>
+                          </a:solidFill>
+                          <a:effectLst/>
+                          <a:latin typeface="Calibri" panose="020F0502020204030204" pitchFamily="34" charset="0"/>
+                        </a:rPr>
+                        <a:t>Kræver Power BI Service/Premium og licenser og opsætning, der tillader hosting til externe</a:t>
+                      </a:r>
+                    </a:p>
+                  </a:txBody>
+                  <a:tcPr marL="82177" marR="9131" marT="9131" marB="0" anchor="ctr">
+                    <a:lnL w="6350" cap="flat" cmpd="sng" algn="ctr">
+                      <a:solidFill>
+                        <a:srgbClr val="000000"/>
+                      </a:solidFill>
+                      <a:prstDash val="solid"/>
+                      <a:round/>
+                      <a:headEnd type="none" w="med" len="med"/>
+                      <a:tailEnd type="none" w="med" len="med"/>
+                    </a:lnL>
+                    <a:lnR w="6350" cap="flat" cmpd="sng" algn="ctr">
+                      <a:solidFill>
+                        <a:srgbClr val="000000"/>
+                      </a:solidFill>
+                      <a:prstDash val="solid"/>
+                      <a:round/>
+                      <a:headEnd type="none" w="med" len="med"/>
+                      <a:tailEnd type="none" w="med" len="med"/>
+                    </a:lnR>
+                    <a:lnT w="6350" cap="flat" cmpd="sng" algn="ctr">
+                      <a:solidFill>
+                        <a:srgbClr val="000000"/>
+                      </a:solidFill>
+                      <a:prstDash val="solid"/>
+                      <a:round/>
+                      <a:headEnd type="none" w="med" len="med"/>
+                      <a:tailEnd type="none" w="med" len="med"/>
+                    </a:lnT>
+                    <a:lnB w="6350" cap="flat" cmpd="sng" algn="ctr">
+                      <a:solidFill>
+                        <a:srgbClr val="000000"/>
+                      </a:solidFill>
+                      <a:prstDash val="solid"/>
+                      <a:round/>
+                      <a:headEnd type="none" w="med" len="med"/>
+                      <a:tailEnd type="none" w="med" len="med"/>
+                    </a:lnB>
+                    <a:solidFill>
+                      <a:srgbClr val="FFD966"/>
+                    </a:solidFill>
+                  </a:tcPr>
+                </a:tc>
+                <a:extLst>
+                  <a:ext uri="{0D108BD9-81ED-4DB2-BD59-A6C34878D82A}">
+                    <a16:rowId xmlns:a16="http://schemas.microsoft.com/office/drawing/2014/main" val="2165055496"/>
+                  </a:ext>
+                </a:extLst>
+              </a:tr>
+              <a:tr h="781972">
+                <a:tc>
+                  <a:txBody>
+                    <a:bodyPr/>
+                    <a:lstStyle/>
+                    <a:p>
+                      <a:pPr algn="l" fontAlgn="ctr"/>
+                      <a:r>
+                        <a:rPr lang="da-DK" sz="1100" b="0" i="0" u="none" strike="noStrike">
+                          <a:solidFill>
+                            <a:srgbClr val="000000"/>
+                          </a:solidFill>
+                          <a:effectLst/>
+                          <a:latin typeface="Calibri" panose="020F0502020204030204" pitchFamily="34" charset="0"/>
+                        </a:rPr>
+                        <a:t>Slutbruger-oplevelsen</a:t>
+                      </a:r>
+                    </a:p>
+                  </a:txBody>
+                  <a:tcPr marL="82177" marR="9131" marT="9131" marB="0" anchor="ctr">
+                    <a:lnL w="6350" cap="flat" cmpd="sng" algn="ctr">
+                      <a:solidFill>
+                        <a:srgbClr val="000000"/>
+                      </a:solidFill>
+                      <a:prstDash val="solid"/>
+                      <a:round/>
+                      <a:headEnd type="none" w="med" len="med"/>
+                      <a:tailEnd type="none" w="med" len="med"/>
+                    </a:lnL>
+                    <a:lnR w="6350" cap="flat" cmpd="sng" algn="ctr">
+                      <a:solidFill>
+                        <a:srgbClr val="000000"/>
+                      </a:solidFill>
+                      <a:prstDash val="solid"/>
+                      <a:round/>
+                      <a:headEnd type="none" w="med" len="med"/>
+                      <a:tailEnd type="none" w="med" len="med"/>
+                    </a:lnR>
+                    <a:lnT w="6350" cap="flat" cmpd="sng" algn="ctr">
+                      <a:solidFill>
+                        <a:srgbClr val="000000"/>
+                      </a:solidFill>
+                      <a:prstDash val="solid"/>
+                      <a:round/>
+                      <a:headEnd type="none" w="med" len="med"/>
+                      <a:tailEnd type="none" w="med" len="med"/>
+                    </a:lnT>
+                    <a:lnB w="12700" cap="flat" cmpd="sng" algn="ctr">
+                      <a:solidFill>
+                        <a:srgbClr val="000000"/>
+                      </a:solidFill>
+                      <a:prstDash val="solid"/>
+                      <a:round/>
+                      <a:headEnd type="none" w="med" len="med"/>
+                      <a:tailEnd type="none" w="med" len="med"/>
+                    </a:lnB>
+                    <a:solidFill>
+                      <a:srgbClr val="C9C9C9"/>
+                    </a:solidFill>
+                  </a:tcPr>
+                </a:tc>
+                <a:tc>
+                  <a:txBody>
+                    <a:bodyPr/>
+                    <a:lstStyle/>
+                    <a:p>
+                      <a:pPr algn="l" fontAlgn="ctr"/>
+                      <a:r>
+                        <a:rPr lang="da-DK" sz="1100" b="0" i="0" u="none" strike="noStrike">
+                          <a:solidFill>
+                            <a:srgbClr val="000000"/>
+                          </a:solidFill>
+                          <a:effectLst/>
+                          <a:latin typeface="Calibri" panose="020F0502020204030204" pitchFamily="34" charset="0"/>
+                        </a:rPr>
+                        <a:t>simpelt, men ganske flot</a:t>
+                      </a:r>
+                    </a:p>
+                  </a:txBody>
+                  <a:tcPr marL="82177" marR="9131" marT="9131" marB="0" anchor="ctr">
+                    <a:lnL w="6350" cap="flat" cmpd="sng" algn="ctr">
+                      <a:solidFill>
+                        <a:srgbClr val="000000"/>
+                      </a:solidFill>
+                      <a:prstDash val="solid"/>
+                      <a:round/>
+                      <a:headEnd type="none" w="med" len="med"/>
+                      <a:tailEnd type="none" w="med" len="med"/>
+                    </a:lnL>
+                    <a:lnR w="6350" cap="flat" cmpd="sng" algn="ctr">
+                      <a:solidFill>
+                        <a:srgbClr val="000000"/>
+                      </a:solidFill>
+                      <a:prstDash val="solid"/>
+                      <a:round/>
+                      <a:headEnd type="none" w="med" len="med"/>
+                      <a:tailEnd type="none" w="med" len="med"/>
+                    </a:lnR>
+                    <a:lnT w="6350" cap="flat" cmpd="sng" algn="ctr">
+                      <a:solidFill>
+                        <a:srgbClr val="000000"/>
+                      </a:solidFill>
+                      <a:prstDash val="solid"/>
+                      <a:round/>
+                      <a:headEnd type="none" w="med" len="med"/>
+                      <a:tailEnd type="none" w="med" len="med"/>
+                    </a:lnT>
+                    <a:lnB w="12700" cap="flat" cmpd="sng" algn="ctr">
+                      <a:solidFill>
+                        <a:srgbClr val="000000"/>
+                      </a:solidFill>
+                      <a:prstDash val="solid"/>
+                      <a:round/>
+                      <a:headEnd type="none" w="med" len="med"/>
+                      <a:tailEnd type="none" w="med" len="med"/>
+                    </a:lnB>
+                    <a:solidFill>
+                      <a:srgbClr val="C6E0B4"/>
+                    </a:solidFill>
+                  </a:tcPr>
+                </a:tc>
+                <a:tc>
+                  <a:txBody>
+                    <a:bodyPr/>
+                    <a:lstStyle/>
+                    <a:p>
+                      <a:pPr algn="l" fontAlgn="ctr"/>
+                      <a:r>
+                        <a:rPr lang="da-DK" sz="1100" b="0" i="0" u="none" strike="noStrike">
+                          <a:solidFill>
+                            <a:srgbClr val="000000"/>
+                          </a:solidFill>
+                          <a:effectLst/>
+                          <a:latin typeface="Calibri" panose="020F0502020204030204" pitchFamily="34" charset="0"/>
+                        </a:rPr>
+                        <a:t>simpelt, men ganske flot</a:t>
+                      </a:r>
+                    </a:p>
+                  </a:txBody>
+                  <a:tcPr marL="82177" marR="9131" marT="9131" marB="0" anchor="ctr">
+                    <a:lnL w="6350" cap="flat" cmpd="sng" algn="ctr">
+                      <a:solidFill>
+                        <a:srgbClr val="000000"/>
+                      </a:solidFill>
+                      <a:prstDash val="solid"/>
+                      <a:round/>
+                      <a:headEnd type="none" w="med" len="med"/>
+                      <a:tailEnd type="none" w="med" len="med"/>
+                    </a:lnL>
+                    <a:lnR w="6350" cap="flat" cmpd="sng" algn="ctr">
+                      <a:solidFill>
+                        <a:srgbClr val="000000"/>
+                      </a:solidFill>
+                      <a:prstDash val="solid"/>
+                      <a:round/>
+                      <a:headEnd type="none" w="med" len="med"/>
+                      <a:tailEnd type="none" w="med" len="med"/>
+                    </a:lnR>
+                    <a:lnT w="6350" cap="flat" cmpd="sng" algn="ctr">
+                      <a:solidFill>
+                        <a:srgbClr val="000000"/>
+                      </a:solidFill>
+                      <a:prstDash val="solid"/>
+                      <a:round/>
+                      <a:headEnd type="none" w="med" len="med"/>
+                      <a:tailEnd type="none" w="med" len="med"/>
+                    </a:lnT>
+                    <a:lnB w="12700" cap="flat" cmpd="sng" algn="ctr">
+                      <a:solidFill>
+                        <a:srgbClr val="000000"/>
+                      </a:solidFill>
+                      <a:prstDash val="solid"/>
+                      <a:round/>
+                      <a:headEnd type="none" w="med" len="med"/>
+                      <a:tailEnd type="none" w="med" len="med"/>
+                    </a:lnB>
+                    <a:solidFill>
+                      <a:srgbClr val="C6E0B4"/>
+                    </a:solidFill>
+                  </a:tcPr>
+                </a:tc>
+                <a:tc>
+                  <a:txBody>
+                    <a:bodyPr/>
+                    <a:lstStyle/>
+                    <a:p>
+                      <a:pPr algn="l" fontAlgn="ctr"/>
+                      <a:r>
+                        <a:rPr lang="da-DK" sz="1100" b="0" i="0" u="none" strike="noStrike">
+                          <a:solidFill>
+                            <a:srgbClr val="000000"/>
+                          </a:solidFill>
+                          <a:effectLst/>
+                          <a:latin typeface="Calibri" panose="020F0502020204030204" pitchFamily="34" charset="0"/>
+                        </a:rPr>
+                        <a:t>simpelt, men ganske flot</a:t>
+                      </a:r>
+                    </a:p>
+                  </a:txBody>
+                  <a:tcPr marL="82177" marR="9131" marT="9131" marB="0" anchor="ctr">
+                    <a:lnL w="6350" cap="flat" cmpd="sng" algn="ctr">
+                      <a:solidFill>
+                        <a:srgbClr val="000000"/>
+                      </a:solidFill>
+                      <a:prstDash val="solid"/>
+                      <a:round/>
+                      <a:headEnd type="none" w="med" len="med"/>
+                      <a:tailEnd type="none" w="med" len="med"/>
+                    </a:lnL>
+                    <a:lnR w="6350" cap="flat" cmpd="sng" algn="ctr">
+                      <a:solidFill>
+                        <a:srgbClr val="000000"/>
+                      </a:solidFill>
+                      <a:prstDash val="solid"/>
+                      <a:round/>
+                      <a:headEnd type="none" w="med" len="med"/>
+                      <a:tailEnd type="none" w="med" len="med"/>
+                    </a:lnR>
+                    <a:lnT w="6350" cap="flat" cmpd="sng" algn="ctr">
+                      <a:solidFill>
+                        <a:srgbClr val="000000"/>
+                      </a:solidFill>
+                      <a:prstDash val="solid"/>
+                      <a:round/>
+                      <a:headEnd type="none" w="med" len="med"/>
+                      <a:tailEnd type="none" w="med" len="med"/>
+                    </a:lnT>
+                    <a:lnB w="12700" cap="flat" cmpd="sng" algn="ctr">
+                      <a:solidFill>
+                        <a:srgbClr val="000000"/>
+                      </a:solidFill>
+                      <a:prstDash val="solid"/>
+                      <a:round/>
+                      <a:headEnd type="none" w="med" len="med"/>
+                      <a:tailEnd type="none" w="med" len="med"/>
+                    </a:lnB>
+                    <a:solidFill>
+                      <a:srgbClr val="C6E0B4"/>
+                    </a:solidFill>
+                  </a:tcPr>
+                </a:tc>
+                <a:tc>
+                  <a:txBody>
+                    <a:bodyPr/>
+                    <a:lstStyle/>
+                    <a:p>
+                      <a:pPr algn="l" fontAlgn="ctr"/>
+                      <a:r>
+                        <a:rPr lang="da-DK" sz="1100" b="0" i="0" u="none" strike="noStrike">
+                          <a:solidFill>
+                            <a:srgbClr val="000000"/>
+                          </a:solidFill>
+                          <a:effectLst/>
+                          <a:latin typeface="Calibri" panose="020F0502020204030204" pitchFamily="34" charset="0"/>
+                        </a:rPr>
+                        <a:t>Jeg elsker 3D! &lt;3 </a:t>
+                      </a:r>
+                    </a:p>
+                  </a:txBody>
+                  <a:tcPr marL="82177" marR="9131" marT="9131" marB="0" anchor="ctr">
+                    <a:lnL w="6350" cap="flat" cmpd="sng" algn="ctr">
+                      <a:solidFill>
+                        <a:srgbClr val="000000"/>
+                      </a:solidFill>
+                      <a:prstDash val="solid"/>
+                      <a:round/>
+                      <a:headEnd type="none" w="med" len="med"/>
+                      <a:tailEnd type="none" w="med" len="med"/>
+                    </a:lnL>
+                    <a:lnR w="6350" cap="flat" cmpd="sng" algn="ctr">
+                      <a:solidFill>
+                        <a:srgbClr val="000000"/>
+                      </a:solidFill>
+                      <a:prstDash val="solid"/>
+                      <a:round/>
+                      <a:headEnd type="none" w="med" len="med"/>
+                      <a:tailEnd type="none" w="med" len="med"/>
+                    </a:lnR>
+                    <a:lnT w="6350" cap="flat" cmpd="sng" algn="ctr">
+                      <a:solidFill>
+                        <a:srgbClr val="000000"/>
+                      </a:solidFill>
+                      <a:prstDash val="solid"/>
+                      <a:round/>
+                      <a:headEnd type="none" w="med" len="med"/>
+                      <a:tailEnd type="none" w="med" len="med"/>
+                    </a:lnT>
+                    <a:lnB w="6350" cap="flat" cmpd="sng" algn="ctr">
+                      <a:solidFill>
+                        <a:srgbClr val="000000"/>
+                      </a:solidFill>
+                      <a:prstDash val="solid"/>
+                      <a:round/>
+                      <a:headEnd type="none" w="med" len="med"/>
+                      <a:tailEnd type="none" w="med" len="med"/>
+                    </a:lnB>
+                    <a:solidFill>
+                      <a:srgbClr val="A9D08E"/>
+                    </a:solidFill>
+                  </a:tcPr>
+                </a:tc>
+                <a:tc>
+                  <a:txBody>
+                    <a:bodyPr/>
+                    <a:lstStyle/>
+                    <a:p>
+                      <a:pPr algn="l" fontAlgn="ctr"/>
+                      <a:r>
+                        <a:rPr lang="da-DK" sz="1100" b="0" i="0" u="none" strike="noStrike" dirty="0">
+                          <a:solidFill>
+                            <a:srgbClr val="000000"/>
+                          </a:solidFill>
+                          <a:effectLst/>
+                          <a:latin typeface="Calibri" panose="020F0502020204030204" pitchFamily="34" charset="0"/>
+                        </a:rPr>
+                        <a:t>Det lykkedes ikke at lave et færdigt </a:t>
+                      </a:r>
+                      <a:r>
+                        <a:rPr lang="da-DK" sz="1100" b="0" i="0" u="none" strike="noStrike" dirty="0" err="1">
+                          <a:solidFill>
+                            <a:srgbClr val="000000"/>
+                          </a:solidFill>
+                          <a:effectLst/>
+                          <a:latin typeface="Calibri" panose="020F0502020204030204" pitchFamily="34" charset="0"/>
+                        </a:rPr>
+                        <a:t>dashboard</a:t>
+                      </a:r>
+                      <a:endParaRPr lang="da-DK" sz="1100" b="0" i="0" u="none" strike="noStrike" dirty="0">
+                        <a:solidFill>
+                          <a:srgbClr val="000000"/>
+                        </a:solidFill>
+                        <a:effectLst/>
+                        <a:latin typeface="Calibri" panose="020F0502020204030204" pitchFamily="34" charset="0"/>
+                      </a:endParaRPr>
+                    </a:p>
+                  </a:txBody>
+                  <a:tcPr marL="82177" marR="9131" marT="9131" marB="0" anchor="ctr">
+                    <a:lnL w="6350" cap="flat" cmpd="sng" algn="ctr">
+                      <a:solidFill>
+                        <a:srgbClr val="000000"/>
+                      </a:solidFill>
+                      <a:prstDash val="solid"/>
+                      <a:round/>
+                      <a:headEnd type="none" w="med" len="med"/>
+                      <a:tailEnd type="none" w="med" len="med"/>
+                    </a:lnL>
+                    <a:lnR w="6350" cap="flat" cmpd="sng" algn="ctr">
+                      <a:solidFill>
+                        <a:srgbClr val="000000"/>
+                      </a:solidFill>
+                      <a:prstDash val="solid"/>
+                      <a:round/>
+                      <a:headEnd type="none" w="med" len="med"/>
+                      <a:tailEnd type="none" w="med" len="med"/>
+                    </a:lnR>
+                    <a:lnT w="6350" cap="flat" cmpd="sng" algn="ctr">
+                      <a:solidFill>
+                        <a:srgbClr val="000000"/>
+                      </a:solidFill>
+                      <a:prstDash val="solid"/>
+                      <a:round/>
+                      <a:headEnd type="none" w="med" len="med"/>
+                      <a:tailEnd type="none" w="med" len="med"/>
+                    </a:lnT>
+                    <a:lnB w="6350" cap="flat" cmpd="sng" algn="ctr">
+                      <a:solidFill>
+                        <a:srgbClr val="000000"/>
+                      </a:solidFill>
+                      <a:prstDash val="solid"/>
+                      <a:round/>
+                      <a:headEnd type="none" w="med" len="med"/>
+                      <a:tailEnd type="none" w="med" len="med"/>
+                    </a:lnB>
+                    <a:solidFill>
+                      <a:srgbClr val="F4B084"/>
+                    </a:solidFill>
+                  </a:tcPr>
+                </a:tc>
+                <a:extLst>
+                  <a:ext uri="{0D108BD9-81ED-4DB2-BD59-A6C34878D82A}">
+                    <a16:rowId xmlns:a16="http://schemas.microsoft.com/office/drawing/2014/main" val="2825125973"/>
+                  </a:ext>
+                </a:extLst>
+              </a:tr>
+            </a:tbl>
+          </a:graphicData>
+        </a:graphic>
+      </p:graphicFrame>
+      <p:graphicFrame>
+        <p:nvGraphicFramePr>
+          <p:cNvPr id="13" name="Table 12">
+            <a:extLst>
+              <a:ext uri="{FF2B5EF4-FFF2-40B4-BE49-F238E27FC236}">
+                <a16:creationId xmlns:a16="http://schemas.microsoft.com/office/drawing/2014/main" id="{189A53AF-9AD5-4B84-B2E8-A660E9005373}"/>
+              </a:ext>
+            </a:extLst>
+          </p:cNvPr>
+          <p:cNvGraphicFramePr>
+            <a:graphicFrameLocks noGrp="1"/>
+          </p:cNvGraphicFramePr>
+          <p:nvPr>
+            <p:extLst>
+              <p:ext uri="{D42A27DB-BD31-4B8C-83A1-F6EECF244321}">
+                <p14:modId xmlns:p14="http://schemas.microsoft.com/office/powerpoint/2010/main" val="1320233202"/>
+              </p:ext>
+            </p:extLst>
+          </p:nvPr>
+        </p:nvGraphicFramePr>
+        <p:xfrm>
+          <a:off x="385481" y="5642643"/>
+          <a:ext cx="1891554" cy="762000"/>
+        </p:xfrm>
+        <a:graphic>
+          <a:graphicData uri="http://schemas.openxmlformats.org/drawingml/2006/table">
+            <a:tbl>
+              <a:tblPr/>
+              <a:tblGrid>
+                <a:gridCol w="1891554">
+                  <a:extLst>
+                    <a:ext uri="{9D8B030D-6E8A-4147-A177-3AD203B41FA5}">
+                      <a16:colId xmlns:a16="http://schemas.microsoft.com/office/drawing/2014/main" val="3032931731"/>
+                    </a:ext>
+                  </a:extLst>
+                </a:gridCol>
+              </a:tblGrid>
+              <a:tr h="190500">
+                <a:tc>
+                  <a:txBody>
+                    <a:bodyPr/>
+                    <a:lstStyle/>
+                    <a:p>
+                      <a:pPr algn="l" fontAlgn="ctr"/>
+                      <a:r>
+                        <a:rPr lang="da-DK" sz="1100" b="0" i="0" u="none" strike="noStrike" dirty="0">
+                          <a:solidFill>
+                            <a:srgbClr val="000000"/>
+                          </a:solidFill>
+                          <a:effectLst/>
+                          <a:latin typeface="Calibri" panose="020F0502020204030204" pitchFamily="34" charset="0"/>
+                        </a:rPr>
+                        <a:t>fremragende</a:t>
+                      </a:r>
+                    </a:p>
+                  </a:txBody>
+                  <a:tcPr marL="85725" marR="9525" marT="9525" marB="0" anchor="ctr">
+                    <a:lnL w="6350" cap="flat" cmpd="sng" algn="ctr">
+                      <a:solidFill>
+                        <a:srgbClr val="000000"/>
+                      </a:solidFill>
+                      <a:prstDash val="solid"/>
+                      <a:round/>
+                      <a:headEnd type="none" w="med" len="med"/>
+                      <a:tailEnd type="none" w="med" len="med"/>
+                    </a:lnL>
+                    <a:lnR w="6350" cap="flat" cmpd="sng" algn="ctr">
+                      <a:solidFill>
+                        <a:srgbClr val="000000"/>
+                      </a:solidFill>
+                      <a:prstDash val="solid"/>
+                      <a:round/>
+                      <a:headEnd type="none" w="med" len="med"/>
+                      <a:tailEnd type="none" w="med" len="med"/>
+                    </a:lnR>
+                    <a:lnT w="6350" cap="flat" cmpd="sng" algn="ctr">
+                      <a:solidFill>
+                        <a:srgbClr val="000000"/>
+                      </a:solidFill>
+                      <a:prstDash val="solid"/>
+                      <a:round/>
+                      <a:headEnd type="none" w="med" len="med"/>
+                      <a:tailEnd type="none" w="med" len="med"/>
+                    </a:lnT>
+                    <a:lnB w="6350" cap="flat" cmpd="sng" algn="ctr">
+                      <a:solidFill>
+                        <a:srgbClr val="000000"/>
+                      </a:solidFill>
+                      <a:prstDash val="solid"/>
+                      <a:round/>
+                      <a:headEnd type="none" w="med" len="med"/>
+                      <a:tailEnd type="none" w="med" len="med"/>
+                    </a:lnB>
+                    <a:solidFill>
+                      <a:srgbClr val="A9D08E"/>
+                    </a:solidFill>
+                  </a:tcPr>
+                </a:tc>
+                <a:extLst>
+                  <a:ext uri="{0D108BD9-81ED-4DB2-BD59-A6C34878D82A}">
+                    <a16:rowId xmlns:a16="http://schemas.microsoft.com/office/drawing/2014/main" val="3858682012"/>
+                  </a:ext>
+                </a:extLst>
+              </a:tr>
+              <a:tr h="190500">
+                <a:tc>
+                  <a:txBody>
+                    <a:bodyPr/>
+                    <a:lstStyle/>
+                    <a:p>
+                      <a:pPr algn="l" fontAlgn="ctr"/>
+                      <a:r>
+                        <a:rPr lang="da-DK" sz="1100" b="0" i="0" u="none" strike="noStrike">
+                          <a:solidFill>
+                            <a:srgbClr val="000000"/>
+                          </a:solidFill>
+                          <a:effectLst/>
+                          <a:latin typeface="Calibri" panose="020F0502020204030204" pitchFamily="34" charset="0"/>
+                        </a:rPr>
+                        <a:t>god</a:t>
+                      </a:r>
+                    </a:p>
+                  </a:txBody>
+                  <a:tcPr marL="85725" marR="9525" marT="9525" marB="0" anchor="ctr">
+                    <a:lnL w="6350" cap="flat" cmpd="sng" algn="ctr">
+                      <a:solidFill>
+                        <a:srgbClr val="000000"/>
+                      </a:solidFill>
+                      <a:prstDash val="solid"/>
+                      <a:round/>
+                      <a:headEnd type="none" w="med" len="med"/>
+                      <a:tailEnd type="none" w="med" len="med"/>
+                    </a:lnL>
+                    <a:lnR w="6350" cap="flat" cmpd="sng" algn="ctr">
+                      <a:solidFill>
+                        <a:srgbClr val="000000"/>
+                      </a:solidFill>
+                      <a:prstDash val="solid"/>
+                      <a:round/>
+                      <a:headEnd type="none" w="med" len="med"/>
+                      <a:tailEnd type="none" w="med" len="med"/>
+                    </a:lnR>
+                    <a:lnT w="6350" cap="flat" cmpd="sng" algn="ctr">
+                      <a:solidFill>
+                        <a:srgbClr val="000000"/>
+                      </a:solidFill>
+                      <a:prstDash val="solid"/>
+                      <a:round/>
+                      <a:headEnd type="none" w="med" len="med"/>
+                      <a:tailEnd type="none" w="med" len="med"/>
+                    </a:lnT>
+                    <a:lnB w="6350" cap="flat" cmpd="sng" algn="ctr">
+                      <a:solidFill>
+                        <a:srgbClr val="000000"/>
+                      </a:solidFill>
+                      <a:prstDash val="solid"/>
+                      <a:round/>
+                      <a:headEnd type="none" w="med" len="med"/>
+                      <a:tailEnd type="none" w="med" len="med"/>
+                    </a:lnB>
+                    <a:solidFill>
+                      <a:srgbClr val="C6E0B4"/>
+                    </a:solidFill>
+                  </a:tcPr>
+                </a:tc>
+                <a:extLst>
+                  <a:ext uri="{0D108BD9-81ED-4DB2-BD59-A6C34878D82A}">
+                    <a16:rowId xmlns:a16="http://schemas.microsoft.com/office/drawing/2014/main" val="120634930"/>
+                  </a:ext>
+                </a:extLst>
+              </a:tr>
+              <a:tr h="190500">
+                <a:tc>
+                  <a:txBody>
+                    <a:bodyPr/>
+                    <a:lstStyle/>
+                    <a:p>
+                      <a:pPr algn="l" fontAlgn="ctr"/>
+                      <a:r>
+                        <a:rPr lang="da-DK" sz="1100" b="0" i="0" u="none" strike="noStrike">
+                          <a:solidFill>
+                            <a:srgbClr val="000000"/>
+                          </a:solidFill>
+                          <a:effectLst/>
+                          <a:latin typeface="Calibri" panose="020F0502020204030204" pitchFamily="34" charset="0"/>
+                        </a:rPr>
+                        <a:t>middel</a:t>
+                      </a:r>
+                    </a:p>
+                  </a:txBody>
+                  <a:tcPr marL="85725" marR="9525" marT="9525" marB="0" anchor="ctr">
+                    <a:lnL w="6350" cap="flat" cmpd="sng" algn="ctr">
+                      <a:solidFill>
+                        <a:srgbClr val="000000"/>
+                      </a:solidFill>
+                      <a:prstDash val="solid"/>
+                      <a:round/>
+                      <a:headEnd type="none" w="med" len="med"/>
+                      <a:tailEnd type="none" w="med" len="med"/>
+                    </a:lnL>
+                    <a:lnR w="6350" cap="flat" cmpd="sng" algn="ctr">
+                      <a:solidFill>
+                        <a:srgbClr val="000000"/>
+                      </a:solidFill>
+                      <a:prstDash val="solid"/>
+                      <a:round/>
+                      <a:headEnd type="none" w="med" len="med"/>
+                      <a:tailEnd type="none" w="med" len="med"/>
+                    </a:lnR>
+                    <a:lnT w="6350" cap="flat" cmpd="sng" algn="ctr">
+                      <a:solidFill>
+                        <a:srgbClr val="000000"/>
+                      </a:solidFill>
+                      <a:prstDash val="solid"/>
+                      <a:round/>
+                      <a:headEnd type="none" w="med" len="med"/>
+                      <a:tailEnd type="none" w="med" len="med"/>
+                    </a:lnT>
+                    <a:lnB w="6350" cap="flat" cmpd="sng" algn="ctr">
+                      <a:solidFill>
+                        <a:srgbClr val="000000"/>
+                      </a:solidFill>
+                      <a:prstDash val="solid"/>
+                      <a:round/>
+                      <a:headEnd type="none" w="med" len="med"/>
+                      <a:tailEnd type="none" w="med" len="med"/>
+                    </a:lnB>
+                    <a:solidFill>
+                      <a:srgbClr val="FFD966"/>
+                    </a:solidFill>
+                  </a:tcPr>
+                </a:tc>
+                <a:extLst>
+                  <a:ext uri="{0D108BD9-81ED-4DB2-BD59-A6C34878D82A}">
+                    <a16:rowId xmlns:a16="http://schemas.microsoft.com/office/drawing/2014/main" val="2450306236"/>
+                  </a:ext>
+                </a:extLst>
+              </a:tr>
+              <a:tr h="190500">
+                <a:tc>
+                  <a:txBody>
+                    <a:bodyPr/>
+                    <a:lstStyle/>
+                    <a:p>
+                      <a:pPr algn="l" fontAlgn="ctr"/>
+                      <a:r>
+                        <a:rPr lang="da-DK" sz="1100" b="0" i="0" u="none" strike="noStrike" dirty="0">
+                          <a:solidFill>
+                            <a:srgbClr val="000000"/>
+                          </a:solidFill>
+                          <a:effectLst/>
+                          <a:latin typeface="Calibri" panose="020F0502020204030204" pitchFamily="34" charset="0"/>
+                        </a:rPr>
+                        <a:t>beskeden/mangelfuld</a:t>
+                      </a:r>
+                    </a:p>
+                  </a:txBody>
+                  <a:tcPr marL="85725" marR="9525" marT="9525" marB="0" anchor="ctr">
+                    <a:lnL w="6350" cap="flat" cmpd="sng" algn="ctr">
+                      <a:solidFill>
+                        <a:srgbClr val="000000"/>
+                      </a:solidFill>
+                      <a:prstDash val="solid"/>
+                      <a:round/>
+                      <a:headEnd type="none" w="med" len="med"/>
+                      <a:tailEnd type="none" w="med" len="med"/>
+                    </a:lnL>
+                    <a:lnR w="6350" cap="flat" cmpd="sng" algn="ctr">
+                      <a:solidFill>
+                        <a:srgbClr val="000000"/>
+                      </a:solidFill>
+                      <a:prstDash val="solid"/>
+                      <a:round/>
+                      <a:headEnd type="none" w="med" len="med"/>
+                      <a:tailEnd type="none" w="med" len="med"/>
+                    </a:lnR>
+                    <a:lnT w="6350" cap="flat" cmpd="sng" algn="ctr">
+                      <a:solidFill>
+                        <a:srgbClr val="000000"/>
+                      </a:solidFill>
+                      <a:prstDash val="solid"/>
+                      <a:round/>
+                      <a:headEnd type="none" w="med" len="med"/>
+                      <a:tailEnd type="none" w="med" len="med"/>
+                    </a:lnT>
+                    <a:lnB w="6350" cap="flat" cmpd="sng" algn="ctr">
+                      <a:solidFill>
+                        <a:srgbClr val="000000"/>
+                      </a:solidFill>
+                      <a:prstDash val="solid"/>
+                      <a:round/>
+                      <a:headEnd type="none" w="med" len="med"/>
+                      <a:tailEnd type="none" w="med" len="med"/>
+                    </a:lnB>
+                    <a:solidFill>
+                      <a:srgbClr val="F4B084"/>
+                    </a:solidFill>
+                  </a:tcPr>
+                </a:tc>
+                <a:extLst>
+                  <a:ext uri="{0D108BD9-81ED-4DB2-BD59-A6C34878D82A}">
+                    <a16:rowId xmlns:a16="http://schemas.microsoft.com/office/drawing/2014/main" val="2192751297"/>
+                  </a:ext>
+                </a:extLst>
+              </a:tr>
+            </a:tbl>
           </a:graphicData>
         </a:graphic>
       </p:graphicFrame>
@@ -17551,15 +20156,6 @@
 </file>
 
 <file path=customXml/item1.xml><?xml version="1.0" encoding="utf-8"?>
-<?mso-contentType ?>
-<FormTemplates xmlns="http://schemas.microsoft.com/sharepoint/v3/contenttype/forms">
-  <Display>DocumentLibraryForm</Display>
-  <Edit>DocumentLibraryForm</Edit>
-  <New>DocumentLibraryForm</New>
-</FormTemplates>
-</file>
-
-<file path=customXml/item2.xml><?xml version="1.0" encoding="utf-8"?>
 <ct:contentTypeSchema xmlns:ct="http://schemas.microsoft.com/office/2006/metadata/contentType" xmlns:ma="http://schemas.microsoft.com/office/2006/metadata/properties/metaAttributes" ct:_="" ma:_="" ma:contentTypeName="Dokument" ma:contentTypeID="0x0101007701BA1634B2B04D8AB99B32221FEA66" ma:contentTypeVersion="20" ma:contentTypeDescription="Opret et nyt dokument." ma:contentTypeScope="" ma:versionID="6bc72618500a8a6efef4e15fe3458a19">
   <xsd:schema xmlns:xsd="http://www.w3.org/2001/XMLSchema" xmlns:xs="http://www.w3.org/2001/XMLSchema" xmlns:p="http://schemas.microsoft.com/office/2006/metadata/properties" xmlns:ns2="12ff74cc-9611-4422-8f5f-2fd59a0d1353" xmlns:ns3="eee2f643-61f1-4bc5-bd2f-0ddea5310e08" targetNamespace="http://schemas.microsoft.com/office/2006/metadata/properties" ma:root="true" ma:fieldsID="fb24fa6afb0e51ed4580ee901350a5d1" ns2:_="" ns3:_="">
     <xsd:import namespace="12ff74cc-9611-4422-8f5f-2fd59a0d1353"/>
@@ -17822,6 +20418,15 @@
 </ct:contentTypeSchema>
 </file>
 
+<file path=customXml/item2.xml><?xml version="1.0" encoding="utf-8"?>
+<?mso-contentType ?>
+<FormTemplates xmlns="http://schemas.microsoft.com/sharepoint/v3/contenttype/forms">
+  <Display>DocumentLibraryForm</Display>
+  <Edit>DocumentLibraryForm</Edit>
+  <New>DocumentLibraryForm</New>
+</FormTemplates>
+</file>
+
 <file path=customXml/item3.xml><?xml version="1.0" encoding="utf-8"?>
 <p:properties xmlns:p="http://schemas.microsoft.com/office/2006/metadata/properties" xmlns:xsi="http://www.w3.org/2001/XMLSchema-instance" xmlns:pc="http://schemas.microsoft.com/office/infopath/2007/PartnerControls">
   <documentManagement>
@@ -17836,14 +20441,6 @@
 </file>
 
 <file path=customXml/itemProps1.xml><?xml version="1.0" encoding="utf-8"?>
-<ds:datastoreItem xmlns:ds="http://schemas.openxmlformats.org/officeDocument/2006/customXml" ds:itemID="{14AB1A68-8018-4E90-BA70-6DC9173B1623}">
-  <ds:schemaRefs>
-    <ds:schemaRef ds:uri="http://schemas.microsoft.com/sharepoint/v3/contenttype/forms"/>
-  </ds:schemaRefs>
-</ds:datastoreItem>
-</file>
-
-<file path=customXml/itemProps2.xml><?xml version="1.0" encoding="utf-8"?>
 <ds:datastoreItem xmlns:ds="http://schemas.openxmlformats.org/officeDocument/2006/customXml" ds:itemID="{20E7631D-FF33-4A81-83A1-18D3900D12F5}">
   <ds:schemaRefs>
     <ds:schemaRef ds:uri="12ff74cc-9611-4422-8f5f-2fd59a0d1353"/>
@@ -17858,6 +20455,14 @@
     <ds:schemaRef ds:uri="http://schemas.microsoft.com/office/infopath/2007/PartnerControls"/>
     <ds:schemaRef ds:uri="http://schemas.openxmlformats.org/package/2006/metadata/core-properties"/>
     <ds:schemaRef ds:uri="http://www.w3.org/2001/XMLSchema"/>
+  </ds:schemaRefs>
+</ds:datastoreItem>
+</file>
+
+<file path=customXml/itemProps2.xml><?xml version="1.0" encoding="utf-8"?>
+<ds:datastoreItem xmlns:ds="http://schemas.openxmlformats.org/officeDocument/2006/customXml" ds:itemID="{14AB1A68-8018-4E90-BA70-6DC9173B1623}">
+  <ds:schemaRefs>
+    <ds:schemaRef ds:uri="http://schemas.microsoft.com/sharepoint/v3/contenttype/forms"/>
   </ds:schemaRefs>
 </ds:datastoreItem>
 </file>
